--- a/source/MySEProject/Documentation/ML 2425-03 Implement Anomaly Detection Sample.pptx
+++ b/source/MySEProject/Documentation/ML 2425-03 Implement Anomaly Detection Sample.pptx
@@ -2129,6 +2129,13 @@
         </dgm:presLayoutVars>
       </dgm:prSet>
       <dgm:spPr/>
+      <dgm:t>
+        <a:bodyPr/>
+        <a:lstStyle/>
+        <a:p>
+          <a:endParaRPr lang="en-US"/>
+        </a:p>
+      </dgm:t>
     </dgm:pt>
     <dgm:pt modelId="{81784343-788E-41CB-B4EC-4AC10468D5D3}" type="pres">
       <dgm:prSet presAssocID="{4EDAC842-54C1-4E7F-9C98-8C5BC48DF79C}" presName="compNode" presStyleCnt="0"/>
@@ -2144,7 +2151,7 @@
                 <a14:useLocalDpi xmlns:a14="http://schemas.microsoft.com/office/drawing/2010/main" val="0"/>
               </a:ext>
               <a:ext uri="{96DAC541-7B7A-43D3-8B79-37D633B846F1}">
-                <asvg:svgBlip xmlns:asvg="http://schemas.microsoft.com/office/drawing/2016/SVG/main" r:embed="rId2"/>
+                <asvg:svgBlip xmlns="" xmlns:asvg="http://schemas.microsoft.com/office/drawing/2016/SVG/main" r:embed="rId2"/>
               </a:ext>
             </a:extLst>
           </a:blip>
@@ -2156,6 +2163,13 @@
           <a:noFill/>
         </a:ln>
       </dgm:spPr>
+      <dgm:t>
+        <a:bodyPr/>
+        <a:lstStyle/>
+        <a:p>
+          <a:endParaRPr lang="en-US"/>
+        </a:p>
+      </dgm:t>
       <dgm:extLst>
         <a:ext uri="{E40237B7-FDA0-4F09-8148-C483321AD2D9}">
           <dgm14:cNvPr xmlns:dgm14="http://schemas.microsoft.com/office/drawing/2010/diagram" id="0" name="" descr="Document"/>
@@ -2174,6 +2188,13 @@
         </dgm:presLayoutVars>
       </dgm:prSet>
       <dgm:spPr/>
+      <dgm:t>
+        <a:bodyPr/>
+        <a:lstStyle/>
+        <a:p>
+          <a:endParaRPr lang="en-US"/>
+        </a:p>
+      </dgm:t>
     </dgm:pt>
     <dgm:pt modelId="{64BEFC8C-05C6-4D1F-AB35-DBAD2164D84A}" type="pres">
       <dgm:prSet presAssocID="{0961DAFC-C41B-4379-B2B8-0BD3DC46A803}" presName="sibTrans" presStyleCnt="0"/>
@@ -2193,7 +2214,7 @@
                 <a14:useLocalDpi xmlns:a14="http://schemas.microsoft.com/office/drawing/2010/main" val="0"/>
               </a:ext>
               <a:ext uri="{96DAC541-7B7A-43D3-8B79-37D633B846F1}">
-                <asvg:svgBlip xmlns:asvg="http://schemas.microsoft.com/office/drawing/2016/SVG/main" r:embed="rId4"/>
+                <asvg:svgBlip xmlns="" xmlns:asvg="http://schemas.microsoft.com/office/drawing/2016/SVG/main" r:embed="rId4"/>
               </a:ext>
             </a:extLst>
           </a:blip>
@@ -2205,6 +2226,13 @@
           <a:noFill/>
         </a:ln>
       </dgm:spPr>
+      <dgm:t>
+        <a:bodyPr/>
+        <a:lstStyle/>
+        <a:p>
+          <a:endParaRPr lang="en-US"/>
+        </a:p>
+      </dgm:t>
       <dgm:extLst>
         <a:ext uri="{E40237B7-FDA0-4F09-8148-C483321AD2D9}">
           <dgm14:cNvPr xmlns:dgm14="http://schemas.microsoft.com/office/drawing/2010/diagram" id="0" name="" descr="Bar chart"/>
@@ -2223,6 +2251,13 @@
         </dgm:presLayoutVars>
       </dgm:prSet>
       <dgm:spPr/>
+      <dgm:t>
+        <a:bodyPr/>
+        <a:lstStyle/>
+        <a:p>
+          <a:endParaRPr lang="en-US"/>
+        </a:p>
+      </dgm:t>
     </dgm:pt>
     <dgm:pt modelId="{54667BFA-16DA-425D-B05B-BF97227F7192}" type="pres">
       <dgm:prSet presAssocID="{567852B4-1E10-42B4-BD3E-93F3BA689CD8}" presName="sibTrans" presStyleCnt="0"/>
@@ -2242,7 +2277,7 @@
                 <a14:useLocalDpi xmlns:a14="http://schemas.microsoft.com/office/drawing/2010/main" val="0"/>
               </a:ext>
               <a:ext uri="{96DAC541-7B7A-43D3-8B79-37D633B846F1}">
-                <asvg:svgBlip xmlns:asvg="http://schemas.microsoft.com/office/drawing/2016/SVG/main" r:embed="rId6"/>
+                <asvg:svgBlip xmlns="" xmlns:asvg="http://schemas.microsoft.com/office/drawing/2016/SVG/main" r:embed="rId6"/>
               </a:ext>
             </a:extLst>
           </a:blip>
@@ -2254,6 +2289,13 @@
           <a:noFill/>
         </a:ln>
       </dgm:spPr>
+      <dgm:t>
+        <a:bodyPr/>
+        <a:lstStyle/>
+        <a:p>
+          <a:endParaRPr lang="en-US"/>
+        </a:p>
+      </dgm:t>
       <dgm:extLst>
         <a:ext uri="{E40237B7-FDA0-4F09-8148-C483321AD2D9}">
           <dgm14:cNvPr xmlns:dgm14="http://schemas.microsoft.com/office/drawing/2010/diagram" id="0" name="" descr="Checkmark"/>
@@ -2272,6 +2314,13 @@
         </dgm:presLayoutVars>
       </dgm:prSet>
       <dgm:spPr/>
+      <dgm:t>
+        <a:bodyPr/>
+        <a:lstStyle/>
+        <a:p>
+          <a:endParaRPr lang="en-US"/>
+        </a:p>
+      </dgm:t>
     </dgm:pt>
     <dgm:pt modelId="{4215AEA0-04B1-492E-80A8-5331BF7730C5}" type="pres">
       <dgm:prSet presAssocID="{15F1B1B3-C3AA-4F28-8C57-641B81DC8069}" presName="sibTrans" presStyleCnt="0"/>
@@ -2291,7 +2340,7 @@
                 <a14:useLocalDpi xmlns:a14="http://schemas.microsoft.com/office/drawing/2010/main" val="0"/>
               </a:ext>
               <a:ext uri="{96DAC541-7B7A-43D3-8B79-37D633B846F1}">
-                <asvg:svgBlip xmlns:asvg="http://schemas.microsoft.com/office/drawing/2016/SVG/main" r:embed="rId6"/>
+                <asvg:svgBlip xmlns="" xmlns:asvg="http://schemas.microsoft.com/office/drawing/2016/SVG/main" r:embed="rId6"/>
               </a:ext>
             </a:extLst>
           </a:blip>
@@ -2303,6 +2352,13 @@
           <a:noFill/>
         </a:ln>
       </dgm:spPr>
+      <dgm:t>
+        <a:bodyPr/>
+        <a:lstStyle/>
+        <a:p>
+          <a:endParaRPr lang="en-US"/>
+        </a:p>
+      </dgm:t>
       <dgm:extLst>
         <a:ext uri="{E40237B7-FDA0-4F09-8148-C483321AD2D9}">
           <dgm14:cNvPr xmlns:dgm14="http://schemas.microsoft.com/office/drawing/2010/diagram" id="0" name="" descr="Checkmark"/>
@@ -2321,6 +2377,13 @@
         </dgm:presLayoutVars>
       </dgm:prSet>
       <dgm:spPr/>
+      <dgm:t>
+        <a:bodyPr/>
+        <a:lstStyle/>
+        <a:p>
+          <a:endParaRPr lang="en-US"/>
+        </a:p>
+      </dgm:t>
     </dgm:pt>
     <dgm:pt modelId="{DE7DAB89-BE69-47BB-9C76-449CFF2DFA71}" type="pres">
       <dgm:prSet presAssocID="{175A182C-321A-4246-8514-93951525A4A3}" presName="sibTrans" presStyleCnt="0"/>
@@ -2340,7 +2403,7 @@
                 <a14:useLocalDpi xmlns:a14="http://schemas.microsoft.com/office/drawing/2010/main" val="0"/>
               </a:ext>
               <a:ext uri="{96DAC541-7B7A-43D3-8B79-37D633B846F1}">
-                <asvg:svgBlip xmlns:asvg="http://schemas.microsoft.com/office/drawing/2016/SVG/main" r:embed="rId8"/>
+                <asvg:svgBlip xmlns="" xmlns:asvg="http://schemas.microsoft.com/office/drawing/2016/SVG/main" r:embed="rId8"/>
               </a:ext>
             </a:extLst>
           </a:blip>
@@ -2352,6 +2415,13 @@
           <a:noFill/>
         </a:ln>
       </dgm:spPr>
+      <dgm:t>
+        <a:bodyPr/>
+        <a:lstStyle/>
+        <a:p>
+          <a:endParaRPr lang="en-US"/>
+        </a:p>
+      </dgm:t>
       <dgm:extLst>
         <a:ext uri="{E40237B7-FDA0-4F09-8148-C483321AD2D9}">
           <dgm14:cNvPr xmlns:dgm14="http://schemas.microsoft.com/office/drawing/2010/diagram" id="0" name="" descr="Books"/>
@@ -2370,6 +2440,13 @@
         </dgm:presLayoutVars>
       </dgm:prSet>
       <dgm:spPr/>
+      <dgm:t>
+        <a:bodyPr/>
+        <a:lstStyle/>
+        <a:p>
+          <a:endParaRPr lang="en-US"/>
+        </a:p>
+      </dgm:t>
     </dgm:pt>
     <dgm:pt modelId="{21BBB4E9-707A-4BE6-8349-82916E11F5E5}" type="pres">
       <dgm:prSet presAssocID="{D189DA1F-5CB5-4B59-9F16-9C0AA45FE0B6}" presName="sibTrans" presStyleCnt="0"/>
@@ -2389,7 +2466,7 @@
                 <a14:useLocalDpi xmlns:a14="http://schemas.microsoft.com/office/drawing/2010/main" val="0"/>
               </a:ext>
               <a:ext uri="{96DAC541-7B7A-43D3-8B79-37D633B846F1}">
-                <asvg:svgBlip xmlns:asvg="http://schemas.microsoft.com/office/drawing/2016/SVG/main" r:embed="rId10"/>
+                <asvg:svgBlip xmlns="" xmlns:asvg="http://schemas.microsoft.com/office/drawing/2016/SVG/main" r:embed="rId10"/>
               </a:ext>
             </a:extLst>
           </a:blip>
@@ -2401,6 +2478,13 @@
           <a:noFill/>
         </a:ln>
       </dgm:spPr>
+      <dgm:t>
+        <a:bodyPr/>
+        <a:lstStyle/>
+        <a:p>
+          <a:endParaRPr lang="en-US"/>
+        </a:p>
+      </dgm:t>
       <dgm:extLst>
         <a:ext uri="{E40237B7-FDA0-4F09-8148-C483321AD2D9}">
           <dgm14:cNvPr xmlns:dgm14="http://schemas.microsoft.com/office/drawing/2010/diagram" id="0" name="" descr="Check List"/>
@@ -2419,22 +2503,29 @@
         </dgm:presLayoutVars>
       </dgm:prSet>
       <dgm:spPr/>
+      <dgm:t>
+        <a:bodyPr/>
+        <a:lstStyle/>
+        <a:p>
+          <a:endParaRPr lang="en-US"/>
+        </a:p>
+      </dgm:t>
     </dgm:pt>
   </dgm:ptLst>
   <dgm:cxnLst>
-    <dgm:cxn modelId="{A58AAF0A-62BB-4467-83E1-D8C35D60B3A8}" type="presOf" srcId="{555B8B5B-EF9B-4E72-A1BF-690C8541687B}" destId="{A549B15F-4E9A-4B58-8F61-8AE7255B9D15}" srcOrd="0" destOrd="0" presId="urn:microsoft.com/office/officeart/2018/2/layout/IconLabelList"/>
+    <dgm:cxn modelId="{D281C8D0-F024-42F8-A930-C0EF5082DD38}" srcId="{25E74C5B-2672-4ECF-B860-8DE1329C16C1}" destId="{647BFA5B-F7D8-4C05-9BA8-13920309D771}" srcOrd="2" destOrd="0" parTransId="{4954730A-600D-44CD-B842-1B8E3CF0DE17}" sibTransId="{15F1B1B3-C3AA-4F28-8C57-641B81DC8069}"/>
+    <dgm:cxn modelId="{2BB80D96-CF72-4E11-8F60-352E5EFD92C1}" srcId="{25E74C5B-2672-4ECF-B860-8DE1329C16C1}" destId="{B905B68A-066B-4908-B61F-6B62477006D9}" srcOrd="3" destOrd="0" parTransId="{BB2520BC-3753-41D2-952B-A1749C2A13F0}" sibTransId="{175A182C-321A-4246-8514-93951525A4A3}"/>
     <dgm:cxn modelId="{0EBD8D0D-C11D-42C6-973C-1A2CD9ED6E7D}" type="presOf" srcId="{B905B68A-066B-4908-B61F-6B62477006D9}" destId="{2F3064E7-8078-4B0E-8356-51AD90E234CA}" srcOrd="0" destOrd="0" presId="urn:microsoft.com/office/officeart/2018/2/layout/IconLabelList"/>
     <dgm:cxn modelId="{BBE9A326-B5A3-43B4-8047-13F5BAE7BB46}" type="presOf" srcId="{25E74C5B-2672-4ECF-B860-8DE1329C16C1}" destId="{304C74C4-7F63-466D-81AB-68CF38E391E9}" srcOrd="0" destOrd="0" presId="urn:microsoft.com/office/officeart/2018/2/layout/IconLabelList"/>
+    <dgm:cxn modelId="{BC137CA9-F8DA-4602-B882-270EC46523B5}" srcId="{25E74C5B-2672-4ECF-B860-8DE1329C16C1}" destId="{1C327870-1BEC-49D2-891F-A2C61E4221D7}" srcOrd="5" destOrd="0" parTransId="{D7F31CE7-E852-4CCC-86CB-87C3CB0755B5}" sibTransId="{0B580D40-5283-48AA-A081-0CCE0E718FC1}"/>
     <dgm:cxn modelId="{8841656A-0F07-4665-9B79-F874A87CF7B7}" type="presOf" srcId="{4EDAC842-54C1-4E7F-9C98-8C5BC48DF79C}" destId="{14189B67-782B-454A-AB4F-539B0F1DF49E}" srcOrd="0" destOrd="0" presId="urn:microsoft.com/office/officeart/2018/2/layout/IconLabelList"/>
-    <dgm:cxn modelId="{2BB80D96-CF72-4E11-8F60-352E5EFD92C1}" srcId="{25E74C5B-2672-4ECF-B860-8DE1329C16C1}" destId="{B905B68A-066B-4908-B61F-6B62477006D9}" srcOrd="3" destOrd="0" parTransId="{BB2520BC-3753-41D2-952B-A1749C2A13F0}" sibTransId="{175A182C-321A-4246-8514-93951525A4A3}"/>
+    <dgm:cxn modelId="{B79BE8E6-3E35-47A2-B14D-4C905CB2E8CF}" srcId="{25E74C5B-2672-4ECF-B860-8DE1329C16C1}" destId="{555B8B5B-EF9B-4E72-A1BF-690C8541687B}" srcOrd="1" destOrd="0" parTransId="{247DBD04-D25A-487D-96A2-F0504FD4DEB9}" sibTransId="{567852B4-1E10-42B4-BD3E-93F3BA689CD8}"/>
+    <dgm:cxn modelId="{A58AAF0A-62BB-4467-83E1-D8C35D60B3A8}" type="presOf" srcId="{555B8B5B-EF9B-4E72-A1BF-690C8541687B}" destId="{A549B15F-4E9A-4B58-8F61-8AE7255B9D15}" srcOrd="0" destOrd="0" presId="urn:microsoft.com/office/officeart/2018/2/layout/IconLabelList"/>
+    <dgm:cxn modelId="{1CEF58B7-4319-45B5-8B96-D532DD5516E6}" srcId="{25E74C5B-2672-4ECF-B860-8DE1329C16C1}" destId="{DE61E1BE-3107-4AF5-85D6-2010DA115631}" srcOrd="4" destOrd="0" parTransId="{E7309761-06F3-48A5-8ED7-4063BDB48E0A}" sibTransId="{D189DA1F-5CB5-4B59-9F16-9C0AA45FE0B6}"/>
+    <dgm:cxn modelId="{853B1BB0-3D64-4656-BCF6-360FAE694240}" type="presOf" srcId="{647BFA5B-F7D8-4C05-9BA8-13920309D771}" destId="{1F807767-40A8-413F-889B-B5039E41FB50}" srcOrd="0" destOrd="0" presId="urn:microsoft.com/office/officeart/2018/2/layout/IconLabelList"/>
+    <dgm:cxn modelId="{0FC86AA2-0CF8-4CBE-B00F-D2424F4AD4D9}" srcId="{25E74C5B-2672-4ECF-B860-8DE1329C16C1}" destId="{4EDAC842-54C1-4E7F-9C98-8C5BC48DF79C}" srcOrd="0" destOrd="0" parTransId="{8A9768EE-D4B5-4877-8945-04D7A6F873D0}" sibTransId="{0961DAFC-C41B-4379-B2B8-0BD3DC46A803}"/>
     <dgm:cxn modelId="{2F078A9B-7D08-4978-9926-8281461330C6}" type="presOf" srcId="{1C327870-1BEC-49D2-891F-A2C61E4221D7}" destId="{0D69C5E4-0A3C-4832-A770-A8184C370919}" srcOrd="0" destOrd="0" presId="urn:microsoft.com/office/officeart/2018/2/layout/IconLabelList"/>
-    <dgm:cxn modelId="{0FC86AA2-0CF8-4CBE-B00F-D2424F4AD4D9}" srcId="{25E74C5B-2672-4ECF-B860-8DE1329C16C1}" destId="{4EDAC842-54C1-4E7F-9C98-8C5BC48DF79C}" srcOrd="0" destOrd="0" parTransId="{8A9768EE-D4B5-4877-8945-04D7A6F873D0}" sibTransId="{0961DAFC-C41B-4379-B2B8-0BD3DC46A803}"/>
     <dgm:cxn modelId="{332F43A7-0328-4B3A-A1FC-F6DB5F19DD4A}" type="presOf" srcId="{DE61E1BE-3107-4AF5-85D6-2010DA115631}" destId="{7AE32A8A-B008-459B-9A12-792F91A5CCB5}" srcOrd="0" destOrd="0" presId="urn:microsoft.com/office/officeart/2018/2/layout/IconLabelList"/>
-    <dgm:cxn modelId="{BC137CA9-F8DA-4602-B882-270EC46523B5}" srcId="{25E74C5B-2672-4ECF-B860-8DE1329C16C1}" destId="{1C327870-1BEC-49D2-891F-A2C61E4221D7}" srcOrd="5" destOrd="0" parTransId="{D7F31CE7-E852-4CCC-86CB-87C3CB0755B5}" sibTransId="{0B580D40-5283-48AA-A081-0CCE0E718FC1}"/>
-    <dgm:cxn modelId="{853B1BB0-3D64-4656-BCF6-360FAE694240}" type="presOf" srcId="{647BFA5B-F7D8-4C05-9BA8-13920309D771}" destId="{1F807767-40A8-413F-889B-B5039E41FB50}" srcOrd="0" destOrd="0" presId="urn:microsoft.com/office/officeart/2018/2/layout/IconLabelList"/>
-    <dgm:cxn modelId="{1CEF58B7-4319-45B5-8B96-D532DD5516E6}" srcId="{25E74C5B-2672-4ECF-B860-8DE1329C16C1}" destId="{DE61E1BE-3107-4AF5-85D6-2010DA115631}" srcOrd="4" destOrd="0" parTransId="{E7309761-06F3-48A5-8ED7-4063BDB48E0A}" sibTransId="{D189DA1F-5CB5-4B59-9F16-9C0AA45FE0B6}"/>
-    <dgm:cxn modelId="{D281C8D0-F024-42F8-A930-C0EF5082DD38}" srcId="{25E74C5B-2672-4ECF-B860-8DE1329C16C1}" destId="{647BFA5B-F7D8-4C05-9BA8-13920309D771}" srcOrd="2" destOrd="0" parTransId="{4954730A-600D-44CD-B842-1B8E3CF0DE17}" sibTransId="{15F1B1B3-C3AA-4F28-8C57-641B81DC8069}"/>
-    <dgm:cxn modelId="{B79BE8E6-3E35-47A2-B14D-4C905CB2E8CF}" srcId="{25E74C5B-2672-4ECF-B860-8DE1329C16C1}" destId="{555B8B5B-EF9B-4E72-A1BF-690C8541687B}" srcOrd="1" destOrd="0" parTransId="{247DBD04-D25A-487D-96A2-F0504FD4DEB9}" sibTransId="{567852B4-1E10-42B4-BD3E-93F3BA689CD8}"/>
     <dgm:cxn modelId="{A9475288-A395-413E-A010-A5386C75136E}" type="presParOf" srcId="{304C74C4-7F63-466D-81AB-68CF38E391E9}" destId="{81784343-788E-41CB-B4EC-4AC10468D5D3}" srcOrd="0" destOrd="0" presId="urn:microsoft.com/office/officeart/2018/2/layout/IconLabelList"/>
     <dgm:cxn modelId="{878565F1-597C-4BFA-BC6C-B1A2E1E5F65F}" type="presParOf" srcId="{81784343-788E-41CB-B4EC-4AC10468D5D3}" destId="{9482CFC1-1339-487B-B9B2-7316F7A06163}" srcOrd="0" destOrd="0" presId="urn:microsoft.com/office/officeart/2018/2/layout/IconLabelList"/>
     <dgm:cxn modelId="{64D2DE3B-2A8F-4F21-B542-1AFF56E8E825}" type="presParOf" srcId="{81784343-788E-41CB-B4EC-4AC10468D5D3}" destId="{4F0565A6-5A56-447C-A7D6-AAD9CA675252}" srcOrd="1" destOrd="0" presId="urn:microsoft.com/office/officeart/2018/2/layout/IconLabelList"/>
@@ -2473,7 +2564,7 @@
             <a14:useLocalDpi xmlns:a14="http://schemas.microsoft.com/office/drawing/2010/main" val="0"/>
           </a:ext>
           <a:ext uri="{96DAC541-7B7A-43D3-8B79-37D633B846F1}">
-            <asvg:svgBlip xmlns:asvg="http://schemas.microsoft.com/office/drawing/2016/SVG/main" r:embed="rId12"/>
+            <asvg:svgBlip xmlns="" xmlns:asvg="http://schemas.microsoft.com/office/drawing/2016/SVG/main" r:embed="rId12"/>
           </a:ext>
         </a:extLst>
       </a:blip>
@@ -2668,6 +2759,13 @@
         </dgm:presLayoutVars>
       </dgm:prSet>
       <dgm:spPr/>
+      <dgm:t>
+        <a:bodyPr/>
+        <a:lstStyle/>
+        <a:p>
+          <a:endParaRPr lang="en-US"/>
+        </a:p>
+      </dgm:t>
     </dgm:pt>
     <dgm:pt modelId="{AC9C9FD7-72E1-450D-AFBC-70B95E0A4A03}" type="pres">
       <dgm:prSet presAssocID="{C48DFD87-6530-40A0-A5EB-ECC42D9A8F49}" presName="thickLine" presStyleLbl="alignNode1" presStyleIdx="0" presStyleCnt="4"/>
@@ -2680,6 +2778,13 @@
     <dgm:pt modelId="{BF639F22-1ADB-4D7C-8145-31641E8DEBD0}" type="pres">
       <dgm:prSet presAssocID="{C48DFD87-6530-40A0-A5EB-ECC42D9A8F49}" presName="tx1" presStyleLbl="revTx" presStyleIdx="0" presStyleCnt="4"/>
       <dgm:spPr/>
+      <dgm:t>
+        <a:bodyPr/>
+        <a:lstStyle/>
+        <a:p>
+          <a:endParaRPr lang="en-US"/>
+        </a:p>
+      </dgm:t>
     </dgm:pt>
     <dgm:pt modelId="{00E3B565-F1AE-481C-99D3-A10E2CBB6916}" type="pres">
       <dgm:prSet presAssocID="{C48DFD87-6530-40A0-A5EB-ECC42D9A8F49}" presName="vert1" presStyleCnt="0"/>
@@ -2696,6 +2801,13 @@
     <dgm:pt modelId="{EFFF1A40-2806-4BC8-AFAE-AD3E674D8EC7}" type="pres">
       <dgm:prSet presAssocID="{239BF204-3037-4A5E-B416-AC907A0994CD}" presName="tx1" presStyleLbl="revTx" presStyleIdx="1" presStyleCnt="4"/>
       <dgm:spPr/>
+      <dgm:t>
+        <a:bodyPr/>
+        <a:lstStyle/>
+        <a:p>
+          <a:endParaRPr lang="en-US"/>
+        </a:p>
+      </dgm:t>
     </dgm:pt>
     <dgm:pt modelId="{189E714B-FC97-4EA9-82B1-0C29AC85C604}" type="pres">
       <dgm:prSet presAssocID="{239BF204-3037-4A5E-B416-AC907A0994CD}" presName="vert1" presStyleCnt="0"/>
@@ -2712,6 +2824,13 @@
     <dgm:pt modelId="{0D6728CC-35DE-4DB9-BF91-26661D0FC45F}" type="pres">
       <dgm:prSet presAssocID="{5F7FBEF5-078E-46B7-AE94-106347F91206}" presName="tx1" presStyleLbl="revTx" presStyleIdx="2" presStyleCnt="4"/>
       <dgm:spPr/>
+      <dgm:t>
+        <a:bodyPr/>
+        <a:lstStyle/>
+        <a:p>
+          <a:endParaRPr lang="en-US"/>
+        </a:p>
+      </dgm:t>
     </dgm:pt>
     <dgm:pt modelId="{17881B96-D541-42EF-BBB6-5FF4913E5644}" type="pres">
       <dgm:prSet presAssocID="{5F7FBEF5-078E-46B7-AE94-106347F91206}" presName="vert1" presStyleCnt="0"/>
@@ -2728,6 +2847,13 @@
     <dgm:pt modelId="{363885E6-19AA-4CEF-A807-E53B6948645D}" type="pres">
       <dgm:prSet presAssocID="{F6937E21-265F-4588-A698-11F7D370BED1}" presName="tx1" presStyleLbl="revTx" presStyleIdx="3" presStyleCnt="4"/>
       <dgm:spPr/>
+      <dgm:t>
+        <a:bodyPr/>
+        <a:lstStyle/>
+        <a:p>
+          <a:endParaRPr lang="en-US"/>
+        </a:p>
+      </dgm:t>
     </dgm:pt>
     <dgm:pt modelId="{3BE72B72-0103-44E2-BF72-FCAF4E6FBE24}" type="pres">
       <dgm:prSet presAssocID="{F6937E21-265F-4588-A698-11F7D370BED1}" presName="vert1" presStyleCnt="0"/>
@@ -2735,15 +2861,15 @@
     </dgm:pt>
   </dgm:ptLst>
   <dgm:cxnLst>
-    <dgm:cxn modelId="{BD59110D-4F66-41F5-95B4-1F305C54569E}" srcId="{47892B76-4EBF-42EE-842A-E20C422CFCD2}" destId="{C48DFD87-6530-40A0-A5EB-ECC42D9A8F49}" srcOrd="0" destOrd="0" parTransId="{4A64C447-6C9C-45FF-8FC6-898247F796E1}" sibTransId="{19660F5B-5DC6-4355-8EDB-E7EFF837D9A2}"/>
+    <dgm:cxn modelId="{75E66155-B6D4-4728-BC84-80C2140DDC86}" srcId="{47892B76-4EBF-42EE-842A-E20C422CFCD2}" destId="{5F7FBEF5-078E-46B7-AE94-106347F91206}" srcOrd="2" destOrd="0" parTransId="{736F4025-81BA-4665-AEC6-14FB5926007C}" sibTransId="{2432F4CC-5C69-4CB4-B992-0BB222569E03}"/>
+    <dgm:cxn modelId="{6308AD23-7C00-40C6-8A92-531FFF42BD5F}" type="presOf" srcId="{239BF204-3037-4A5E-B416-AC907A0994CD}" destId="{EFFF1A40-2806-4BC8-AFAE-AD3E674D8EC7}" srcOrd="0" destOrd="0" presId="urn:microsoft.com/office/officeart/2008/layout/LinedList"/>
     <dgm:cxn modelId="{B03F2F0D-97CB-434E-BB5C-EC7DB358BC44}" srcId="{47892B76-4EBF-42EE-842A-E20C422CFCD2}" destId="{F6937E21-265F-4588-A698-11F7D370BED1}" srcOrd="3" destOrd="0" parTransId="{E6017DE8-E492-4055-82B1-8F9D20BC0720}" sibTransId="{37B98DD1-B561-414B-88A1-069016C226CC}"/>
+    <dgm:cxn modelId="{94DC9E50-35A8-4572-99F5-7247BA193151}" type="presOf" srcId="{5F7FBEF5-078E-46B7-AE94-106347F91206}" destId="{0D6728CC-35DE-4DB9-BF91-26661D0FC45F}" srcOrd="0" destOrd="0" presId="urn:microsoft.com/office/officeart/2008/layout/LinedList"/>
+    <dgm:cxn modelId="{849B014A-4E4D-45F1-BB90-B223BF6226BF}" srcId="{47892B76-4EBF-42EE-842A-E20C422CFCD2}" destId="{239BF204-3037-4A5E-B416-AC907A0994CD}" srcOrd="1" destOrd="0" parTransId="{7C1E3E0A-26DF-4A3C-9081-43749A2A2BE3}" sibTransId="{9CB43FA3-1BB0-4446-8995-E88CAB5EF820}"/>
     <dgm:cxn modelId="{45E3F015-E25E-4EE8-A0FF-CA3B62DD958C}" type="presOf" srcId="{C48DFD87-6530-40A0-A5EB-ECC42D9A8F49}" destId="{BF639F22-1ADB-4D7C-8145-31641E8DEBD0}" srcOrd="0" destOrd="0" presId="urn:microsoft.com/office/officeart/2008/layout/LinedList"/>
     <dgm:cxn modelId="{A7E2EC1C-BFB6-40F3-A513-853421CA5205}" type="presOf" srcId="{47892B76-4EBF-42EE-842A-E20C422CFCD2}" destId="{ED944241-FC1D-433D-8D9E-F9768A661984}" srcOrd="0" destOrd="0" presId="urn:microsoft.com/office/officeart/2008/layout/LinedList"/>
-    <dgm:cxn modelId="{6308AD23-7C00-40C6-8A92-531FFF42BD5F}" type="presOf" srcId="{239BF204-3037-4A5E-B416-AC907A0994CD}" destId="{EFFF1A40-2806-4BC8-AFAE-AD3E674D8EC7}" srcOrd="0" destOrd="0" presId="urn:microsoft.com/office/officeart/2008/layout/LinedList"/>
+    <dgm:cxn modelId="{BD59110D-4F66-41F5-95B4-1F305C54569E}" srcId="{47892B76-4EBF-42EE-842A-E20C422CFCD2}" destId="{C48DFD87-6530-40A0-A5EB-ECC42D9A8F49}" srcOrd="0" destOrd="0" parTransId="{4A64C447-6C9C-45FF-8FC6-898247F796E1}" sibTransId="{19660F5B-5DC6-4355-8EDB-E7EFF837D9A2}"/>
     <dgm:cxn modelId="{39174364-F33F-488F-8640-3F67C993DA3F}" type="presOf" srcId="{F6937E21-265F-4588-A698-11F7D370BED1}" destId="{363885E6-19AA-4CEF-A807-E53B6948645D}" srcOrd="0" destOrd="0" presId="urn:microsoft.com/office/officeart/2008/layout/LinedList"/>
-    <dgm:cxn modelId="{849B014A-4E4D-45F1-BB90-B223BF6226BF}" srcId="{47892B76-4EBF-42EE-842A-E20C422CFCD2}" destId="{239BF204-3037-4A5E-B416-AC907A0994CD}" srcOrd="1" destOrd="0" parTransId="{7C1E3E0A-26DF-4A3C-9081-43749A2A2BE3}" sibTransId="{9CB43FA3-1BB0-4446-8995-E88CAB5EF820}"/>
-    <dgm:cxn modelId="{94DC9E50-35A8-4572-99F5-7247BA193151}" type="presOf" srcId="{5F7FBEF5-078E-46B7-AE94-106347F91206}" destId="{0D6728CC-35DE-4DB9-BF91-26661D0FC45F}" srcOrd="0" destOrd="0" presId="urn:microsoft.com/office/officeart/2008/layout/LinedList"/>
-    <dgm:cxn modelId="{75E66155-B6D4-4728-BC84-80C2140DDC86}" srcId="{47892B76-4EBF-42EE-842A-E20C422CFCD2}" destId="{5F7FBEF5-078E-46B7-AE94-106347F91206}" srcOrd="2" destOrd="0" parTransId="{736F4025-81BA-4665-AEC6-14FB5926007C}" sibTransId="{2432F4CC-5C69-4CB4-B992-0BB222569E03}"/>
     <dgm:cxn modelId="{6BF3EB56-DA73-454A-A404-0F394A900EF6}" type="presParOf" srcId="{ED944241-FC1D-433D-8D9E-F9768A661984}" destId="{AC9C9FD7-72E1-450D-AFBC-70B95E0A4A03}" srcOrd="0" destOrd="0" presId="urn:microsoft.com/office/officeart/2008/layout/LinedList"/>
     <dgm:cxn modelId="{1EA7CA59-D6B1-4C1C-B6EE-8FA0B519823E}" type="presParOf" srcId="{ED944241-FC1D-433D-8D9E-F9768A661984}" destId="{1DF01AF8-A2F2-4B34-BDF4-BBF2A359D23E}" srcOrd="1" destOrd="0" presId="urn:microsoft.com/office/officeart/2008/layout/LinedList"/>
     <dgm:cxn modelId="{C5858AF4-A5D2-4716-9BFB-3A7A11F6E69A}" type="presParOf" srcId="{1DF01AF8-A2F2-4B34-BDF4-BBF2A359D23E}" destId="{BF639F22-1ADB-4D7C-8145-31641E8DEBD0}" srcOrd="0" destOrd="0" presId="urn:microsoft.com/office/officeart/2008/layout/LinedList"/>
@@ -2779,678 +2905,6 @@
       <dsp:cNvGrpSpPr/>
     </dsp:nvGrpSpPr>
     <dsp:grpSpPr/>
-    <dsp:sp modelId="{9482CFC1-1339-487B-B9B2-7316F7A06163}">
-      <dsp:nvSpPr>
-        <dsp:cNvPr id="0" name=""/>
-        <dsp:cNvSpPr/>
-      </dsp:nvSpPr>
-      <dsp:spPr>
-        <a:xfrm>
-          <a:off x="445092" y="1105573"/>
-          <a:ext cx="721406" cy="721406"/>
-        </a:xfrm>
-        <a:prstGeom prst="rect">
-          <a:avLst/>
-        </a:prstGeom>
-        <a:blipFill>
-          <a:blip xmlns:r="http://schemas.openxmlformats.org/officeDocument/2006/relationships" r:embed="rId1" cstate="print">
-            <a:extLst>
-              <a:ext uri="{28A0092B-C50C-407E-A947-70E740481C1C}">
-                <a14:useLocalDpi xmlns:a14="http://schemas.microsoft.com/office/drawing/2010/main" val="0"/>
-              </a:ext>
-              <a:ext uri="{96DAC541-7B7A-43D3-8B79-37D633B846F1}">
-                <asvg:svgBlip xmlns:asvg="http://schemas.microsoft.com/office/drawing/2016/SVG/main" r:embed="rId2"/>
-              </a:ext>
-            </a:extLst>
-          </a:blip>
-          <a:stretch>
-            <a:fillRect/>
-          </a:stretch>
-        </a:blipFill>
-        <a:ln w="22225" cap="rnd" cmpd="sng" algn="ctr">
-          <a:noFill/>
-          <a:prstDash val="solid"/>
-        </a:ln>
-        <a:effectLst/>
-      </dsp:spPr>
-      <dsp:style>
-        <a:lnRef idx="2">
-          <a:scrgbClr r="0" g="0" b="0"/>
-        </a:lnRef>
-        <a:fillRef idx="1">
-          <a:scrgbClr r="0" g="0" b="0"/>
-        </a:fillRef>
-        <a:effectRef idx="0">
-          <a:scrgbClr r="0" g="0" b="0"/>
-        </a:effectRef>
-        <a:fontRef idx="minor">
-          <a:schemeClr val="lt1"/>
-        </a:fontRef>
-      </dsp:style>
-    </dsp:sp>
-    <dsp:sp modelId="{14189B67-782B-454A-AB4F-539B0F1DF49E}">
-      <dsp:nvSpPr>
-        <dsp:cNvPr id="0" name=""/>
-        <dsp:cNvSpPr/>
-      </dsp:nvSpPr>
-      <dsp:spPr>
-        <a:xfrm>
-          <a:off x="4232" y="2067457"/>
-          <a:ext cx="1603125" cy="641250"/>
-        </a:xfrm>
-        <a:prstGeom prst="rect">
-          <a:avLst/>
-        </a:prstGeom>
-        <a:noFill/>
-        <a:ln>
-          <a:noFill/>
-        </a:ln>
-        <a:effectLst/>
-      </dsp:spPr>
-      <dsp:style>
-        <a:lnRef idx="0">
-          <a:scrgbClr r="0" g="0" b="0"/>
-        </a:lnRef>
-        <a:fillRef idx="0">
-          <a:scrgbClr r="0" g="0" b="0"/>
-        </a:fillRef>
-        <a:effectRef idx="0">
-          <a:scrgbClr r="0" g="0" b="0"/>
-        </a:effectRef>
-        <a:fontRef idx="minor"/>
-      </dsp:style>
-      <dsp:txBody>
-        <a:bodyPr spcFirstLastPara="0" vert="horz" wrap="square" lIns="0" tIns="0" rIns="0" bIns="0" numCol="1" spcCol="1270" anchor="t" anchorCtr="0">
-          <a:noAutofit/>
-        </a:bodyPr>
-        <a:lstStyle/>
-        <a:p>
-          <a:pPr marL="0" lvl="0" indent="0" algn="ctr" defTabSz="800100">
-            <a:lnSpc>
-              <a:spcPct val="100000"/>
-            </a:lnSpc>
-            <a:spcBef>
-              <a:spcPct val="0"/>
-            </a:spcBef>
-            <a:spcAft>
-              <a:spcPct val="35000"/>
-            </a:spcAft>
-            <a:buNone/>
-          </a:pPr>
-          <a:r>
-            <a:rPr lang="en-US" sz="1800" kern="1200">
-              <a:latin typeface="Aptos" panose="020B0004020202020204" pitchFamily="34" charset="0"/>
-              <a:cs typeface="Arial" panose="020B0604020202020204" pitchFamily="34" charset="0"/>
-            </a:rPr>
-            <a:t>Introduction</a:t>
-          </a:r>
-        </a:p>
-      </dsp:txBody>
-      <dsp:txXfrm>
-        <a:off x="4232" y="2067457"/>
-        <a:ext cx="1603125" cy="641250"/>
-      </dsp:txXfrm>
-    </dsp:sp>
-    <dsp:sp modelId="{EECE7CBE-338D-46DA-BE3D-3B73DCF84996}">
-      <dsp:nvSpPr>
-        <dsp:cNvPr id="0" name=""/>
-        <dsp:cNvSpPr/>
-      </dsp:nvSpPr>
-      <dsp:spPr>
-        <a:xfrm>
-          <a:off x="2328764" y="1105573"/>
-          <a:ext cx="721406" cy="721406"/>
-        </a:xfrm>
-        <a:prstGeom prst="rect">
-          <a:avLst/>
-        </a:prstGeom>
-        <a:blipFill>
-          <a:blip xmlns:r="http://schemas.openxmlformats.org/officeDocument/2006/relationships" r:embed="rId3" cstate="print">
-            <a:extLst>
-              <a:ext uri="{28A0092B-C50C-407E-A947-70E740481C1C}">
-                <a14:useLocalDpi xmlns:a14="http://schemas.microsoft.com/office/drawing/2010/main" val="0"/>
-              </a:ext>
-              <a:ext uri="{96DAC541-7B7A-43D3-8B79-37D633B846F1}">
-                <asvg:svgBlip xmlns:asvg="http://schemas.microsoft.com/office/drawing/2016/SVG/main" r:embed="rId4"/>
-              </a:ext>
-            </a:extLst>
-          </a:blip>
-          <a:stretch>
-            <a:fillRect/>
-          </a:stretch>
-        </a:blipFill>
-        <a:ln w="22225" cap="rnd" cmpd="sng" algn="ctr">
-          <a:noFill/>
-          <a:prstDash val="solid"/>
-        </a:ln>
-        <a:effectLst/>
-      </dsp:spPr>
-      <dsp:style>
-        <a:lnRef idx="2">
-          <a:scrgbClr r="0" g="0" b="0"/>
-        </a:lnRef>
-        <a:fillRef idx="1">
-          <a:scrgbClr r="0" g="0" b="0"/>
-        </a:fillRef>
-        <a:effectRef idx="0">
-          <a:scrgbClr r="0" g="0" b="0"/>
-        </a:effectRef>
-        <a:fontRef idx="minor">
-          <a:schemeClr val="lt1"/>
-        </a:fontRef>
-      </dsp:style>
-    </dsp:sp>
-    <dsp:sp modelId="{A549B15F-4E9A-4B58-8F61-8AE7255B9D15}">
-      <dsp:nvSpPr>
-        <dsp:cNvPr id="0" name=""/>
-        <dsp:cNvSpPr/>
-      </dsp:nvSpPr>
-      <dsp:spPr>
-        <a:xfrm>
-          <a:off x="1887904" y="2067457"/>
-          <a:ext cx="1603125" cy="641250"/>
-        </a:xfrm>
-        <a:prstGeom prst="rect">
-          <a:avLst/>
-        </a:prstGeom>
-        <a:noFill/>
-        <a:ln>
-          <a:noFill/>
-        </a:ln>
-        <a:effectLst/>
-      </dsp:spPr>
-      <dsp:style>
-        <a:lnRef idx="0">
-          <a:scrgbClr r="0" g="0" b="0"/>
-        </a:lnRef>
-        <a:fillRef idx="0">
-          <a:scrgbClr r="0" g="0" b="0"/>
-        </a:fillRef>
-        <a:effectRef idx="0">
-          <a:scrgbClr r="0" g="0" b="0"/>
-        </a:effectRef>
-        <a:fontRef idx="minor"/>
-      </dsp:style>
-      <dsp:txBody>
-        <a:bodyPr spcFirstLastPara="0" vert="horz" wrap="square" lIns="0" tIns="0" rIns="0" bIns="0" numCol="1" spcCol="1270" anchor="t" anchorCtr="0">
-          <a:noAutofit/>
-        </a:bodyPr>
-        <a:lstStyle/>
-        <a:p>
-          <a:pPr marL="0" lvl="0" indent="0" algn="ctr" defTabSz="800100">
-            <a:lnSpc>
-              <a:spcPct val="100000"/>
-            </a:lnSpc>
-            <a:spcBef>
-              <a:spcPct val="0"/>
-            </a:spcBef>
-            <a:spcAft>
-              <a:spcPct val="35000"/>
-            </a:spcAft>
-            <a:buNone/>
-          </a:pPr>
-          <a:r>
-            <a:rPr lang="en-US" sz="1800" kern="1200">
-              <a:latin typeface="Aptos" panose="020B0004020202020204" pitchFamily="34" charset="0"/>
-              <a:cs typeface="Arial" panose="020B0604020202020204" pitchFamily="34" charset="0"/>
-            </a:rPr>
-            <a:t>Project Objective</a:t>
-          </a:r>
-        </a:p>
-      </dsp:txBody>
-      <dsp:txXfrm>
-        <a:off x="1887904" y="2067457"/>
-        <a:ext cx="1603125" cy="641250"/>
-      </dsp:txXfrm>
-    </dsp:sp>
-    <dsp:sp modelId="{ECF03F46-F5D7-4C1B-98D3-4D76E9F06C06}">
-      <dsp:nvSpPr>
-        <dsp:cNvPr id="0" name=""/>
-        <dsp:cNvSpPr/>
-      </dsp:nvSpPr>
-      <dsp:spPr>
-        <a:xfrm>
-          <a:off x="4212435" y="1105573"/>
-          <a:ext cx="721406" cy="721406"/>
-        </a:xfrm>
-        <a:prstGeom prst="rect">
-          <a:avLst/>
-        </a:prstGeom>
-        <a:blipFill>
-          <a:blip xmlns:r="http://schemas.openxmlformats.org/officeDocument/2006/relationships" r:embed="rId5" cstate="print">
-            <a:extLst>
-              <a:ext uri="{28A0092B-C50C-407E-A947-70E740481C1C}">
-                <a14:useLocalDpi xmlns:a14="http://schemas.microsoft.com/office/drawing/2010/main" val="0"/>
-              </a:ext>
-              <a:ext uri="{96DAC541-7B7A-43D3-8B79-37D633B846F1}">
-                <asvg:svgBlip xmlns:asvg="http://schemas.microsoft.com/office/drawing/2016/SVG/main" r:embed="rId6"/>
-              </a:ext>
-            </a:extLst>
-          </a:blip>
-          <a:stretch>
-            <a:fillRect/>
-          </a:stretch>
-        </a:blipFill>
-        <a:ln w="22225" cap="rnd" cmpd="sng" algn="ctr">
-          <a:noFill/>
-          <a:prstDash val="solid"/>
-        </a:ln>
-        <a:effectLst/>
-      </dsp:spPr>
-      <dsp:style>
-        <a:lnRef idx="2">
-          <a:scrgbClr r="0" g="0" b="0"/>
-        </a:lnRef>
-        <a:fillRef idx="1">
-          <a:scrgbClr r="0" g="0" b="0"/>
-        </a:fillRef>
-        <a:effectRef idx="0">
-          <a:scrgbClr r="0" g="0" b="0"/>
-        </a:effectRef>
-        <a:fontRef idx="minor">
-          <a:schemeClr val="lt1"/>
-        </a:fontRef>
-      </dsp:style>
-    </dsp:sp>
-    <dsp:sp modelId="{1F807767-40A8-413F-889B-B5039E41FB50}">
-      <dsp:nvSpPr>
-        <dsp:cNvPr id="0" name=""/>
-        <dsp:cNvSpPr/>
-      </dsp:nvSpPr>
-      <dsp:spPr>
-        <a:xfrm>
-          <a:off x="3771576" y="2067457"/>
-          <a:ext cx="1603125" cy="641250"/>
-        </a:xfrm>
-        <a:prstGeom prst="rect">
-          <a:avLst/>
-        </a:prstGeom>
-        <a:noFill/>
-        <a:ln>
-          <a:noFill/>
-        </a:ln>
-        <a:effectLst/>
-      </dsp:spPr>
-      <dsp:style>
-        <a:lnRef idx="0">
-          <a:scrgbClr r="0" g="0" b="0"/>
-        </a:lnRef>
-        <a:fillRef idx="0">
-          <a:scrgbClr r="0" g="0" b="0"/>
-        </a:fillRef>
-        <a:effectRef idx="0">
-          <a:scrgbClr r="0" g="0" b="0"/>
-        </a:effectRef>
-        <a:fontRef idx="minor"/>
-      </dsp:style>
-      <dsp:txBody>
-        <a:bodyPr spcFirstLastPara="0" vert="horz" wrap="square" lIns="0" tIns="0" rIns="0" bIns="0" numCol="1" spcCol="1270" anchor="t" anchorCtr="0">
-          <a:noAutofit/>
-        </a:bodyPr>
-        <a:lstStyle/>
-        <a:p>
-          <a:pPr marL="0" lvl="0" indent="0" algn="ctr" defTabSz="800100">
-            <a:lnSpc>
-              <a:spcPct val="100000"/>
-            </a:lnSpc>
-            <a:spcBef>
-              <a:spcPct val="0"/>
-            </a:spcBef>
-            <a:spcAft>
-              <a:spcPct val="35000"/>
-            </a:spcAft>
-            <a:buNone/>
-          </a:pPr>
-          <a:r>
-            <a:rPr lang="en-US" sz="1800" kern="1200" dirty="0">
-              <a:latin typeface="Aptos" panose="020B0004020202020204" pitchFamily="34" charset="0"/>
-              <a:cs typeface="Arial" panose="020B0604020202020204" pitchFamily="34" charset="0"/>
-            </a:rPr>
-            <a:t>Implementation</a:t>
-          </a:r>
-        </a:p>
-      </dsp:txBody>
-      <dsp:txXfrm>
-        <a:off x="3771576" y="2067457"/>
-        <a:ext cx="1603125" cy="641250"/>
-      </dsp:txXfrm>
-    </dsp:sp>
-    <dsp:sp modelId="{1FD52781-51D7-4270-93BE-0B5A1646882B}">
-      <dsp:nvSpPr>
-        <dsp:cNvPr id="0" name=""/>
-        <dsp:cNvSpPr/>
-      </dsp:nvSpPr>
-      <dsp:spPr>
-        <a:xfrm>
-          <a:off x="6096107" y="1105573"/>
-          <a:ext cx="721406" cy="721406"/>
-        </a:xfrm>
-        <a:prstGeom prst="rect">
-          <a:avLst/>
-        </a:prstGeom>
-        <a:blipFill>
-          <a:blip xmlns:r="http://schemas.openxmlformats.org/officeDocument/2006/relationships" r:embed="rId5" cstate="print">
-            <a:extLst>
-              <a:ext uri="{28A0092B-C50C-407E-A947-70E740481C1C}">
-                <a14:useLocalDpi xmlns:a14="http://schemas.microsoft.com/office/drawing/2010/main" val="0"/>
-              </a:ext>
-              <a:ext uri="{96DAC541-7B7A-43D3-8B79-37D633B846F1}">
-                <asvg:svgBlip xmlns:asvg="http://schemas.microsoft.com/office/drawing/2016/SVG/main" r:embed="rId6"/>
-              </a:ext>
-            </a:extLst>
-          </a:blip>
-          <a:stretch>
-            <a:fillRect/>
-          </a:stretch>
-        </a:blipFill>
-        <a:ln w="22225" cap="rnd" cmpd="sng" algn="ctr">
-          <a:noFill/>
-          <a:prstDash val="solid"/>
-        </a:ln>
-        <a:effectLst/>
-      </dsp:spPr>
-      <dsp:style>
-        <a:lnRef idx="2">
-          <a:scrgbClr r="0" g="0" b="0"/>
-        </a:lnRef>
-        <a:fillRef idx="1">
-          <a:scrgbClr r="0" g="0" b="0"/>
-        </a:fillRef>
-        <a:effectRef idx="0">
-          <a:scrgbClr r="0" g="0" b="0"/>
-        </a:effectRef>
-        <a:fontRef idx="minor">
-          <a:schemeClr val="lt1"/>
-        </a:fontRef>
-      </dsp:style>
-    </dsp:sp>
-    <dsp:sp modelId="{2F3064E7-8078-4B0E-8356-51AD90E234CA}">
-      <dsp:nvSpPr>
-        <dsp:cNvPr id="0" name=""/>
-        <dsp:cNvSpPr/>
-      </dsp:nvSpPr>
-      <dsp:spPr>
-        <a:xfrm>
-          <a:off x="5655248" y="2067457"/>
-          <a:ext cx="1603125" cy="641250"/>
-        </a:xfrm>
-        <a:prstGeom prst="rect">
-          <a:avLst/>
-        </a:prstGeom>
-        <a:noFill/>
-        <a:ln>
-          <a:noFill/>
-        </a:ln>
-        <a:effectLst/>
-      </dsp:spPr>
-      <dsp:style>
-        <a:lnRef idx="0">
-          <a:scrgbClr r="0" g="0" b="0"/>
-        </a:lnRef>
-        <a:fillRef idx="0">
-          <a:scrgbClr r="0" g="0" b="0"/>
-        </a:fillRef>
-        <a:effectRef idx="0">
-          <a:scrgbClr r="0" g="0" b="0"/>
-        </a:effectRef>
-        <a:fontRef idx="minor"/>
-      </dsp:style>
-      <dsp:txBody>
-        <a:bodyPr spcFirstLastPara="0" vert="horz" wrap="square" lIns="0" tIns="0" rIns="0" bIns="0" numCol="1" spcCol="1270" anchor="t" anchorCtr="0">
-          <a:noAutofit/>
-        </a:bodyPr>
-        <a:lstStyle/>
-        <a:p>
-          <a:pPr marL="0" lvl="0" indent="0" algn="ctr" defTabSz="800100">
-            <a:lnSpc>
-              <a:spcPct val="100000"/>
-            </a:lnSpc>
-            <a:spcBef>
-              <a:spcPct val="0"/>
-            </a:spcBef>
-            <a:spcAft>
-              <a:spcPct val="35000"/>
-            </a:spcAft>
-            <a:buNone/>
-          </a:pPr>
-          <a:r>
-            <a:rPr lang="en-US" sz="1800" kern="1200">
-              <a:latin typeface="Aptos" panose="020B0004020202020204" pitchFamily="34" charset="0"/>
-              <a:cs typeface="Arial" panose="020B0604020202020204" pitchFamily="34" charset="0"/>
-            </a:rPr>
-            <a:t>Results</a:t>
-          </a:r>
-        </a:p>
-      </dsp:txBody>
-      <dsp:txXfrm>
-        <a:off x="5655248" y="2067457"/>
-        <a:ext cx="1603125" cy="641250"/>
-      </dsp:txXfrm>
-    </dsp:sp>
-    <dsp:sp modelId="{6B6D8941-B195-4E45-908B-7DB08470161E}">
-      <dsp:nvSpPr>
-        <dsp:cNvPr id="0" name=""/>
-        <dsp:cNvSpPr/>
-      </dsp:nvSpPr>
-      <dsp:spPr>
-        <a:xfrm>
-          <a:off x="7979779" y="1105573"/>
-          <a:ext cx="721406" cy="721406"/>
-        </a:xfrm>
-        <a:prstGeom prst="rect">
-          <a:avLst/>
-        </a:prstGeom>
-        <a:blipFill>
-          <a:blip xmlns:r="http://schemas.openxmlformats.org/officeDocument/2006/relationships" r:embed="rId7" cstate="print">
-            <a:extLst>
-              <a:ext uri="{28A0092B-C50C-407E-A947-70E740481C1C}">
-                <a14:useLocalDpi xmlns:a14="http://schemas.microsoft.com/office/drawing/2010/main" val="0"/>
-              </a:ext>
-              <a:ext uri="{96DAC541-7B7A-43D3-8B79-37D633B846F1}">
-                <asvg:svgBlip xmlns:asvg="http://schemas.microsoft.com/office/drawing/2016/SVG/main" r:embed="rId8"/>
-              </a:ext>
-            </a:extLst>
-          </a:blip>
-          <a:stretch>
-            <a:fillRect/>
-          </a:stretch>
-        </a:blipFill>
-        <a:ln w="22225" cap="rnd" cmpd="sng" algn="ctr">
-          <a:noFill/>
-          <a:prstDash val="solid"/>
-        </a:ln>
-        <a:effectLst/>
-      </dsp:spPr>
-      <dsp:style>
-        <a:lnRef idx="2">
-          <a:scrgbClr r="0" g="0" b="0"/>
-        </a:lnRef>
-        <a:fillRef idx="1">
-          <a:scrgbClr r="0" g="0" b="0"/>
-        </a:fillRef>
-        <a:effectRef idx="0">
-          <a:scrgbClr r="0" g="0" b="0"/>
-        </a:effectRef>
-        <a:fontRef idx="minor">
-          <a:schemeClr val="lt1"/>
-        </a:fontRef>
-      </dsp:style>
-    </dsp:sp>
-    <dsp:sp modelId="{7AE32A8A-B008-459B-9A12-792F91A5CCB5}">
-      <dsp:nvSpPr>
-        <dsp:cNvPr id="0" name=""/>
-        <dsp:cNvSpPr/>
-      </dsp:nvSpPr>
-      <dsp:spPr>
-        <a:xfrm>
-          <a:off x="7538920" y="2067457"/>
-          <a:ext cx="1603125" cy="641250"/>
-        </a:xfrm>
-        <a:prstGeom prst="rect">
-          <a:avLst/>
-        </a:prstGeom>
-        <a:noFill/>
-        <a:ln>
-          <a:noFill/>
-        </a:ln>
-        <a:effectLst/>
-      </dsp:spPr>
-      <dsp:style>
-        <a:lnRef idx="0">
-          <a:scrgbClr r="0" g="0" b="0"/>
-        </a:lnRef>
-        <a:fillRef idx="0">
-          <a:scrgbClr r="0" g="0" b="0"/>
-        </a:fillRef>
-        <a:effectRef idx="0">
-          <a:scrgbClr r="0" g="0" b="0"/>
-        </a:effectRef>
-        <a:fontRef idx="minor"/>
-      </dsp:style>
-      <dsp:txBody>
-        <a:bodyPr spcFirstLastPara="0" vert="horz" wrap="square" lIns="0" tIns="0" rIns="0" bIns="0" numCol="1" spcCol="1270" anchor="t" anchorCtr="0">
-          <a:noAutofit/>
-        </a:bodyPr>
-        <a:lstStyle/>
-        <a:p>
-          <a:pPr marL="0" lvl="0" indent="0" algn="ctr" defTabSz="800100">
-            <a:lnSpc>
-              <a:spcPct val="100000"/>
-            </a:lnSpc>
-            <a:spcBef>
-              <a:spcPct val="0"/>
-            </a:spcBef>
-            <a:spcAft>
-              <a:spcPct val="35000"/>
-            </a:spcAft>
-            <a:buNone/>
-          </a:pPr>
-          <a:r>
-            <a:rPr lang="en-US" sz="1800" kern="1200">
-              <a:latin typeface="Aptos" panose="020B0004020202020204" pitchFamily="34" charset="0"/>
-              <a:cs typeface="Arial" panose="020B0604020202020204" pitchFamily="34" charset="0"/>
-            </a:rPr>
-            <a:t>Conclusion</a:t>
-          </a:r>
-        </a:p>
-      </dsp:txBody>
-      <dsp:txXfrm>
-        <a:off x="7538920" y="2067457"/>
-        <a:ext cx="1603125" cy="641250"/>
-      </dsp:txXfrm>
-    </dsp:sp>
-    <dsp:sp modelId="{BDB7D374-8EE5-4BB4-BBBE-05C250E11468}">
-      <dsp:nvSpPr>
-        <dsp:cNvPr id="0" name=""/>
-        <dsp:cNvSpPr/>
-      </dsp:nvSpPr>
-      <dsp:spPr>
-        <a:xfrm>
-          <a:off x="9863451" y="1105573"/>
-          <a:ext cx="721406" cy="721406"/>
-        </a:xfrm>
-        <a:prstGeom prst="rect">
-          <a:avLst/>
-        </a:prstGeom>
-        <a:blipFill>
-          <a:blip xmlns:r="http://schemas.openxmlformats.org/officeDocument/2006/relationships" r:embed="rId9" cstate="print">
-            <a:extLst>
-              <a:ext uri="{28A0092B-C50C-407E-A947-70E740481C1C}">
-                <a14:useLocalDpi xmlns:a14="http://schemas.microsoft.com/office/drawing/2010/main" val="0"/>
-              </a:ext>
-              <a:ext uri="{96DAC541-7B7A-43D3-8B79-37D633B846F1}">
-                <asvg:svgBlip xmlns:asvg="http://schemas.microsoft.com/office/drawing/2016/SVG/main" r:embed="rId10"/>
-              </a:ext>
-            </a:extLst>
-          </a:blip>
-          <a:stretch>
-            <a:fillRect/>
-          </a:stretch>
-        </a:blipFill>
-        <a:ln w="22225" cap="rnd" cmpd="sng" algn="ctr">
-          <a:noFill/>
-          <a:prstDash val="solid"/>
-        </a:ln>
-        <a:effectLst/>
-      </dsp:spPr>
-      <dsp:style>
-        <a:lnRef idx="2">
-          <a:scrgbClr r="0" g="0" b="0"/>
-        </a:lnRef>
-        <a:fillRef idx="1">
-          <a:scrgbClr r="0" g="0" b="0"/>
-        </a:fillRef>
-        <a:effectRef idx="0">
-          <a:scrgbClr r="0" g="0" b="0"/>
-        </a:effectRef>
-        <a:fontRef idx="minor">
-          <a:schemeClr val="lt1"/>
-        </a:fontRef>
-      </dsp:style>
-    </dsp:sp>
-    <dsp:sp modelId="{0D69C5E4-0A3C-4832-A770-A8184C370919}">
-      <dsp:nvSpPr>
-        <dsp:cNvPr id="0" name=""/>
-        <dsp:cNvSpPr/>
-      </dsp:nvSpPr>
-      <dsp:spPr>
-        <a:xfrm>
-          <a:off x="9422592" y="2067457"/>
-          <a:ext cx="1603125" cy="641250"/>
-        </a:xfrm>
-        <a:prstGeom prst="rect">
-          <a:avLst/>
-        </a:prstGeom>
-        <a:noFill/>
-        <a:ln>
-          <a:noFill/>
-        </a:ln>
-        <a:effectLst/>
-      </dsp:spPr>
-      <dsp:style>
-        <a:lnRef idx="0">
-          <a:scrgbClr r="0" g="0" b="0"/>
-        </a:lnRef>
-        <a:fillRef idx="0">
-          <a:scrgbClr r="0" g="0" b="0"/>
-        </a:fillRef>
-        <a:effectRef idx="0">
-          <a:scrgbClr r="0" g="0" b="0"/>
-        </a:effectRef>
-        <a:fontRef idx="minor"/>
-      </dsp:style>
-      <dsp:txBody>
-        <a:bodyPr spcFirstLastPara="0" vert="horz" wrap="square" lIns="0" tIns="0" rIns="0" bIns="0" numCol="1" spcCol="1270" anchor="t" anchorCtr="0">
-          <a:noAutofit/>
-        </a:bodyPr>
-        <a:lstStyle/>
-        <a:p>
-          <a:pPr marL="0" lvl="0" indent="0" algn="ctr" defTabSz="800100">
-            <a:lnSpc>
-              <a:spcPct val="100000"/>
-            </a:lnSpc>
-            <a:spcBef>
-              <a:spcPct val="0"/>
-            </a:spcBef>
-            <a:spcAft>
-              <a:spcPct val="35000"/>
-            </a:spcAft>
-            <a:buNone/>
-          </a:pPr>
-          <a:r>
-            <a:rPr lang="en-US" sz="1800" kern="1200">
-              <a:latin typeface="Aptos" panose="020B0004020202020204" pitchFamily="34" charset="0"/>
-              <a:cs typeface="Arial" panose="020B0604020202020204" pitchFamily="34" charset="0"/>
-            </a:rPr>
-            <a:t>References</a:t>
-          </a:r>
-        </a:p>
-      </dsp:txBody>
-      <dsp:txXfrm>
-        <a:off x="9422592" y="2067457"/>
-        <a:ext cx="1603125" cy="641250"/>
-      </dsp:txXfrm>
-    </dsp:sp>
   </dsp:spTree>
 </dsp:drawing>
 </file>
@@ -3463,459 +2917,6 @@
       <dsp:cNvGrpSpPr/>
     </dsp:nvGrpSpPr>
     <dsp:grpSpPr/>
-    <dsp:sp modelId="{AC9C9FD7-72E1-450D-AFBC-70B95E0A4A03}">
-      <dsp:nvSpPr>
-        <dsp:cNvPr id="0" name=""/>
-        <dsp:cNvSpPr/>
-      </dsp:nvSpPr>
-      <dsp:spPr>
-        <a:xfrm>
-          <a:off x="0" y="0"/>
-          <a:ext cx="7012370" cy="0"/>
-        </a:xfrm>
-        <a:prstGeom prst="line">
-          <a:avLst/>
-        </a:prstGeom>
-        <a:solidFill>
-          <a:schemeClr val="accent2">
-            <a:hueOff val="0"/>
-            <a:satOff val="0"/>
-            <a:lumOff val="0"/>
-            <a:alphaOff val="0"/>
-          </a:schemeClr>
-        </a:solidFill>
-        <a:ln w="22225" cap="rnd" cmpd="sng" algn="ctr">
-          <a:solidFill>
-            <a:schemeClr val="accent2">
-              <a:hueOff val="0"/>
-              <a:satOff val="0"/>
-              <a:lumOff val="0"/>
-              <a:alphaOff val="0"/>
-            </a:schemeClr>
-          </a:solidFill>
-          <a:prstDash val="solid"/>
-        </a:ln>
-        <a:effectLst/>
-      </dsp:spPr>
-      <dsp:style>
-        <a:lnRef idx="2">
-          <a:scrgbClr r="0" g="0" b="0"/>
-        </a:lnRef>
-        <a:fillRef idx="1">
-          <a:scrgbClr r="0" g="0" b="0"/>
-        </a:fillRef>
-        <a:effectRef idx="0">
-          <a:scrgbClr r="0" g="0" b="0"/>
-        </a:effectRef>
-        <a:fontRef idx="minor">
-          <a:schemeClr val="lt1"/>
-        </a:fontRef>
-      </dsp:style>
-    </dsp:sp>
-    <dsp:sp modelId="{BF639F22-1ADB-4D7C-8145-31641E8DEBD0}">
-      <dsp:nvSpPr>
-        <dsp:cNvPr id="0" name=""/>
-        <dsp:cNvSpPr/>
-      </dsp:nvSpPr>
-      <dsp:spPr>
-        <a:xfrm>
-          <a:off x="0" y="0"/>
-          <a:ext cx="7012370" cy="1177282"/>
-        </a:xfrm>
-        <a:prstGeom prst="rect">
-          <a:avLst/>
-        </a:prstGeom>
-        <a:noFill/>
-        <a:ln>
-          <a:noFill/>
-        </a:ln>
-        <a:effectLst/>
-      </dsp:spPr>
-      <dsp:style>
-        <a:lnRef idx="0">
-          <a:scrgbClr r="0" g="0" b="0"/>
-        </a:lnRef>
-        <a:fillRef idx="0">
-          <a:scrgbClr r="0" g="0" b="0"/>
-        </a:fillRef>
-        <a:effectRef idx="0">
-          <a:scrgbClr r="0" g="0" b="0"/>
-        </a:effectRef>
-        <a:fontRef idx="minor"/>
-      </dsp:style>
-      <dsp:txBody>
-        <a:bodyPr spcFirstLastPara="0" vert="horz" wrap="square" lIns="68580" tIns="68580" rIns="68580" bIns="68580" numCol="1" spcCol="1270" anchor="t" anchorCtr="0">
-          <a:noAutofit/>
-        </a:bodyPr>
-        <a:lstStyle/>
-        <a:p>
-          <a:pPr marL="0" lvl="0" indent="0" algn="just" defTabSz="800100">
-            <a:lnSpc>
-              <a:spcPct val="90000"/>
-            </a:lnSpc>
-            <a:spcBef>
-              <a:spcPct val="0"/>
-            </a:spcBef>
-            <a:spcAft>
-              <a:spcPct val="35000"/>
-            </a:spcAft>
-            <a:buNone/>
-          </a:pPr>
-          <a:r>
-            <a:rPr lang="en-US" sz="1800" kern="1200" dirty="0"/>
-            <a:t>Overall, in conclusion, we can say that the HTM accuracy can be improved by using more data. We were not able to train large amounts of data due to limitations of our local machine. However, we can try using a greater number of numerical sequences in cloud.</a:t>
-          </a:r>
-        </a:p>
-      </dsp:txBody>
-      <dsp:txXfrm>
-        <a:off x="0" y="0"/>
-        <a:ext cx="7012370" cy="1177282"/>
-      </dsp:txXfrm>
-    </dsp:sp>
-    <dsp:sp modelId="{83772588-0F12-429A-9A09-8A7FC6C5A595}">
-      <dsp:nvSpPr>
-        <dsp:cNvPr id="0" name=""/>
-        <dsp:cNvSpPr/>
-      </dsp:nvSpPr>
-      <dsp:spPr>
-        <a:xfrm>
-          <a:off x="0" y="1177282"/>
-          <a:ext cx="7012370" cy="0"/>
-        </a:xfrm>
-        <a:prstGeom prst="line">
-          <a:avLst/>
-        </a:prstGeom>
-        <a:solidFill>
-          <a:schemeClr val="accent3">
-            <a:hueOff val="0"/>
-            <a:satOff val="0"/>
-            <a:lumOff val="0"/>
-            <a:alphaOff val="0"/>
-          </a:schemeClr>
-        </a:solidFill>
-        <a:ln w="22225" cap="rnd" cmpd="sng" algn="ctr">
-          <a:solidFill>
-            <a:schemeClr val="accent3">
-              <a:hueOff val="0"/>
-              <a:satOff val="0"/>
-              <a:lumOff val="0"/>
-              <a:alphaOff val="0"/>
-            </a:schemeClr>
-          </a:solidFill>
-          <a:prstDash val="solid"/>
-        </a:ln>
-        <a:effectLst/>
-      </dsp:spPr>
-      <dsp:style>
-        <a:lnRef idx="2">
-          <a:scrgbClr r="0" g="0" b="0"/>
-        </a:lnRef>
-        <a:fillRef idx="1">
-          <a:scrgbClr r="0" g="0" b="0"/>
-        </a:fillRef>
-        <a:effectRef idx="0">
-          <a:scrgbClr r="0" g="0" b="0"/>
-        </a:effectRef>
-        <a:fontRef idx="minor">
-          <a:schemeClr val="lt1"/>
-        </a:fontRef>
-      </dsp:style>
-    </dsp:sp>
-    <dsp:sp modelId="{EFFF1A40-2806-4BC8-AFAE-AD3E674D8EC7}">
-      <dsp:nvSpPr>
-        <dsp:cNvPr id="0" name=""/>
-        <dsp:cNvSpPr/>
-      </dsp:nvSpPr>
-      <dsp:spPr>
-        <a:xfrm>
-          <a:off x="0" y="1177282"/>
-          <a:ext cx="7012370" cy="1177282"/>
-        </a:xfrm>
-        <a:prstGeom prst="rect">
-          <a:avLst/>
-        </a:prstGeom>
-        <a:noFill/>
-        <a:ln>
-          <a:noFill/>
-        </a:ln>
-        <a:effectLst/>
-      </dsp:spPr>
-      <dsp:style>
-        <a:lnRef idx="0">
-          <a:scrgbClr r="0" g="0" b="0"/>
-        </a:lnRef>
-        <a:fillRef idx="0">
-          <a:scrgbClr r="0" g="0" b="0"/>
-        </a:fillRef>
-        <a:effectRef idx="0">
-          <a:scrgbClr r="0" g="0" b="0"/>
-        </a:effectRef>
-        <a:fontRef idx="minor"/>
-      </dsp:style>
-      <dsp:txBody>
-        <a:bodyPr spcFirstLastPara="0" vert="horz" wrap="square" lIns="68580" tIns="68580" rIns="68580" bIns="68580" numCol="1" spcCol="1270" anchor="t" anchorCtr="0">
-          <a:noAutofit/>
-        </a:bodyPr>
-        <a:lstStyle/>
-        <a:p>
-          <a:pPr marL="0" lvl="0" indent="0" algn="just" defTabSz="800100">
-            <a:lnSpc>
-              <a:spcPct val="90000"/>
-            </a:lnSpc>
-            <a:spcBef>
-              <a:spcPct val="0"/>
-            </a:spcBef>
-            <a:spcAft>
-              <a:spcPct val="35000"/>
-            </a:spcAft>
-            <a:buNone/>
-          </a:pPr>
-          <a:r>
-            <a:rPr lang="en-US" sz="1800" b="0" i="0" kern="1200" dirty="0"/>
-            <a:t>Low False Negative Rate (FNR) is crucial in anomaly detection, particularly in sensitive areas like fraud detection, to avoid overlooking anomalies and wasting resources on unnecessary investigations.</a:t>
-          </a:r>
-        </a:p>
-        <a:p>
-          <a:pPr marL="0" lvl="0" indent="0" algn="l" defTabSz="800100">
-            <a:lnSpc>
-              <a:spcPct val="90000"/>
-            </a:lnSpc>
-            <a:spcBef>
-              <a:spcPct val="0"/>
-            </a:spcBef>
-            <a:spcAft>
-              <a:spcPct val="35000"/>
-            </a:spcAft>
-            <a:buNone/>
-          </a:pPr>
-          <a:endParaRPr lang="en-US" sz="1800" kern="1200" dirty="0"/>
-        </a:p>
-      </dsp:txBody>
-      <dsp:txXfrm>
-        <a:off x="0" y="1177282"/>
-        <a:ext cx="7012370" cy="1177282"/>
-      </dsp:txXfrm>
-    </dsp:sp>
-    <dsp:sp modelId="{C759C3FD-1C01-4B1E-875E-CA40E46A91A4}">
-      <dsp:nvSpPr>
-        <dsp:cNvPr id="0" name=""/>
-        <dsp:cNvSpPr/>
-      </dsp:nvSpPr>
-      <dsp:spPr>
-        <a:xfrm>
-          <a:off x="0" y="2354565"/>
-          <a:ext cx="7012370" cy="0"/>
-        </a:xfrm>
-        <a:prstGeom prst="line">
-          <a:avLst/>
-        </a:prstGeom>
-        <a:solidFill>
-          <a:schemeClr val="accent4">
-            <a:hueOff val="0"/>
-            <a:satOff val="0"/>
-            <a:lumOff val="0"/>
-            <a:alphaOff val="0"/>
-          </a:schemeClr>
-        </a:solidFill>
-        <a:ln w="22225" cap="rnd" cmpd="sng" algn="ctr">
-          <a:solidFill>
-            <a:schemeClr val="accent4">
-              <a:hueOff val="0"/>
-              <a:satOff val="0"/>
-              <a:lumOff val="0"/>
-              <a:alphaOff val="0"/>
-            </a:schemeClr>
-          </a:solidFill>
-          <a:prstDash val="solid"/>
-        </a:ln>
-        <a:effectLst/>
-      </dsp:spPr>
-      <dsp:style>
-        <a:lnRef idx="2">
-          <a:scrgbClr r="0" g="0" b="0"/>
-        </a:lnRef>
-        <a:fillRef idx="1">
-          <a:scrgbClr r="0" g="0" b="0"/>
-        </a:fillRef>
-        <a:effectRef idx="0">
-          <a:scrgbClr r="0" g="0" b="0"/>
-        </a:effectRef>
-        <a:fontRef idx="minor">
-          <a:schemeClr val="lt1"/>
-        </a:fontRef>
-      </dsp:style>
-    </dsp:sp>
-    <dsp:sp modelId="{0D6728CC-35DE-4DB9-BF91-26661D0FC45F}">
-      <dsp:nvSpPr>
-        <dsp:cNvPr id="0" name=""/>
-        <dsp:cNvSpPr/>
-      </dsp:nvSpPr>
-      <dsp:spPr>
-        <a:xfrm>
-          <a:off x="0" y="2354565"/>
-          <a:ext cx="7012370" cy="1177282"/>
-        </a:xfrm>
-        <a:prstGeom prst="rect">
-          <a:avLst/>
-        </a:prstGeom>
-        <a:noFill/>
-        <a:ln>
-          <a:noFill/>
-        </a:ln>
-        <a:effectLst/>
-      </dsp:spPr>
-      <dsp:style>
-        <a:lnRef idx="0">
-          <a:scrgbClr r="0" g="0" b="0"/>
-        </a:lnRef>
-        <a:fillRef idx="0">
-          <a:scrgbClr r="0" g="0" b="0"/>
-        </a:fillRef>
-        <a:effectRef idx="0">
-          <a:scrgbClr r="0" g="0" b="0"/>
-        </a:effectRef>
-        <a:fontRef idx="minor"/>
-      </dsp:style>
-      <dsp:txBody>
-        <a:bodyPr spcFirstLastPara="0" vert="horz" wrap="square" lIns="68580" tIns="68580" rIns="68580" bIns="68580" numCol="1" spcCol="1270" anchor="t" anchorCtr="0">
-          <a:noAutofit/>
-        </a:bodyPr>
-        <a:lstStyle/>
-        <a:p>
-          <a:pPr marL="0" lvl="0" indent="0" algn="just" defTabSz="800100">
-            <a:lnSpc>
-              <a:spcPct val="90000"/>
-            </a:lnSpc>
-            <a:spcBef>
-              <a:spcPct val="0"/>
-            </a:spcBef>
-            <a:spcAft>
-              <a:spcPct val="35000"/>
-            </a:spcAft>
-            <a:buNone/>
-          </a:pPr>
-          <a:r>
-            <a:rPr lang="en-US" sz="1800" b="0" i="0" kern="1200" dirty="0"/>
-            <a:t>Hierarchical Temporal Memory (HTM) stands out for real-time anomaly detection without pre-training, making it ideal for dynamic data streams and resilient to noise.</a:t>
-          </a:r>
-          <a:endParaRPr lang="en-US" sz="1800" kern="1200" dirty="0"/>
-        </a:p>
-      </dsp:txBody>
-      <dsp:txXfrm>
-        <a:off x="0" y="2354565"/>
-        <a:ext cx="7012370" cy="1177282"/>
-      </dsp:txXfrm>
-    </dsp:sp>
-    <dsp:sp modelId="{55904D1E-C4C0-410C-89B3-7169833C09F5}">
-      <dsp:nvSpPr>
-        <dsp:cNvPr id="0" name=""/>
-        <dsp:cNvSpPr/>
-      </dsp:nvSpPr>
-      <dsp:spPr>
-        <a:xfrm>
-          <a:off x="0" y="3531848"/>
-          <a:ext cx="7012370" cy="0"/>
-        </a:xfrm>
-        <a:prstGeom prst="line">
-          <a:avLst/>
-        </a:prstGeom>
-        <a:solidFill>
-          <a:schemeClr val="accent5">
-            <a:hueOff val="0"/>
-            <a:satOff val="0"/>
-            <a:lumOff val="0"/>
-            <a:alphaOff val="0"/>
-          </a:schemeClr>
-        </a:solidFill>
-        <a:ln w="22225" cap="rnd" cmpd="sng" algn="ctr">
-          <a:solidFill>
-            <a:schemeClr val="accent5">
-              <a:hueOff val="0"/>
-              <a:satOff val="0"/>
-              <a:lumOff val="0"/>
-              <a:alphaOff val="0"/>
-            </a:schemeClr>
-          </a:solidFill>
-          <a:prstDash val="solid"/>
-        </a:ln>
-        <a:effectLst/>
-      </dsp:spPr>
-      <dsp:style>
-        <a:lnRef idx="2">
-          <a:scrgbClr r="0" g="0" b="0"/>
-        </a:lnRef>
-        <a:fillRef idx="1">
-          <a:scrgbClr r="0" g="0" b="0"/>
-        </a:fillRef>
-        <a:effectRef idx="0">
-          <a:scrgbClr r="0" g="0" b="0"/>
-        </a:effectRef>
-        <a:fontRef idx="minor">
-          <a:schemeClr val="lt1"/>
-        </a:fontRef>
-      </dsp:style>
-    </dsp:sp>
-    <dsp:sp modelId="{363885E6-19AA-4CEF-A807-E53B6948645D}">
-      <dsp:nvSpPr>
-        <dsp:cNvPr id="0" name=""/>
-        <dsp:cNvSpPr/>
-      </dsp:nvSpPr>
-      <dsp:spPr>
-        <a:xfrm>
-          <a:off x="0" y="3531848"/>
-          <a:ext cx="7012370" cy="1177282"/>
-        </a:xfrm>
-        <a:prstGeom prst="rect">
-          <a:avLst/>
-        </a:prstGeom>
-        <a:noFill/>
-        <a:ln>
-          <a:noFill/>
-        </a:ln>
-        <a:effectLst/>
-      </dsp:spPr>
-      <dsp:style>
-        <a:lnRef idx="0">
-          <a:scrgbClr r="0" g="0" b="0"/>
-        </a:lnRef>
-        <a:fillRef idx="0">
-          <a:scrgbClr r="0" g="0" b="0"/>
-        </a:fillRef>
-        <a:effectRef idx="0">
-          <a:scrgbClr r="0" g="0" b="0"/>
-        </a:effectRef>
-        <a:fontRef idx="minor"/>
-      </dsp:style>
-      <dsp:txBody>
-        <a:bodyPr spcFirstLastPara="0" vert="horz" wrap="square" lIns="68580" tIns="68580" rIns="68580" bIns="68580" numCol="1" spcCol="1270" anchor="t" anchorCtr="0">
-          <a:noAutofit/>
-        </a:bodyPr>
-        <a:lstStyle/>
-        <a:p>
-          <a:pPr marL="0" lvl="0" indent="0" algn="just" defTabSz="800100">
-            <a:lnSpc>
-              <a:spcPct val="90000"/>
-            </a:lnSpc>
-            <a:spcBef>
-              <a:spcPct val="0"/>
-            </a:spcBef>
-            <a:spcAft>
-              <a:spcPct val="35000"/>
-            </a:spcAft>
-            <a:buNone/>
-          </a:pPr>
-          <a:r>
-            <a:rPr lang="en-US" sz="1800" b="0" i="0" kern="1200" dirty="0"/>
-            <a:t>Enhanced computational resources and time allocation, potentially through cloud platforms, can optimize HTM model performance by allowing for more data and hyperparameter tuning in anomaly detection applications.</a:t>
-          </a:r>
-          <a:endParaRPr lang="en-US" sz="1800" kern="1200" dirty="0"/>
-        </a:p>
-      </dsp:txBody>
-      <dsp:txXfrm>
-        <a:off x="0" y="3531848"/>
-        <a:ext cx="7012370" cy="1177282"/>
-      </dsp:txXfrm>
-    </dsp:sp>
   </dsp:spTree>
 </dsp:drawing>
 </file>
@@ -4098,7 +3099,7 @@
   </dgm:layoutNode>
   <dgm:extLst>
     <a:ext uri="{68A01E43-0DF5-4B5B-8FA6-DAF915123BFB}">
-      <dgm1612:lstStyle xmlns:dgm1612="http://schemas.microsoft.com/office/drawing/2016/12/diagram">
+      <dgm1612:lstStyle xmlns="" xmlns:dgm1612="http://schemas.microsoft.com/office/drawing/2016/12/diagram">
         <a:lvl1pPr>
           <a:lnSpc>
             <a:spcPct val="100000"/>
@@ -6726,7 +5727,7 @@
           <a:p>
             <a:fld id="{FE8148D4-9014-475C-AC97-8AF4C70FC226}" type="datetimeFigureOut">
               <a:rPr lang="de-DE" smtClean="0"/>
-              <a:t>27.03.2025</a:t>
+              <a:t>28.03.2025</a:t>
             </a:fld>
             <a:endParaRPr lang="de-DE"/>
           </a:p>
@@ -7214,7 +6215,7 @@
           <p:cNvPr id="8" name="Date Placeholder 7">
             <a:extLst>
               <a:ext uri="{FF2B5EF4-FFF2-40B4-BE49-F238E27FC236}">
-                <a16:creationId xmlns:a16="http://schemas.microsoft.com/office/drawing/2014/main" id="{7FA0ACE7-29A8-47D3-A7D9-257B711D8023}"/>
+                <a16:creationId xmlns="" xmlns:a16="http://schemas.microsoft.com/office/drawing/2014/main" id="{7FA0ACE7-29A8-47D3-A7D9-257B711D8023}"/>
               </a:ext>
             </a:extLst>
           </p:cNvPr>
@@ -7232,7 +6233,7 @@
           <a:p>
             <a:fld id="{DE12E154-F8FB-4181-8C6E-946582017057}" type="datetime1">
               <a:rPr lang="en-US" smtClean="0"/>
-              <a:t>3/27/2025</a:t>
+              <a:t>3/28/2025</a:t>
             </a:fld>
             <a:endParaRPr lang="en-US" dirty="0"/>
           </a:p>
@@ -7243,7 +6244,7 @@
           <p:cNvPr id="9" name="Footer Placeholder 8">
             <a:extLst>
               <a:ext uri="{FF2B5EF4-FFF2-40B4-BE49-F238E27FC236}">
-                <a16:creationId xmlns:a16="http://schemas.microsoft.com/office/drawing/2014/main" id="{DEC604B9-52E9-4810-8359-47206518D038}"/>
+                <a16:creationId xmlns="" xmlns:a16="http://schemas.microsoft.com/office/drawing/2014/main" id="{DEC604B9-52E9-4810-8359-47206518D038}"/>
               </a:ext>
             </a:extLst>
           </p:cNvPr>
@@ -7272,7 +6273,7 @@
           <p:cNvPr id="10" name="Slide Number Placeholder 9">
             <a:extLst>
               <a:ext uri="{FF2B5EF4-FFF2-40B4-BE49-F238E27FC236}">
-                <a16:creationId xmlns:a16="http://schemas.microsoft.com/office/drawing/2014/main" id="{5898A89F-CA25-400F-B05A-AECBF2517E4F}"/>
+                <a16:creationId xmlns="" xmlns:a16="http://schemas.microsoft.com/office/drawing/2014/main" id="{5898A89F-CA25-400F-B05A-AECBF2517E4F}"/>
               </a:ext>
             </a:extLst>
           </p:cNvPr>
@@ -7439,7 +6440,7 @@
           <a:p>
             <a:fld id="{D3F6D1A9-48E2-405B-ABFE-133730FF333B}" type="datetime1">
               <a:rPr lang="en-US" smtClean="0"/>
-              <a:t>3/27/2025</a:t>
+              <a:t>3/28/2025</a:t>
             </a:fld>
             <a:endParaRPr lang="en-US" dirty="0"/>
           </a:p>
@@ -7658,7 +6659,7 @@
           <p:cNvPr id="8" name="Rectangle 7">
             <a:extLst>
               <a:ext uri="{FF2B5EF4-FFF2-40B4-BE49-F238E27FC236}">
-                <a16:creationId xmlns:a16="http://schemas.microsoft.com/office/drawing/2014/main" id="{F6423B97-A5D4-47B9-8861-73B3707A04CF}"/>
+                <a16:creationId xmlns="" xmlns:a16="http://schemas.microsoft.com/office/drawing/2014/main" id="{F6423B97-A5D4-47B9-8861-73B3707A04CF}"/>
               </a:ext>
             </a:extLst>
           </p:cNvPr>
@@ -7701,7 +6702,7 @@
           <p:cNvPr id="9" name="Rectangle 8">
             <a:extLst>
               <a:ext uri="{FF2B5EF4-FFF2-40B4-BE49-F238E27FC236}">
-                <a16:creationId xmlns:a16="http://schemas.microsoft.com/office/drawing/2014/main" id="{1AEC0421-37B4-4481-A10D-69FDF5EC7909}"/>
+                <a16:creationId xmlns="" xmlns:a16="http://schemas.microsoft.com/office/drawing/2014/main" id="{1AEC0421-37B4-4481-A10D-69FDF5EC7909}"/>
               </a:ext>
             </a:extLst>
           </p:cNvPr>
@@ -7744,7 +6745,7 @@
           <p:cNvPr id="10" name="Rectangle 9">
             <a:extLst>
               <a:ext uri="{FF2B5EF4-FFF2-40B4-BE49-F238E27FC236}">
-                <a16:creationId xmlns:a16="http://schemas.microsoft.com/office/drawing/2014/main" id="{5F7265B5-9F97-4F1E-99E9-74F7B7E62337}"/>
+                <a16:creationId xmlns="" xmlns:a16="http://schemas.microsoft.com/office/drawing/2014/main" id="{5F7265B5-9F97-4F1E-99E9-74F7B7E62337}"/>
               </a:ext>
             </a:extLst>
           </p:cNvPr>
@@ -7787,7 +6788,7 @@
           <p:cNvPr id="11" name="Date Placeholder 10">
             <a:extLst>
               <a:ext uri="{FF2B5EF4-FFF2-40B4-BE49-F238E27FC236}">
-                <a16:creationId xmlns:a16="http://schemas.microsoft.com/office/drawing/2014/main" id="{5C74A470-3BD3-4F33-80E5-67E6E87FCBE7}"/>
+                <a16:creationId xmlns="" xmlns:a16="http://schemas.microsoft.com/office/drawing/2014/main" id="{5C74A470-3BD3-4F33-80E5-67E6E87FCBE7}"/>
               </a:ext>
             </a:extLst>
           </p:cNvPr>
@@ -7805,7 +6806,7 @@
           <a:p>
             <a:fld id="{80E4B351-D277-4D9E-BEB8-E1442F7FAC92}" type="datetime1">
               <a:rPr lang="en-US" smtClean="0"/>
-              <a:t>3/27/2025</a:t>
+              <a:t>3/28/2025</a:t>
             </a:fld>
             <a:endParaRPr lang="en-US" dirty="0"/>
           </a:p>
@@ -7816,7 +6817,7 @@
           <p:cNvPr id="12" name="Footer Placeholder 11">
             <a:extLst>
               <a:ext uri="{FF2B5EF4-FFF2-40B4-BE49-F238E27FC236}">
-                <a16:creationId xmlns:a16="http://schemas.microsoft.com/office/drawing/2014/main" id="{9A3A30BA-DB50-4D7D-BCDE-17D20FB354DF}"/>
+                <a16:creationId xmlns="" xmlns:a16="http://schemas.microsoft.com/office/drawing/2014/main" id="{9A3A30BA-DB50-4D7D-BCDE-17D20FB354DF}"/>
               </a:ext>
             </a:extLst>
           </p:cNvPr>
@@ -7845,7 +6846,7 @@
           <p:cNvPr id="13" name="Slide Number Placeholder 12">
             <a:extLst>
               <a:ext uri="{FF2B5EF4-FFF2-40B4-BE49-F238E27FC236}">
-                <a16:creationId xmlns:a16="http://schemas.microsoft.com/office/drawing/2014/main" id="{76FF9E58-C0B2-436B-A21C-DB45A00D6515}"/>
+                <a16:creationId xmlns="" xmlns:a16="http://schemas.microsoft.com/office/drawing/2014/main" id="{76FF9E58-C0B2-436B-A21C-DB45A00D6515}"/>
               </a:ext>
             </a:extLst>
           </p:cNvPr>
@@ -7989,7 +6990,7 @@
           <p:cNvPr id="8" name="Date Placeholder 7">
             <a:extLst>
               <a:ext uri="{FF2B5EF4-FFF2-40B4-BE49-F238E27FC236}">
-                <a16:creationId xmlns:a16="http://schemas.microsoft.com/office/drawing/2014/main" id="{770E6237-3456-439F-802D-3BA93FC7E3E5}"/>
+                <a16:creationId xmlns="" xmlns:a16="http://schemas.microsoft.com/office/drawing/2014/main" id="{770E6237-3456-439F-802D-3BA93FC7E3E5}"/>
               </a:ext>
             </a:extLst>
           </p:cNvPr>
@@ -8007,7 +7008,7 @@
           <a:p>
             <a:fld id="{09843FE9-4D06-4A41-BEF1-B24D90A9F9ED}" type="datetime1">
               <a:rPr lang="en-US" smtClean="0"/>
-              <a:t>3/27/2025</a:t>
+              <a:t>3/28/2025</a:t>
             </a:fld>
             <a:endParaRPr lang="en-US" dirty="0"/>
           </a:p>
@@ -8018,7 +7019,7 @@
           <p:cNvPr id="9" name="Footer Placeholder 8">
             <a:extLst>
               <a:ext uri="{FF2B5EF4-FFF2-40B4-BE49-F238E27FC236}">
-                <a16:creationId xmlns:a16="http://schemas.microsoft.com/office/drawing/2014/main" id="{1356D3B5-6063-4A89-B88F-9D3043916FF8}"/>
+                <a16:creationId xmlns="" xmlns:a16="http://schemas.microsoft.com/office/drawing/2014/main" id="{1356D3B5-6063-4A89-B88F-9D3043916FF8}"/>
               </a:ext>
             </a:extLst>
           </p:cNvPr>
@@ -8047,7 +7048,7 @@
           <p:cNvPr id="10" name="Slide Number Placeholder 9">
             <a:extLst>
               <a:ext uri="{FF2B5EF4-FFF2-40B4-BE49-F238E27FC236}">
-                <a16:creationId xmlns:a16="http://schemas.microsoft.com/office/drawing/2014/main" id="{02B78BF7-69D3-4CE0-A631-50EFD41EEEB8}"/>
+                <a16:creationId xmlns="" xmlns:a16="http://schemas.microsoft.com/office/drawing/2014/main" id="{02B78BF7-69D3-4CE0-A631-50EFD41EEEB8}"/>
               </a:ext>
             </a:extLst>
           </p:cNvPr>
@@ -8305,7 +7306,7 @@
           <p:cNvPr id="7" name="Date Placeholder 6">
             <a:extLst>
               <a:ext uri="{FF2B5EF4-FFF2-40B4-BE49-F238E27FC236}">
-                <a16:creationId xmlns:a16="http://schemas.microsoft.com/office/drawing/2014/main" id="{61582016-5696-4A93-887F-BBB3B9002FE5}"/>
+                <a16:creationId xmlns="" xmlns:a16="http://schemas.microsoft.com/office/drawing/2014/main" id="{61582016-5696-4A93-887F-BBB3B9002FE5}"/>
               </a:ext>
             </a:extLst>
           </p:cNvPr>
@@ -8323,7 +7324,7 @@
           <a:p>
             <a:fld id="{674DCBAD-E9EB-4B79-94E3-0DAEA08F2165}" type="datetime1">
               <a:rPr lang="en-US" smtClean="0"/>
-              <a:t>3/27/2025</a:t>
+              <a:t>3/28/2025</a:t>
             </a:fld>
             <a:endParaRPr lang="en-US" dirty="0"/>
           </a:p>
@@ -8334,7 +7335,7 @@
           <p:cNvPr id="9" name="Footer Placeholder 8">
             <a:extLst>
               <a:ext uri="{FF2B5EF4-FFF2-40B4-BE49-F238E27FC236}">
-                <a16:creationId xmlns:a16="http://schemas.microsoft.com/office/drawing/2014/main" id="{857CFCD5-1192-4E18-8A8F-29E153B44DA4}"/>
+                <a16:creationId xmlns="" xmlns:a16="http://schemas.microsoft.com/office/drawing/2014/main" id="{857CFCD5-1192-4E18-8A8F-29E153B44DA4}"/>
               </a:ext>
             </a:extLst>
           </p:cNvPr>
@@ -8363,7 +7364,7 @@
           <p:cNvPr id="10" name="Slide Number Placeholder 9">
             <a:extLst>
               <a:ext uri="{FF2B5EF4-FFF2-40B4-BE49-F238E27FC236}">
-                <a16:creationId xmlns:a16="http://schemas.microsoft.com/office/drawing/2014/main" id="{E39A109E-5018-4794-92B3-FD5E5BCD95E8}"/>
+                <a16:creationId xmlns="" xmlns:a16="http://schemas.microsoft.com/office/drawing/2014/main" id="{E39A109E-5018-4794-92B3-FD5E5BCD95E8}"/>
               </a:ext>
             </a:extLst>
           </p:cNvPr>
@@ -8580,7 +7581,7 @@
           <a:p>
             <a:fld id="{F86F6435-BC5A-4D63-8431-2354F4A14938}" type="datetime1">
               <a:rPr lang="en-US" smtClean="0"/>
-              <a:t>3/27/2025</a:t>
+              <a:t>3/28/2025</a:t>
             </a:fld>
             <a:endParaRPr lang="en-US" dirty="0"/>
           </a:p>
@@ -9006,7 +8007,7 @@
           <a:p>
             <a:fld id="{1502C01B-FDDF-4844-A5D4-9CE70E85D3C3}" type="datetime1">
               <a:rPr lang="en-US" smtClean="0"/>
-              <a:t>3/27/2025</a:t>
+              <a:t>3/28/2025</a:t>
             </a:fld>
             <a:endParaRPr lang="en-US" dirty="0"/>
           </a:p>
@@ -9133,7 +8134,7 @@
           <a:p>
             <a:fld id="{47687636-C395-40B2-BA12-D49A21CA7429}" type="datetime1">
               <a:rPr lang="en-US" smtClean="0"/>
-              <a:t>3/27/2025</a:t>
+              <a:t>3/28/2025</a:t>
             </a:fld>
             <a:endParaRPr lang="en-US" dirty="0"/>
           </a:p>
@@ -9232,7 +8233,7 @@
           <a:p>
             <a:fld id="{BC337A2E-82AF-4785-A280-7EC9AC00E7CF}" type="datetime1">
               <a:rPr lang="en-US" smtClean="0"/>
-              <a:t>3/27/2025</a:t>
+              <a:t>3/28/2025</a:t>
             </a:fld>
             <a:endParaRPr lang="en-US" dirty="0"/>
           </a:p>
@@ -9590,7 +8591,7 @@
           <p:cNvPr id="8" name="Date Placeholder 7">
             <a:extLst>
               <a:ext uri="{FF2B5EF4-FFF2-40B4-BE49-F238E27FC236}">
-                <a16:creationId xmlns:a16="http://schemas.microsoft.com/office/drawing/2014/main" id="{0B919CC2-2A65-446F-B538-9E6249035445}"/>
+                <a16:creationId xmlns="" xmlns:a16="http://schemas.microsoft.com/office/drawing/2014/main" id="{0B919CC2-2A65-446F-B538-9E6249035445}"/>
               </a:ext>
             </a:extLst>
           </p:cNvPr>
@@ -9613,7 +8614,7 @@
           <a:p>
             <a:fld id="{9544AF48-6368-4AEB-BA61-86C35A0670BC}" type="datetime1">
               <a:rPr lang="en-US" smtClean="0"/>
-              <a:t>3/27/2025</a:t>
+              <a:t>3/28/2025</a:t>
             </a:fld>
             <a:endParaRPr lang="en-US" dirty="0"/>
           </a:p>
@@ -9624,7 +8625,7 @@
           <p:cNvPr id="10" name="Footer Placeholder 9">
             <a:extLst>
               <a:ext uri="{FF2B5EF4-FFF2-40B4-BE49-F238E27FC236}">
-                <a16:creationId xmlns:a16="http://schemas.microsoft.com/office/drawing/2014/main" id="{B72412AE-119E-4982-8B24-63365EFCA796}"/>
+                <a16:creationId xmlns="" xmlns:a16="http://schemas.microsoft.com/office/drawing/2014/main" id="{B72412AE-119E-4982-8B24-63365EFCA796}"/>
               </a:ext>
             </a:extLst>
           </p:cNvPr>
@@ -9658,7 +8659,7 @@
           <p:cNvPr id="11" name="Slide Number Placeholder 10">
             <a:extLst>
               <a:ext uri="{FF2B5EF4-FFF2-40B4-BE49-F238E27FC236}">
-                <a16:creationId xmlns:a16="http://schemas.microsoft.com/office/drawing/2014/main" id="{7FC4BB19-6AD1-45CF-9F99-00B109890FAB}"/>
+                <a16:creationId xmlns="" xmlns:a16="http://schemas.microsoft.com/office/drawing/2014/main" id="{7FC4BB19-6AD1-45CF-9F99-00B109890FAB}"/>
               </a:ext>
             </a:extLst>
           </p:cNvPr>
@@ -9910,7 +8911,7 @@
           <a:p>
             <a:fld id="{6A0AD317-F3FB-496C-99A4-43A2E3D62B38}" type="datetime1">
               <a:rPr lang="en-US" smtClean="0"/>
-              <a:t>3/27/2025</a:t>
+              <a:t>3/28/2025</a:t>
             </a:fld>
             <a:endParaRPr lang="en-US" dirty="0"/>
           </a:p>
@@ -10129,7 +9130,7 @@
           <a:p>
             <a:fld id="{F43DAC16-7D30-46B5-81CA-4A6DF4F80339}" type="datetime1">
               <a:rPr lang="en-US" smtClean="0"/>
-              <a:t>3/27/2025</a:t>
+              <a:t>3/28/2025</a:t>
             </a:fld>
             <a:endParaRPr lang="en-US" dirty="0"/>
           </a:p>
@@ -10790,10 +9791,10 @@
           <p:cNvPr id="64" name="Rectangle 63">
             <a:extLst>
               <a:ext uri="{FF2B5EF4-FFF2-40B4-BE49-F238E27FC236}">
-                <a16:creationId xmlns:a16="http://schemas.microsoft.com/office/drawing/2014/main" id="{DD651B61-325E-4E73-8445-38B0DE8AAAB6}"/>
+                <a16:creationId xmlns="" xmlns:a16="http://schemas.microsoft.com/office/drawing/2014/main" id="{DD651B61-325E-4E73-8445-38B0DE8AAAB6}"/>
               </a:ext>
               <a:ext uri="{C183D7F6-B498-43B3-948B-1728B52AA6E4}">
-                <adec:decorative xmlns:adec="http://schemas.microsoft.com/office/drawing/2017/decorative" val="1"/>
+                <adec:decorative xmlns="" xmlns:adec="http://schemas.microsoft.com/office/drawing/2017/decorative" val="1"/>
               </a:ext>
             </a:extLst>
           </p:cNvPr>
@@ -10803,7 +9804,7 @@
           <p:nvPr>
             <p:extLst>
               <p:ext uri="{386F3935-93C4-4BCD-93E2-E3B085C9AB24}">
-                <p16:designElem xmlns:p16="http://schemas.microsoft.com/office/powerpoint/2015/main" val="1"/>
+                <p16:designElem xmlns="" xmlns:p16="http://schemas.microsoft.com/office/powerpoint/2015/main" val="1"/>
               </p:ext>
             </p:extLst>
           </p:nvPr>
@@ -10851,10 +9852,10 @@
           <p:cNvPr id="66" name="Rectangle 65">
             <a:extLst>
               <a:ext uri="{FF2B5EF4-FFF2-40B4-BE49-F238E27FC236}">
-                <a16:creationId xmlns:a16="http://schemas.microsoft.com/office/drawing/2014/main" id="{B42E5253-D3AC-4AC2-B766-8B34F13C2F5E}"/>
+                <a16:creationId xmlns="" xmlns:a16="http://schemas.microsoft.com/office/drawing/2014/main" id="{B42E5253-D3AC-4AC2-B766-8B34F13C2F5E}"/>
               </a:ext>
               <a:ext uri="{C183D7F6-B498-43B3-948B-1728B52AA6E4}">
-                <adec:decorative xmlns:adec="http://schemas.microsoft.com/office/drawing/2017/decorative" val="1"/>
+                <adec:decorative xmlns="" xmlns:adec="http://schemas.microsoft.com/office/drawing/2017/decorative" val="1"/>
               </a:ext>
             </a:extLst>
           </p:cNvPr>
@@ -10864,7 +9865,7 @@
           <p:nvPr>
             <p:extLst>
               <p:ext uri="{386F3935-93C4-4BCD-93E2-E3B085C9AB24}">
-                <p16:designElem xmlns:p16="http://schemas.microsoft.com/office/powerpoint/2015/main" val="1"/>
+                <p16:designElem xmlns="" xmlns:p16="http://schemas.microsoft.com/office/powerpoint/2015/main" val="1"/>
               </p:ext>
             </p:extLst>
           </p:nvPr>
@@ -10912,10 +9913,10 @@
           <p:cNvPr id="68" name="Rectangle 67">
             <a:extLst>
               <a:ext uri="{FF2B5EF4-FFF2-40B4-BE49-F238E27FC236}">
-                <a16:creationId xmlns:a16="http://schemas.microsoft.com/office/drawing/2014/main" id="{10AE8D57-436A-4073-9A75-15BB5949F8B4}"/>
+                <a16:creationId xmlns="" xmlns:a16="http://schemas.microsoft.com/office/drawing/2014/main" id="{10AE8D57-436A-4073-9A75-15BB5949F8B4}"/>
               </a:ext>
               <a:ext uri="{C183D7F6-B498-43B3-948B-1728B52AA6E4}">
-                <adec:decorative xmlns:adec="http://schemas.microsoft.com/office/drawing/2017/decorative" val="1"/>
+                <adec:decorative xmlns="" xmlns:adec="http://schemas.microsoft.com/office/drawing/2017/decorative" val="1"/>
               </a:ext>
             </a:extLst>
           </p:cNvPr>
@@ -10925,7 +9926,7 @@
           <p:nvPr>
             <p:extLst>
               <p:ext uri="{386F3935-93C4-4BCD-93E2-E3B085C9AB24}">
-                <p16:designElem xmlns:p16="http://schemas.microsoft.com/office/powerpoint/2015/main" val="1"/>
+                <p16:designElem xmlns="" xmlns:p16="http://schemas.microsoft.com/office/powerpoint/2015/main" val="1"/>
               </p:ext>
             </p:extLst>
           </p:nvPr>
@@ -10973,10 +9974,10 @@
           <p:cNvPr id="70" name="Rectangle 69">
             <a:extLst>
               <a:ext uri="{FF2B5EF4-FFF2-40B4-BE49-F238E27FC236}">
-                <a16:creationId xmlns:a16="http://schemas.microsoft.com/office/drawing/2014/main" id="{FBB53F82-F191-4EEB-AB7B-F69E634FA3E8}"/>
+                <a16:creationId xmlns="" xmlns:a16="http://schemas.microsoft.com/office/drawing/2014/main" id="{FBB53F82-F191-4EEB-AB7B-F69E634FA3E8}"/>
               </a:ext>
               <a:ext uri="{C183D7F6-B498-43B3-948B-1728B52AA6E4}">
-                <adec:decorative xmlns:adec="http://schemas.microsoft.com/office/drawing/2017/decorative" val="1"/>
+                <adec:decorative xmlns="" xmlns:adec="http://schemas.microsoft.com/office/drawing/2017/decorative" val="1"/>
               </a:ext>
             </a:extLst>
           </p:cNvPr>
@@ -10986,7 +9987,7 @@
           <p:nvPr>
             <p:extLst>
               <p:ext uri="{386F3935-93C4-4BCD-93E2-E3B085C9AB24}">
-                <p16:designElem xmlns:p16="http://schemas.microsoft.com/office/powerpoint/2015/main" val="1"/>
+                <p16:designElem xmlns="" xmlns:p16="http://schemas.microsoft.com/office/powerpoint/2015/main" val="1"/>
               </p:ext>
             </p:extLst>
           </p:nvPr>
@@ -11033,7 +10034,7 @@
           <p:cNvPr id="11" name="Title 3">
             <a:extLst>
               <a:ext uri="{FF2B5EF4-FFF2-40B4-BE49-F238E27FC236}">
-                <a16:creationId xmlns:a16="http://schemas.microsoft.com/office/drawing/2014/main" id="{7F693C6B-DC40-BA5E-A313-043904EA6337}"/>
+                <a16:creationId xmlns="" xmlns:a16="http://schemas.microsoft.com/office/drawing/2014/main" id="{7F693C6B-DC40-BA5E-A313-043904EA6337}"/>
               </a:ext>
             </a:extLst>
           </p:cNvPr>
@@ -11071,10 +10072,10 @@
           <p:cNvPr id="72" name="Rectangle 71">
             <a:extLst>
               <a:ext uri="{FF2B5EF4-FFF2-40B4-BE49-F238E27FC236}">
-                <a16:creationId xmlns:a16="http://schemas.microsoft.com/office/drawing/2014/main" id="{8616AA08-3831-473D-B61B-89484A33CF65}"/>
+                <a16:creationId xmlns="" xmlns:a16="http://schemas.microsoft.com/office/drawing/2014/main" id="{8616AA08-3831-473D-B61B-89484A33CF65}"/>
               </a:ext>
               <a:ext uri="{C183D7F6-B498-43B3-948B-1728B52AA6E4}">
-                <adec:decorative xmlns:adec="http://schemas.microsoft.com/office/drawing/2017/decorative" val="1"/>
+                <adec:decorative xmlns="" xmlns:adec="http://schemas.microsoft.com/office/drawing/2017/decorative" val="1"/>
               </a:ext>
             </a:extLst>
           </p:cNvPr>
@@ -11084,7 +10085,7 @@
           <p:nvPr>
             <p:extLst>
               <p:ext uri="{386F3935-93C4-4BCD-93E2-E3B085C9AB24}">
-                <p16:designElem xmlns:p16="http://schemas.microsoft.com/office/powerpoint/2015/main" val="1"/>
+                <p16:designElem xmlns="" xmlns:p16="http://schemas.microsoft.com/office/powerpoint/2015/main" val="1"/>
               </p:ext>
             </p:extLst>
           </p:nvPr>
@@ -11132,10 +10133,10 @@
           <p:cNvPr id="74" name="Rectangle 73">
             <a:extLst>
               <a:ext uri="{FF2B5EF4-FFF2-40B4-BE49-F238E27FC236}">
-                <a16:creationId xmlns:a16="http://schemas.microsoft.com/office/drawing/2014/main" id="{8431B918-3A1C-46BA-9430-CAD97D9DA0FC}"/>
+                <a16:creationId xmlns="" xmlns:a16="http://schemas.microsoft.com/office/drawing/2014/main" id="{8431B918-3A1C-46BA-9430-CAD97D9DA0FC}"/>
               </a:ext>
               <a:ext uri="{C183D7F6-B498-43B3-948B-1728B52AA6E4}">
-                <adec:decorative xmlns:adec="http://schemas.microsoft.com/office/drawing/2017/decorative" val="1"/>
+                <adec:decorative xmlns="" xmlns:adec="http://schemas.microsoft.com/office/drawing/2017/decorative" val="1"/>
               </a:ext>
             </a:extLst>
           </p:cNvPr>
@@ -11145,7 +10146,7 @@
           <p:nvPr>
             <p:extLst>
               <p:ext uri="{386F3935-93C4-4BCD-93E2-E3B085C9AB24}">
-                <p16:designElem xmlns:p16="http://schemas.microsoft.com/office/powerpoint/2015/main" val="1"/>
+                <p16:designElem xmlns="" xmlns:p16="http://schemas.microsoft.com/office/powerpoint/2015/main" val="1"/>
               </p:ext>
             </p:extLst>
           </p:nvPr>
@@ -11193,10 +10194,10 @@
           <p:cNvPr id="76" name="Rectangle 75">
             <a:extLst>
               <a:ext uri="{FF2B5EF4-FFF2-40B4-BE49-F238E27FC236}">
-                <a16:creationId xmlns:a16="http://schemas.microsoft.com/office/drawing/2014/main" id="{8400935A-2F82-4DC4-A4E1-E12EFB8C2738}"/>
+                <a16:creationId xmlns="" xmlns:a16="http://schemas.microsoft.com/office/drawing/2014/main" id="{8400935A-2F82-4DC4-A4E1-E12EFB8C2738}"/>
               </a:ext>
               <a:ext uri="{C183D7F6-B498-43B3-948B-1728B52AA6E4}">
-                <adec:decorative xmlns:adec="http://schemas.microsoft.com/office/drawing/2017/decorative" val="1"/>
+                <adec:decorative xmlns="" xmlns:adec="http://schemas.microsoft.com/office/drawing/2017/decorative" val="1"/>
               </a:ext>
             </a:extLst>
           </p:cNvPr>
@@ -11206,7 +10207,7 @@
           <p:nvPr>
             <p:extLst>
               <p:ext uri="{386F3935-93C4-4BCD-93E2-E3B085C9AB24}">
-                <p16:designElem xmlns:p16="http://schemas.microsoft.com/office/powerpoint/2015/main" val="1"/>
+                <p16:designElem xmlns="" xmlns:p16="http://schemas.microsoft.com/office/powerpoint/2015/main" val="1"/>
               </p:ext>
             </p:extLst>
           </p:nvPr>
@@ -11254,10 +10255,10 @@
           <p:cNvPr id="78" name="Rectangle 77">
             <a:extLst>
               <a:ext uri="{FF2B5EF4-FFF2-40B4-BE49-F238E27FC236}">
-                <a16:creationId xmlns:a16="http://schemas.microsoft.com/office/drawing/2014/main" id="{A3D5D599-1CAE-4C92-B5AE-8E51AF6D47C9}"/>
+                <a16:creationId xmlns="" xmlns:a16="http://schemas.microsoft.com/office/drawing/2014/main" id="{A3D5D599-1CAE-4C92-B5AE-8E51AF6D47C9}"/>
               </a:ext>
               <a:ext uri="{C183D7F6-B498-43B3-948B-1728B52AA6E4}">
-                <adec:decorative xmlns:adec="http://schemas.microsoft.com/office/drawing/2017/decorative" val="1"/>
+                <adec:decorative xmlns="" xmlns:adec="http://schemas.microsoft.com/office/drawing/2017/decorative" val="1"/>
               </a:ext>
             </a:extLst>
           </p:cNvPr>
@@ -11267,7 +10268,7 @@
           <p:nvPr>
             <p:extLst>
               <p:ext uri="{386F3935-93C4-4BCD-93E2-E3B085C9AB24}">
-                <p16:designElem xmlns:p16="http://schemas.microsoft.com/office/powerpoint/2015/main" val="1"/>
+                <p16:designElem xmlns="" xmlns:p16="http://schemas.microsoft.com/office/powerpoint/2015/main" val="1"/>
               </p:ext>
             </p:extLst>
           </p:nvPr>
@@ -11319,7 +10320,7 @@
           <p:cNvPr id="4" name="Picture 3">
             <a:extLst>
               <a:ext uri="{FF2B5EF4-FFF2-40B4-BE49-F238E27FC236}">
-                <a16:creationId xmlns:a16="http://schemas.microsoft.com/office/drawing/2014/main" id="{B8EF81AB-8330-1414-5B26-8F5920F42CB5}"/>
+                <a16:creationId xmlns="" xmlns:a16="http://schemas.microsoft.com/office/drawing/2014/main" id="{B8EF81AB-8330-1414-5B26-8F5920F42CB5}"/>
               </a:ext>
             </a:extLst>
           </p:cNvPr>
@@ -11349,7 +10350,7 @@
           <p:cNvPr id="15" name="TextBox 14">
             <a:extLst>
               <a:ext uri="{FF2B5EF4-FFF2-40B4-BE49-F238E27FC236}">
-                <a16:creationId xmlns:a16="http://schemas.microsoft.com/office/drawing/2014/main" id="{7DF8A82C-F912-F605-2497-C691FF890768}"/>
+                <a16:creationId xmlns="" xmlns:a16="http://schemas.microsoft.com/office/drawing/2014/main" id="{7DF8A82C-F912-F605-2497-C691FF890768}"/>
               </a:ext>
             </a:extLst>
           </p:cNvPr>
@@ -11581,8 +10582,53 @@
                 </a:solidFill>
                 <a:latin typeface="Aptos" panose="020B0004020202020204" pitchFamily="34" charset="0"/>
               </a:rPr>
-              <a:t> Rahman</a:t>
-            </a:r>
+              <a:t> </a:t>
+            </a:r>
+            <a:r>
+              <a:rPr lang="en-US" dirty="0" smtClean="0">
+                <a:solidFill>
+                  <a:schemeClr val="tx1">
+                    <a:lumMod val="75000"/>
+                    <a:lumOff val="25000"/>
+                  </a:schemeClr>
+                </a:solidFill>
+                <a:latin typeface="Aptos" panose="020B0004020202020204" pitchFamily="34" charset="0"/>
+              </a:rPr>
+              <a:t>Rahman </a:t>
+            </a:r>
+            <a:r>
+              <a:rPr lang="en-US" dirty="0" smtClean="0">
+                <a:solidFill>
+                  <a:schemeClr val="tx1">
+                    <a:lumMod val="75000"/>
+                    <a:lumOff val="25000"/>
+                  </a:schemeClr>
+                </a:solidFill>
+                <a:latin typeface="Aptos" panose="020B0004020202020204" pitchFamily="34" charset="0"/>
+              </a:rPr>
+              <a:t> (1387353 </a:t>
+            </a:r>
+            <a:r>
+              <a:rPr lang="en-US" dirty="0" smtClean="0">
+                <a:solidFill>
+                  <a:schemeClr val="tx1">
+                    <a:lumMod val="75000"/>
+                    <a:lumOff val="25000"/>
+                  </a:schemeClr>
+                </a:solidFill>
+                <a:latin typeface="Aptos" panose="020B0004020202020204" pitchFamily="34" charset="0"/>
+              </a:rPr>
+              <a:t>)</a:t>
+            </a:r>
+            <a:endParaRPr lang="en-US" dirty="0">
+              <a:solidFill>
+                <a:schemeClr val="tx1">
+                  <a:lumMod val="75000"/>
+                  <a:lumOff val="25000"/>
+                </a:schemeClr>
+              </a:solidFill>
+              <a:latin typeface="Aptos" panose="020B0004020202020204" pitchFamily="34" charset="0"/>
+            </a:endParaRPr>
           </a:p>
           <a:p>
             <a:pPr marL="742950" lvl="1" indent="-285750" defTabSz="457200">
@@ -11633,8 +10679,53 @@
                 </a:solidFill>
                 <a:latin typeface="Aptos" panose="020B0004020202020204" pitchFamily="34" charset="0"/>
               </a:rPr>
-              <a:t> Islam Joni</a:t>
-            </a:r>
+              <a:t> Islam </a:t>
+            </a:r>
+            <a:r>
+              <a:rPr lang="en-US" dirty="0" smtClean="0">
+                <a:solidFill>
+                  <a:schemeClr val="tx1">
+                    <a:lumMod val="75000"/>
+                    <a:lumOff val="25000"/>
+                  </a:schemeClr>
+                </a:solidFill>
+                <a:latin typeface="Aptos" panose="020B0004020202020204" pitchFamily="34" charset="0"/>
+              </a:rPr>
+              <a:t>Joni </a:t>
+            </a:r>
+            <a:r>
+              <a:rPr lang="en-US" dirty="0" smtClean="0">
+                <a:solidFill>
+                  <a:schemeClr val="tx1">
+                    <a:lumMod val="75000"/>
+                    <a:lumOff val="25000"/>
+                  </a:schemeClr>
+                </a:solidFill>
+                <a:latin typeface="Aptos" panose="020B0004020202020204" pitchFamily="34" charset="0"/>
+              </a:rPr>
+              <a:t> (1432923 </a:t>
+            </a:r>
+            <a:r>
+              <a:rPr lang="en-US" dirty="0" smtClean="0">
+                <a:solidFill>
+                  <a:schemeClr val="tx1">
+                    <a:lumMod val="75000"/>
+                    <a:lumOff val="25000"/>
+                  </a:schemeClr>
+                </a:solidFill>
+                <a:latin typeface="Aptos" panose="020B0004020202020204" pitchFamily="34" charset="0"/>
+              </a:rPr>
+              <a:t>)</a:t>
+            </a:r>
+            <a:endParaRPr lang="en-US" dirty="0">
+              <a:solidFill>
+                <a:schemeClr val="tx1">
+                  <a:lumMod val="75000"/>
+                  <a:lumOff val="25000"/>
+                </a:schemeClr>
+              </a:solidFill>
+              <a:latin typeface="Aptos" panose="020B0004020202020204" pitchFamily="34" charset="0"/>
+            </a:endParaRPr>
           </a:p>
           <a:p>
             <a:pPr marL="742950" lvl="1" indent="-285750" defTabSz="457200">
@@ -11661,10 +10752,10 @@
                 </a:solidFill>
                 <a:latin typeface="Aptos" panose="020B0004020202020204" pitchFamily="34" charset="0"/>
               </a:rPr>
-              <a:t>Md </a:t>
-            </a:r>
-            <a:r>
-              <a:rPr lang="en-US" dirty="0" err="1">
+              <a:t>Md Rakibul Islam </a:t>
+            </a:r>
+            <a:r>
+              <a:rPr lang="en-US" dirty="0" smtClean="0">
                 <a:solidFill>
                   <a:schemeClr val="tx1">
                     <a:lumMod val="75000"/>
@@ -11673,10 +10764,10 @@
                 </a:solidFill>
                 <a:latin typeface="Aptos" panose="020B0004020202020204" pitchFamily="34" charset="0"/>
               </a:rPr>
-              <a:t>Rakibul</a:t>
-            </a:r>
-            <a:r>
-              <a:rPr lang="en-US" dirty="0">
+              <a:t> (1431500 </a:t>
+            </a:r>
+            <a:r>
+              <a:rPr lang="en-US" dirty="0" smtClean="0">
                 <a:solidFill>
                   <a:schemeClr val="tx1">
                     <a:lumMod val="75000"/>
@@ -11685,8 +10776,17 @@
                 </a:solidFill>
                 <a:latin typeface="Aptos" panose="020B0004020202020204" pitchFamily="34" charset="0"/>
               </a:rPr>
-              <a:t> Islam</a:t>
-            </a:r>
+              <a:t>)</a:t>
+            </a:r>
+            <a:endParaRPr lang="en-US" dirty="0">
+              <a:solidFill>
+                <a:schemeClr val="tx1">
+                  <a:lumMod val="75000"/>
+                  <a:lumOff val="25000"/>
+                </a:schemeClr>
+              </a:solidFill>
+              <a:latin typeface="Aptos" panose="020B0004020202020204" pitchFamily="34" charset="0"/>
+            </a:endParaRPr>
           </a:p>
         </p:txBody>
       </p:sp>
@@ -11695,7 +10795,7 @@
           <p:cNvPr id="13" name="Slide Number Placeholder 12">
             <a:extLst>
               <a:ext uri="{FF2B5EF4-FFF2-40B4-BE49-F238E27FC236}">
-                <a16:creationId xmlns:a16="http://schemas.microsoft.com/office/drawing/2014/main" id="{896CDD25-D80F-0169-698F-A382053777DD}"/>
+                <a16:creationId xmlns="" xmlns:a16="http://schemas.microsoft.com/office/drawing/2014/main" id="{896CDD25-D80F-0169-698F-A382053777DD}"/>
               </a:ext>
             </a:extLst>
           </p:cNvPr>
@@ -11779,7 +10879,7 @@
           <p:cNvPr id="2" name="Title 1">
             <a:extLst>
               <a:ext uri="{FF2B5EF4-FFF2-40B4-BE49-F238E27FC236}">
-                <a16:creationId xmlns:a16="http://schemas.microsoft.com/office/drawing/2014/main" id="{0A9AAD05-9A8B-C30B-B4D9-99E3A92A99B5}"/>
+                <a16:creationId xmlns="" xmlns:a16="http://schemas.microsoft.com/office/drawing/2014/main" id="{0A9AAD05-9A8B-C30B-B4D9-99E3A92A99B5}"/>
               </a:ext>
             </a:extLst>
           </p:cNvPr>
@@ -11812,7 +10912,7 @@
           <p:cNvPr id="3" name="Content Placeholder 2">
             <a:extLst>
               <a:ext uri="{FF2B5EF4-FFF2-40B4-BE49-F238E27FC236}">
-                <a16:creationId xmlns:a16="http://schemas.microsoft.com/office/drawing/2014/main" id="{7A29D8BD-886F-3049-F4A7-87F6F95E216B}"/>
+                <a16:creationId xmlns="" xmlns:a16="http://schemas.microsoft.com/office/drawing/2014/main" id="{7A29D8BD-886F-3049-F4A7-87F6F95E216B}"/>
               </a:ext>
             </a:extLst>
           </p:cNvPr>
@@ -11831,7 +10931,7 @@
         </p:spPr>
         <p:txBody>
           <a:bodyPr>
-            <a:normAutofit/>
+            <a:normAutofit lnSpcReduction="10000"/>
           </a:bodyPr>
           <a:lstStyle/>
           <a:p>
@@ -11924,7 +11024,7 @@
           <p:cNvPr id="5" name="Slide Number Placeholder 4">
             <a:extLst>
               <a:ext uri="{FF2B5EF4-FFF2-40B4-BE49-F238E27FC236}">
-                <a16:creationId xmlns:a16="http://schemas.microsoft.com/office/drawing/2014/main" id="{57203070-D601-457B-9DF7-A4611183F29A}"/>
+                <a16:creationId xmlns="" xmlns:a16="http://schemas.microsoft.com/office/drawing/2014/main" id="{57203070-D601-457B-9DF7-A4611183F29A}"/>
               </a:ext>
             </a:extLst>
           </p:cNvPr>
@@ -11953,7 +11053,7 @@
           <p:cNvPr id="7" name="Picture 6">
             <a:extLst>
               <a:ext uri="{FF2B5EF4-FFF2-40B4-BE49-F238E27FC236}">
-                <a16:creationId xmlns:a16="http://schemas.microsoft.com/office/drawing/2014/main" id="{667A415B-592E-E291-3ED2-A0EF405615FE}"/>
+                <a16:creationId xmlns="" xmlns:a16="http://schemas.microsoft.com/office/drawing/2014/main" id="{667A415B-592E-E291-3ED2-A0EF405615FE}"/>
               </a:ext>
             </a:extLst>
           </p:cNvPr>
@@ -11983,7 +11083,7 @@
           <p:cNvPr id="9" name="Picture 8">
             <a:extLst>
               <a:ext uri="{FF2B5EF4-FFF2-40B4-BE49-F238E27FC236}">
-                <a16:creationId xmlns:a16="http://schemas.microsoft.com/office/drawing/2014/main" id="{76784176-A071-91E1-C405-67C6D8AF4734}"/>
+                <a16:creationId xmlns="" xmlns:a16="http://schemas.microsoft.com/office/drawing/2014/main" id="{76784176-A071-91E1-C405-67C6D8AF4734}"/>
               </a:ext>
             </a:extLst>
           </p:cNvPr>
@@ -12043,7 +11143,7 @@
           <p:cNvPr id="2" name="Title 1">
             <a:extLst>
               <a:ext uri="{FF2B5EF4-FFF2-40B4-BE49-F238E27FC236}">
-                <a16:creationId xmlns:a16="http://schemas.microsoft.com/office/drawing/2014/main" id="{0A9AAD05-9A8B-C30B-B4D9-99E3A92A99B5}"/>
+                <a16:creationId xmlns="" xmlns:a16="http://schemas.microsoft.com/office/drawing/2014/main" id="{0A9AAD05-9A8B-C30B-B4D9-99E3A92A99B5}"/>
               </a:ext>
             </a:extLst>
           </p:cNvPr>
@@ -12076,7 +11176,7 @@
           <p:cNvPr id="5" name="Slide Number Placeholder 4">
             <a:extLst>
               <a:ext uri="{FF2B5EF4-FFF2-40B4-BE49-F238E27FC236}">
-                <a16:creationId xmlns:a16="http://schemas.microsoft.com/office/drawing/2014/main" id="{57203070-D601-457B-9DF7-A4611183F29A}"/>
+                <a16:creationId xmlns="" xmlns:a16="http://schemas.microsoft.com/office/drawing/2014/main" id="{57203070-D601-457B-9DF7-A4611183F29A}"/>
               </a:ext>
             </a:extLst>
           </p:cNvPr>
@@ -12105,7 +11205,7 @@
           <p:cNvPr id="10" name="TextBox 9">
             <a:extLst>
               <a:ext uri="{FF2B5EF4-FFF2-40B4-BE49-F238E27FC236}">
-                <a16:creationId xmlns:a16="http://schemas.microsoft.com/office/drawing/2014/main" id="{3710AD9B-9F24-E8D6-B646-8CCC5F54AE35}"/>
+                <a16:creationId xmlns="" xmlns:a16="http://schemas.microsoft.com/office/drawing/2014/main" id="{3710AD9B-9F24-E8D6-B646-8CCC5F54AE35}"/>
               </a:ext>
             </a:extLst>
           </p:cNvPr>
@@ -12175,7 +11275,7 @@
           <p:cNvPr id="12" name="Picture 11">
             <a:extLst>
               <a:ext uri="{FF2B5EF4-FFF2-40B4-BE49-F238E27FC236}">
-                <a16:creationId xmlns:a16="http://schemas.microsoft.com/office/drawing/2014/main" id="{EA568224-3995-93C6-193C-431FC17FA572}"/>
+                <a16:creationId xmlns="" xmlns:a16="http://schemas.microsoft.com/office/drawing/2014/main" id="{EA568224-3995-93C6-193C-431FC17FA572}"/>
               </a:ext>
             </a:extLst>
           </p:cNvPr>
@@ -12235,7 +11335,7 @@
           <p:cNvPr id="2" name="Title 1">
             <a:extLst>
               <a:ext uri="{FF2B5EF4-FFF2-40B4-BE49-F238E27FC236}">
-                <a16:creationId xmlns:a16="http://schemas.microsoft.com/office/drawing/2014/main" id="{0A9AAD05-9A8B-C30B-B4D9-99E3A92A99B5}"/>
+                <a16:creationId xmlns="" xmlns:a16="http://schemas.microsoft.com/office/drawing/2014/main" id="{0A9AAD05-9A8B-C30B-B4D9-99E3A92A99B5}"/>
               </a:ext>
             </a:extLst>
           </p:cNvPr>
@@ -12268,7 +11368,7 @@
           <p:cNvPr id="5" name="Slide Number Placeholder 4">
             <a:extLst>
               <a:ext uri="{FF2B5EF4-FFF2-40B4-BE49-F238E27FC236}">
-                <a16:creationId xmlns:a16="http://schemas.microsoft.com/office/drawing/2014/main" id="{57203070-D601-457B-9DF7-A4611183F29A}"/>
+                <a16:creationId xmlns="" xmlns:a16="http://schemas.microsoft.com/office/drawing/2014/main" id="{57203070-D601-457B-9DF7-A4611183F29A}"/>
               </a:ext>
             </a:extLst>
           </p:cNvPr>
@@ -12297,7 +11397,7 @@
           <p:cNvPr id="10" name="TextBox 9">
             <a:extLst>
               <a:ext uri="{FF2B5EF4-FFF2-40B4-BE49-F238E27FC236}">
-                <a16:creationId xmlns:a16="http://schemas.microsoft.com/office/drawing/2014/main" id="{3710AD9B-9F24-E8D6-B646-8CCC5F54AE35}"/>
+                <a16:creationId xmlns="" xmlns:a16="http://schemas.microsoft.com/office/drawing/2014/main" id="{3710AD9B-9F24-E8D6-B646-8CCC5F54AE35}"/>
               </a:ext>
             </a:extLst>
           </p:cNvPr>
@@ -12371,7 +11471,7 @@
           <p:cNvPr id="4" name="Picture 3">
             <a:extLst>
               <a:ext uri="{FF2B5EF4-FFF2-40B4-BE49-F238E27FC236}">
-                <a16:creationId xmlns:a16="http://schemas.microsoft.com/office/drawing/2014/main" id="{82A53E7F-D8AA-A16A-A5DE-F74F286522C3}"/>
+                <a16:creationId xmlns="" xmlns:a16="http://schemas.microsoft.com/office/drawing/2014/main" id="{82A53E7F-D8AA-A16A-A5DE-F74F286522C3}"/>
               </a:ext>
             </a:extLst>
           </p:cNvPr>
@@ -12431,7 +11531,7 @@
           <p:cNvPr id="2" name="Title 1">
             <a:extLst>
               <a:ext uri="{FF2B5EF4-FFF2-40B4-BE49-F238E27FC236}">
-                <a16:creationId xmlns:a16="http://schemas.microsoft.com/office/drawing/2014/main" id="{0A9AAD05-9A8B-C30B-B4D9-99E3A92A99B5}"/>
+                <a16:creationId xmlns="" xmlns:a16="http://schemas.microsoft.com/office/drawing/2014/main" id="{0A9AAD05-9A8B-C30B-B4D9-99E3A92A99B5}"/>
               </a:ext>
             </a:extLst>
           </p:cNvPr>
@@ -12464,7 +11564,7 @@
           <p:cNvPr id="5" name="Slide Number Placeholder 4">
             <a:extLst>
               <a:ext uri="{FF2B5EF4-FFF2-40B4-BE49-F238E27FC236}">
-                <a16:creationId xmlns:a16="http://schemas.microsoft.com/office/drawing/2014/main" id="{57203070-D601-457B-9DF7-A4611183F29A}"/>
+                <a16:creationId xmlns="" xmlns:a16="http://schemas.microsoft.com/office/drawing/2014/main" id="{57203070-D601-457B-9DF7-A4611183F29A}"/>
               </a:ext>
             </a:extLst>
           </p:cNvPr>
@@ -12493,7 +11593,7 @@
           <p:cNvPr id="10" name="TextBox 9">
             <a:extLst>
               <a:ext uri="{FF2B5EF4-FFF2-40B4-BE49-F238E27FC236}">
-                <a16:creationId xmlns:a16="http://schemas.microsoft.com/office/drawing/2014/main" id="{3710AD9B-9F24-E8D6-B646-8CCC5F54AE35}"/>
+                <a16:creationId xmlns="" xmlns:a16="http://schemas.microsoft.com/office/drawing/2014/main" id="{3710AD9B-9F24-E8D6-B646-8CCC5F54AE35}"/>
               </a:ext>
             </a:extLst>
           </p:cNvPr>
@@ -12528,12 +11628,11 @@
               <a:t>After that, we have ExecuteHTMModelTraining method of </a:t>
             </a:r>
             <a:r>
-              <a:rPr lang="en-US" b="0" i="0" u="sng" dirty="0">
+              <a:rPr lang="en-US" b="0" i="0" u="sng" dirty="0" err="1" smtClean="0">
                 <a:effectLst/>
                 <a:latin typeface="-apple-system"/>
-                <a:hlinkClick r:id="rId2"/>
               </a:rPr>
-              <a:t>HTMTrainingManager</a:t>
+              <a:t>HTMTrainingService</a:t>
             </a:r>
             <a:r>
               <a:rPr lang="en-US" b="0" i="0" dirty="0">
@@ -12562,7 +11661,7 @@
           <p:cNvPr id="6" name="Picture 5">
             <a:extLst>
               <a:ext uri="{FF2B5EF4-FFF2-40B4-BE49-F238E27FC236}">
-                <a16:creationId xmlns:a16="http://schemas.microsoft.com/office/drawing/2014/main" id="{8B66DA3A-FA51-4603-248A-989A1F71B8D5}"/>
+                <a16:creationId xmlns="" xmlns:a16="http://schemas.microsoft.com/office/drawing/2014/main" id="{8B66DA3A-FA51-4603-248A-989A1F71B8D5}"/>
               </a:ext>
             </a:extLst>
           </p:cNvPr>
@@ -12572,7 +11671,7 @@
           <p:nvPr/>
         </p:nvPicPr>
         <p:blipFill>
-          <a:blip r:embed="rId3"/>
+          <a:blip r:embed="rId2"/>
           <a:stretch>
             <a:fillRect/>
           </a:stretch>
@@ -12622,7 +11721,7 @@
           <p:cNvPr id="2" name="Title 1">
             <a:extLst>
               <a:ext uri="{FF2B5EF4-FFF2-40B4-BE49-F238E27FC236}">
-                <a16:creationId xmlns:a16="http://schemas.microsoft.com/office/drawing/2014/main" id="{0A9AAD05-9A8B-C30B-B4D9-99E3A92A99B5}"/>
+                <a16:creationId xmlns="" xmlns:a16="http://schemas.microsoft.com/office/drawing/2014/main" id="{0A9AAD05-9A8B-C30B-B4D9-99E3A92A99B5}"/>
               </a:ext>
             </a:extLst>
           </p:cNvPr>
@@ -12655,7 +11754,7 @@
           <p:cNvPr id="5" name="Slide Number Placeholder 4">
             <a:extLst>
               <a:ext uri="{FF2B5EF4-FFF2-40B4-BE49-F238E27FC236}">
-                <a16:creationId xmlns:a16="http://schemas.microsoft.com/office/drawing/2014/main" id="{57203070-D601-457B-9DF7-A4611183F29A}"/>
+                <a16:creationId xmlns="" xmlns:a16="http://schemas.microsoft.com/office/drawing/2014/main" id="{57203070-D601-457B-9DF7-A4611183F29A}"/>
               </a:ext>
             </a:extLst>
           </p:cNvPr>
@@ -12684,7 +11783,7 @@
           <p:cNvPr id="10" name="TextBox 9">
             <a:extLst>
               <a:ext uri="{FF2B5EF4-FFF2-40B4-BE49-F238E27FC236}">
-                <a16:creationId xmlns:a16="http://schemas.microsoft.com/office/drawing/2014/main" id="{3710AD9B-9F24-E8D6-B646-8CCC5F54AE35}"/>
+                <a16:creationId xmlns="" xmlns:a16="http://schemas.microsoft.com/office/drawing/2014/main" id="{3710AD9B-9F24-E8D6-B646-8CCC5F54AE35}"/>
               </a:ext>
             </a:extLst>
           </p:cNvPr>
@@ -12694,7 +11793,7 @@
         <p:spPr>
           <a:xfrm>
             <a:off x="792206" y="1475992"/>
-            <a:ext cx="9883324" cy="1200329"/>
+            <a:ext cx="9883324" cy="1477328"/>
           </a:xfrm>
           <a:prstGeom prst="rect">
             <a:avLst/>
@@ -12734,7 +11833,37 @@
                 <a:effectLst/>
                 <a:latin typeface="-apple-system"/>
               </a:rPr>
-              <a:t> to detected anomalies in sequences read from files inside predicting folder. All the classes explained earlier- CSV files reading (CsvSequenceFolder), combining and converting them for HTM training (CSVToHTMInputConverter) and training the HTM engine (using HTMTrainingManager) will be used here.</a:t>
+              <a:t> to detected anomalies in sequences read from files inside predicting folder. All the classes explained earlier- CSV files reading (CsvSequenceFolder), combining and converting them for HTM training (CSVToHTMInputConverter) and training the HTM engine (using </a:t>
+            </a:r>
+            <a:r>
+              <a:rPr lang="en-US" b="0" i="0" dirty="0" err="1" smtClean="0">
+                <a:solidFill>
+                  <a:srgbClr val="1F2328"/>
+                </a:solidFill>
+                <a:effectLst/>
+                <a:latin typeface="-apple-system"/>
+              </a:rPr>
+              <a:t>HTMTrainingService</a:t>
+            </a:r>
+            <a:r>
+              <a:rPr lang="en-US" b="0" i="0" dirty="0" smtClean="0">
+                <a:solidFill>
+                  <a:srgbClr val="1F2328"/>
+                </a:solidFill>
+                <a:effectLst/>
+                <a:latin typeface="-apple-system"/>
+              </a:rPr>
+              <a:t>) </a:t>
+            </a:r>
+            <a:r>
+              <a:rPr lang="en-US" b="0" i="0" dirty="0">
+                <a:solidFill>
+                  <a:srgbClr val="1F2328"/>
+                </a:solidFill>
+                <a:effectLst/>
+                <a:latin typeface="-apple-system"/>
+              </a:rPr>
+              <a:t>will be used here.</a:t>
             </a:r>
             <a:endParaRPr lang="en-US" dirty="0"/>
           </a:p>
@@ -12745,7 +11874,7 @@
           <p:cNvPr id="4" name="Picture 3">
             <a:extLst>
               <a:ext uri="{FF2B5EF4-FFF2-40B4-BE49-F238E27FC236}">
-                <a16:creationId xmlns:a16="http://schemas.microsoft.com/office/drawing/2014/main" id="{91680CEF-8B3A-376C-E62A-05CAD6B89E2E}"/>
+                <a16:creationId xmlns="" xmlns:a16="http://schemas.microsoft.com/office/drawing/2014/main" id="{91680CEF-8B3A-376C-E62A-05CAD6B89E2E}"/>
               </a:ext>
             </a:extLst>
           </p:cNvPr>
@@ -12762,7 +11891,7 @@
         </p:blipFill>
         <p:spPr>
           <a:xfrm>
-            <a:off x="792206" y="2819675"/>
+            <a:off x="792206" y="2915211"/>
             <a:ext cx="7582958" cy="1560128"/>
           </a:xfrm>
           <a:prstGeom prst="rect">
@@ -12775,7 +11904,7 @@
           <p:cNvPr id="8" name="TextBox 7">
             <a:extLst>
               <a:ext uri="{FF2B5EF4-FFF2-40B4-BE49-F238E27FC236}">
-                <a16:creationId xmlns:a16="http://schemas.microsoft.com/office/drawing/2014/main" id="{4CC68AEC-DBA2-17BD-6292-D5299F0D2FC3}"/>
+                <a16:creationId xmlns="" xmlns:a16="http://schemas.microsoft.com/office/drawing/2014/main" id="{4CC68AEC-DBA2-17BD-6292-D5299F0D2FC3}"/>
               </a:ext>
             </a:extLst>
           </p:cNvPr>
@@ -12817,7 +11946,7 @@
           <p:cNvPr id="11" name="Picture 10">
             <a:extLst>
               <a:ext uri="{FF2B5EF4-FFF2-40B4-BE49-F238E27FC236}">
-                <a16:creationId xmlns:a16="http://schemas.microsoft.com/office/drawing/2014/main" id="{A0CA7150-C037-D918-7607-A7EC6051B81E}"/>
+                <a16:creationId xmlns="" xmlns:a16="http://schemas.microsoft.com/office/drawing/2014/main" id="{A0CA7150-C037-D918-7607-A7EC6051B81E}"/>
               </a:ext>
             </a:extLst>
           </p:cNvPr>
@@ -12877,7 +12006,7 @@
           <p:cNvPr id="2" name="Title 1">
             <a:extLst>
               <a:ext uri="{FF2B5EF4-FFF2-40B4-BE49-F238E27FC236}">
-                <a16:creationId xmlns:a16="http://schemas.microsoft.com/office/drawing/2014/main" id="{0A9AAD05-9A8B-C30B-B4D9-99E3A92A99B5}"/>
+                <a16:creationId xmlns="" xmlns:a16="http://schemas.microsoft.com/office/drawing/2014/main" id="{0A9AAD05-9A8B-C30B-B4D9-99E3A92A99B5}"/>
               </a:ext>
             </a:extLst>
           </p:cNvPr>
@@ -12910,7 +12039,7 @@
           <p:cNvPr id="5" name="Slide Number Placeholder 4">
             <a:extLst>
               <a:ext uri="{FF2B5EF4-FFF2-40B4-BE49-F238E27FC236}">
-                <a16:creationId xmlns:a16="http://schemas.microsoft.com/office/drawing/2014/main" id="{57203070-D601-457B-9DF7-A4611183F29A}"/>
+                <a16:creationId xmlns="" xmlns:a16="http://schemas.microsoft.com/office/drawing/2014/main" id="{57203070-D601-457B-9DF7-A4611183F29A}"/>
               </a:ext>
             </a:extLst>
           </p:cNvPr>
@@ -12939,7 +12068,7 @@
           <p:cNvPr id="10" name="TextBox 9">
             <a:extLst>
               <a:ext uri="{FF2B5EF4-FFF2-40B4-BE49-F238E27FC236}">
-                <a16:creationId xmlns:a16="http://schemas.microsoft.com/office/drawing/2014/main" id="{3710AD9B-9F24-E8D6-B646-8CCC5F54AE35}"/>
+                <a16:creationId xmlns="" xmlns:a16="http://schemas.microsoft.com/office/drawing/2014/main" id="{3710AD9B-9F24-E8D6-B646-8CCC5F54AE35}"/>
               </a:ext>
             </a:extLst>
           </p:cNvPr>
@@ -13002,7 +12131,7 @@
           <p:cNvPr id="6" name="Picture 5">
             <a:extLst>
               <a:ext uri="{FF2B5EF4-FFF2-40B4-BE49-F238E27FC236}">
-                <a16:creationId xmlns:a16="http://schemas.microsoft.com/office/drawing/2014/main" id="{9B840754-171B-8DC0-393E-9B661E85DCE5}"/>
+                <a16:creationId xmlns="" xmlns:a16="http://schemas.microsoft.com/office/drawing/2014/main" id="{9B840754-171B-8DC0-393E-9B661E85DCE5}"/>
               </a:ext>
             </a:extLst>
           </p:cNvPr>
@@ -13032,7 +12161,7 @@
           <p:cNvPr id="8" name="TextBox 7">
             <a:extLst>
               <a:ext uri="{FF2B5EF4-FFF2-40B4-BE49-F238E27FC236}">
-                <a16:creationId xmlns:a16="http://schemas.microsoft.com/office/drawing/2014/main" id="{28EB8013-A253-B676-582F-3F3F37CBA901}"/>
+                <a16:creationId xmlns="" xmlns:a16="http://schemas.microsoft.com/office/drawing/2014/main" id="{28EB8013-A253-B676-582F-3F3F37CBA901}"/>
               </a:ext>
             </a:extLst>
           </p:cNvPr>
@@ -13102,7 +12231,7 @@
           <p:cNvPr id="11" name="Picture 10">
             <a:extLst>
               <a:ext uri="{FF2B5EF4-FFF2-40B4-BE49-F238E27FC236}">
-                <a16:creationId xmlns:a16="http://schemas.microsoft.com/office/drawing/2014/main" id="{63296744-9891-84A8-5F05-D4E359E00147}"/>
+                <a16:creationId xmlns="" xmlns:a16="http://schemas.microsoft.com/office/drawing/2014/main" id="{63296744-9891-84A8-5F05-D4E359E00147}"/>
               </a:ext>
             </a:extLst>
           </p:cNvPr>
@@ -13162,7 +12291,7 @@
           <p:cNvPr id="2" name="Title 1">
             <a:extLst>
               <a:ext uri="{FF2B5EF4-FFF2-40B4-BE49-F238E27FC236}">
-                <a16:creationId xmlns:a16="http://schemas.microsoft.com/office/drawing/2014/main" id="{0A9AAD05-9A8B-C30B-B4D9-99E3A92A99B5}"/>
+                <a16:creationId xmlns="" xmlns:a16="http://schemas.microsoft.com/office/drawing/2014/main" id="{0A9AAD05-9A8B-C30B-B4D9-99E3A92A99B5}"/>
               </a:ext>
             </a:extLst>
           </p:cNvPr>
@@ -13195,7 +12324,7 @@
           <p:cNvPr id="5" name="Slide Number Placeholder 4">
             <a:extLst>
               <a:ext uri="{FF2B5EF4-FFF2-40B4-BE49-F238E27FC236}">
-                <a16:creationId xmlns:a16="http://schemas.microsoft.com/office/drawing/2014/main" id="{57203070-D601-457B-9DF7-A4611183F29A}"/>
+                <a16:creationId xmlns="" xmlns:a16="http://schemas.microsoft.com/office/drawing/2014/main" id="{57203070-D601-457B-9DF7-A4611183F29A}"/>
               </a:ext>
             </a:extLst>
           </p:cNvPr>
@@ -13224,7 +12353,7 @@
           <p:cNvPr id="10" name="TextBox 9">
             <a:extLst>
               <a:ext uri="{FF2B5EF4-FFF2-40B4-BE49-F238E27FC236}">
-                <a16:creationId xmlns:a16="http://schemas.microsoft.com/office/drawing/2014/main" id="{3710AD9B-9F24-E8D6-B646-8CCC5F54AE35}"/>
+                <a16:creationId xmlns="" xmlns:a16="http://schemas.microsoft.com/office/drawing/2014/main" id="{3710AD9B-9F24-E8D6-B646-8CCC5F54AE35}"/>
               </a:ext>
             </a:extLst>
           </p:cNvPr>
@@ -13267,7 +12396,7 @@
           <p:cNvPr id="8" name="TextBox 7">
             <a:extLst>
               <a:ext uri="{FF2B5EF4-FFF2-40B4-BE49-F238E27FC236}">
-                <a16:creationId xmlns:a16="http://schemas.microsoft.com/office/drawing/2014/main" id="{28EB8013-A253-B676-582F-3F3F37CBA901}"/>
+                <a16:creationId xmlns="" xmlns:a16="http://schemas.microsoft.com/office/drawing/2014/main" id="{28EB8013-A253-B676-582F-3F3F37CBA901}"/>
               </a:ext>
             </a:extLst>
           </p:cNvPr>
@@ -13309,7 +12438,7 @@
           <p:cNvPr id="4" name="Picture 3">
             <a:extLst>
               <a:ext uri="{FF2B5EF4-FFF2-40B4-BE49-F238E27FC236}">
-                <a16:creationId xmlns:a16="http://schemas.microsoft.com/office/drawing/2014/main" id="{2CCF0E66-1FAD-2F05-A345-BF521205AA58}"/>
+                <a16:creationId xmlns="" xmlns:a16="http://schemas.microsoft.com/office/drawing/2014/main" id="{2CCF0E66-1FAD-2F05-A345-BF521205AA58}"/>
               </a:ext>
             </a:extLst>
           </p:cNvPr>
@@ -13339,7 +12468,7 @@
           <p:cNvPr id="9" name="Picture 8">
             <a:extLst>
               <a:ext uri="{FF2B5EF4-FFF2-40B4-BE49-F238E27FC236}">
-                <a16:creationId xmlns:a16="http://schemas.microsoft.com/office/drawing/2014/main" id="{4CFD010F-BF09-73AD-9DA9-D6D7D842CE92}"/>
+                <a16:creationId xmlns="" xmlns:a16="http://schemas.microsoft.com/office/drawing/2014/main" id="{4CFD010F-BF09-73AD-9DA9-D6D7D842CE92}"/>
               </a:ext>
             </a:extLst>
           </p:cNvPr>
@@ -13399,7 +12528,7 @@
           <p:cNvPr id="2" name="Title 1">
             <a:extLst>
               <a:ext uri="{FF2B5EF4-FFF2-40B4-BE49-F238E27FC236}">
-                <a16:creationId xmlns:a16="http://schemas.microsoft.com/office/drawing/2014/main" id="{0A9AAD05-9A8B-C30B-B4D9-99E3A92A99B5}"/>
+                <a16:creationId xmlns="" xmlns:a16="http://schemas.microsoft.com/office/drawing/2014/main" id="{0A9AAD05-9A8B-C30B-B4D9-99E3A92A99B5}"/>
               </a:ext>
             </a:extLst>
           </p:cNvPr>
@@ -13432,7 +12561,7 @@
           <p:cNvPr id="5" name="Slide Number Placeholder 4">
             <a:extLst>
               <a:ext uri="{FF2B5EF4-FFF2-40B4-BE49-F238E27FC236}">
-                <a16:creationId xmlns:a16="http://schemas.microsoft.com/office/drawing/2014/main" id="{57203070-D601-457B-9DF7-A4611183F29A}"/>
+                <a16:creationId xmlns="" xmlns:a16="http://schemas.microsoft.com/office/drawing/2014/main" id="{57203070-D601-457B-9DF7-A4611183F29A}"/>
               </a:ext>
             </a:extLst>
           </p:cNvPr>
@@ -13461,7 +12590,7 @@
           <p:cNvPr id="10" name="TextBox 9">
             <a:extLst>
               <a:ext uri="{FF2B5EF4-FFF2-40B4-BE49-F238E27FC236}">
-                <a16:creationId xmlns:a16="http://schemas.microsoft.com/office/drawing/2014/main" id="{3710AD9B-9F24-E8D6-B646-8CCC5F54AE35}"/>
+                <a16:creationId xmlns="" xmlns:a16="http://schemas.microsoft.com/office/drawing/2014/main" id="{3710AD9B-9F24-E8D6-B646-8CCC5F54AE35}"/>
               </a:ext>
             </a:extLst>
           </p:cNvPr>
@@ -13607,10 +12736,10 @@
           <p:cNvPr id="55" name="Rectangle 54">
             <a:extLst>
               <a:ext uri="{FF2B5EF4-FFF2-40B4-BE49-F238E27FC236}">
-                <a16:creationId xmlns:a16="http://schemas.microsoft.com/office/drawing/2014/main" id="{FBB53F82-F191-4EEB-AB7B-F69E634FA3E8}"/>
+                <a16:creationId xmlns="" xmlns:a16="http://schemas.microsoft.com/office/drawing/2014/main" id="{FBB53F82-F191-4EEB-AB7B-F69E634FA3E8}"/>
               </a:ext>
               <a:ext uri="{C183D7F6-B498-43B3-948B-1728B52AA6E4}">
-                <adec:decorative xmlns:adec="http://schemas.microsoft.com/office/drawing/2017/decorative" val="1"/>
+                <adec:decorative xmlns="" xmlns:adec="http://schemas.microsoft.com/office/drawing/2017/decorative" val="1"/>
               </a:ext>
             </a:extLst>
           </p:cNvPr>
@@ -13620,7 +12749,7 @@
           <p:nvPr>
             <p:extLst>
               <p:ext uri="{386F3935-93C4-4BCD-93E2-E3B085C9AB24}">
-                <p16:designElem xmlns:p16="http://schemas.microsoft.com/office/powerpoint/2015/main" val="1"/>
+                <p16:designElem xmlns="" xmlns:p16="http://schemas.microsoft.com/office/powerpoint/2015/main" val="1"/>
               </p:ext>
             </p:extLst>
           </p:nvPr>
@@ -13667,7 +12796,7 @@
           <p:cNvPr id="7" name="Title 3">
             <a:extLst>
               <a:ext uri="{FF2B5EF4-FFF2-40B4-BE49-F238E27FC236}">
-                <a16:creationId xmlns:a16="http://schemas.microsoft.com/office/drawing/2014/main" id="{AA9E537E-8F1D-CE1E-C433-D916E2A818CB}"/>
+                <a16:creationId xmlns="" xmlns:a16="http://schemas.microsoft.com/office/drawing/2014/main" id="{AA9E537E-8F1D-CE1E-C433-D916E2A818CB}"/>
               </a:ext>
             </a:extLst>
           </p:cNvPr>
@@ -13785,10 +12914,10 @@
           <p:cNvPr id="56" name="Rectangle 55">
             <a:extLst>
               <a:ext uri="{FF2B5EF4-FFF2-40B4-BE49-F238E27FC236}">
-                <a16:creationId xmlns:a16="http://schemas.microsoft.com/office/drawing/2014/main" id="{8616AA08-3831-473D-B61B-89484A33CF65}"/>
+                <a16:creationId xmlns="" xmlns:a16="http://schemas.microsoft.com/office/drawing/2014/main" id="{8616AA08-3831-473D-B61B-89484A33CF65}"/>
               </a:ext>
               <a:ext uri="{C183D7F6-B498-43B3-948B-1728B52AA6E4}">
-                <adec:decorative xmlns:adec="http://schemas.microsoft.com/office/drawing/2017/decorative" val="1"/>
+                <adec:decorative xmlns="" xmlns:adec="http://schemas.microsoft.com/office/drawing/2017/decorative" val="1"/>
               </a:ext>
             </a:extLst>
           </p:cNvPr>
@@ -13798,7 +12927,7 @@
           <p:nvPr>
             <p:extLst>
               <p:ext uri="{386F3935-93C4-4BCD-93E2-E3B085C9AB24}">
-                <p16:designElem xmlns:p16="http://schemas.microsoft.com/office/powerpoint/2015/main" val="1"/>
+                <p16:designElem xmlns="" xmlns:p16="http://schemas.microsoft.com/office/powerpoint/2015/main" val="1"/>
               </p:ext>
             </p:extLst>
           </p:nvPr>
@@ -13846,10 +12975,10 @@
           <p:cNvPr id="57" name="Rectangle 56">
             <a:extLst>
               <a:ext uri="{FF2B5EF4-FFF2-40B4-BE49-F238E27FC236}">
-                <a16:creationId xmlns:a16="http://schemas.microsoft.com/office/drawing/2014/main" id="{8431B918-3A1C-46BA-9430-CAD97D9DA0FC}"/>
+                <a16:creationId xmlns="" xmlns:a16="http://schemas.microsoft.com/office/drawing/2014/main" id="{8431B918-3A1C-46BA-9430-CAD97D9DA0FC}"/>
               </a:ext>
               <a:ext uri="{C183D7F6-B498-43B3-948B-1728B52AA6E4}">
-                <adec:decorative xmlns:adec="http://schemas.microsoft.com/office/drawing/2017/decorative" val="1"/>
+                <adec:decorative xmlns="" xmlns:adec="http://schemas.microsoft.com/office/drawing/2017/decorative" val="1"/>
               </a:ext>
             </a:extLst>
           </p:cNvPr>
@@ -13859,7 +12988,7 @@
           <p:nvPr>
             <p:extLst>
               <p:ext uri="{386F3935-93C4-4BCD-93E2-E3B085C9AB24}">
-                <p16:designElem xmlns:p16="http://schemas.microsoft.com/office/powerpoint/2015/main" val="1"/>
+                <p16:designElem xmlns="" xmlns:p16="http://schemas.microsoft.com/office/powerpoint/2015/main" val="1"/>
               </p:ext>
             </p:extLst>
           </p:nvPr>
@@ -13907,10 +13036,10 @@
           <p:cNvPr id="58" name="Rectangle 57">
             <a:extLst>
               <a:ext uri="{FF2B5EF4-FFF2-40B4-BE49-F238E27FC236}">
-                <a16:creationId xmlns:a16="http://schemas.microsoft.com/office/drawing/2014/main" id="{8400935A-2F82-4DC4-A4E1-E12EFB8C2738}"/>
+                <a16:creationId xmlns="" xmlns:a16="http://schemas.microsoft.com/office/drawing/2014/main" id="{8400935A-2F82-4DC4-A4E1-E12EFB8C2738}"/>
               </a:ext>
               <a:ext uri="{C183D7F6-B498-43B3-948B-1728B52AA6E4}">
-                <adec:decorative xmlns:adec="http://schemas.microsoft.com/office/drawing/2017/decorative" val="1"/>
+                <adec:decorative xmlns="" xmlns:adec="http://schemas.microsoft.com/office/drawing/2017/decorative" val="1"/>
               </a:ext>
             </a:extLst>
           </p:cNvPr>
@@ -13920,7 +13049,7 @@
           <p:nvPr>
             <p:extLst>
               <p:ext uri="{386F3935-93C4-4BCD-93E2-E3B085C9AB24}">
-                <p16:designElem xmlns:p16="http://schemas.microsoft.com/office/powerpoint/2015/main" val="1"/>
+                <p16:designElem xmlns="" xmlns:p16="http://schemas.microsoft.com/office/powerpoint/2015/main" val="1"/>
               </p:ext>
             </p:extLst>
           </p:nvPr>
@@ -13968,10 +13097,10 @@
           <p:cNvPr id="59" name="Rectangle 58">
             <a:extLst>
               <a:ext uri="{FF2B5EF4-FFF2-40B4-BE49-F238E27FC236}">
-                <a16:creationId xmlns:a16="http://schemas.microsoft.com/office/drawing/2014/main" id="{A3D5D599-1CAE-4C92-B5AE-8E51AF6D47C9}"/>
+                <a16:creationId xmlns="" xmlns:a16="http://schemas.microsoft.com/office/drawing/2014/main" id="{A3D5D599-1CAE-4C92-B5AE-8E51AF6D47C9}"/>
               </a:ext>
               <a:ext uri="{C183D7F6-B498-43B3-948B-1728B52AA6E4}">
-                <adec:decorative xmlns:adec="http://schemas.microsoft.com/office/drawing/2017/decorative" val="1"/>
+                <adec:decorative xmlns="" xmlns:adec="http://schemas.microsoft.com/office/drawing/2017/decorative" val="1"/>
               </a:ext>
             </a:extLst>
           </p:cNvPr>
@@ -13981,7 +13110,7 @@
           <p:nvPr>
             <p:extLst>
               <p:ext uri="{386F3935-93C4-4BCD-93E2-E3B085C9AB24}">
-                <p16:designElem xmlns:p16="http://schemas.microsoft.com/office/powerpoint/2015/main" val="1"/>
+                <p16:designElem xmlns="" xmlns:p16="http://schemas.microsoft.com/office/powerpoint/2015/main" val="1"/>
               </p:ext>
             </p:extLst>
           </p:nvPr>
@@ -14033,7 +13162,7 @@
           <p:cNvPr id="9" name="Picture 8">
             <a:extLst>
               <a:ext uri="{FF2B5EF4-FFF2-40B4-BE49-F238E27FC236}">
-                <a16:creationId xmlns:a16="http://schemas.microsoft.com/office/drawing/2014/main" id="{B92CE03F-890F-C587-01FA-601ED081496E}"/>
+                <a16:creationId xmlns="" xmlns:a16="http://schemas.microsoft.com/office/drawing/2014/main" id="{B92CE03F-890F-C587-01FA-601ED081496E}"/>
               </a:ext>
             </a:extLst>
           </p:cNvPr>
@@ -14063,7 +13192,7 @@
           <p:cNvPr id="6" name="TextBox 5">
             <a:extLst>
               <a:ext uri="{FF2B5EF4-FFF2-40B4-BE49-F238E27FC236}">
-                <a16:creationId xmlns:a16="http://schemas.microsoft.com/office/drawing/2014/main" id="{A57CE0FA-5284-2C21-392D-79C5D5E7A8AE}"/>
+                <a16:creationId xmlns="" xmlns:a16="http://schemas.microsoft.com/office/drawing/2014/main" id="{A57CE0FA-5284-2C21-392D-79C5D5E7A8AE}"/>
               </a:ext>
             </a:extLst>
           </p:cNvPr>
@@ -14150,6 +13279,18 @@
               </a:buClr>
               <a:buSzPct val="92000"/>
             </a:pPr>
+            <a:r>
+              <a:rPr lang="en-US" b="0" i="0" u="sng" dirty="0">
+                <a:solidFill>
+                  <a:schemeClr val="tx1">
+                    <a:lumMod val="75000"/>
+                    <a:lumOff val="25000"/>
+                  </a:schemeClr>
+                </a:solidFill>
+                <a:effectLst/>
+              </a:rPr>
+              <a:t/>
+            </a:r>
             <a:br>
               <a:rPr lang="en-US" b="0" i="0" u="sng" dirty="0">
                 <a:solidFill>
@@ -14230,7 +13371,7 @@
           <p:cNvPr id="5" name="Slide Number Placeholder 4">
             <a:extLst>
               <a:ext uri="{FF2B5EF4-FFF2-40B4-BE49-F238E27FC236}">
-                <a16:creationId xmlns:a16="http://schemas.microsoft.com/office/drawing/2014/main" id="{2687D6E6-D5FA-4C9E-C76D-CC433D92DBC4}"/>
+                <a16:creationId xmlns="" xmlns:a16="http://schemas.microsoft.com/office/drawing/2014/main" id="{2687D6E6-D5FA-4C9E-C76D-CC433D92DBC4}"/>
               </a:ext>
             </a:extLst>
           </p:cNvPr>
@@ -14308,7 +13449,7 @@
         <p:cNvPr id="1" name="">
           <a:extLst>
             <a:ext uri="{FF2B5EF4-FFF2-40B4-BE49-F238E27FC236}">
-              <a16:creationId xmlns:a16="http://schemas.microsoft.com/office/drawing/2014/main" id="{F5F60F02-C948-1B8C-06E4-2D8D8DF339FE}"/>
+              <a16:creationId xmlns="" xmlns:a16="http://schemas.microsoft.com/office/drawing/2014/main" id="{F5F60F02-C948-1B8C-06E4-2D8D8DF339FE}"/>
             </a:ext>
           </a:extLst>
         </p:cNvPr>
@@ -14328,10 +13469,10 @@
           <p:cNvPr id="64" name="Rectangle 63">
             <a:extLst>
               <a:ext uri="{FF2B5EF4-FFF2-40B4-BE49-F238E27FC236}">
-                <a16:creationId xmlns:a16="http://schemas.microsoft.com/office/drawing/2014/main" id="{FBB53F82-F191-4EEB-AB7B-F69E634FA3E8}"/>
+                <a16:creationId xmlns="" xmlns:a16="http://schemas.microsoft.com/office/drawing/2014/main" id="{FBB53F82-F191-4EEB-AB7B-F69E634FA3E8}"/>
               </a:ext>
               <a:ext uri="{C183D7F6-B498-43B3-948B-1728B52AA6E4}">
-                <adec:decorative xmlns:adec="http://schemas.microsoft.com/office/drawing/2017/decorative" val="1"/>
+                <adec:decorative xmlns="" xmlns:adec="http://schemas.microsoft.com/office/drawing/2017/decorative" val="1"/>
               </a:ext>
             </a:extLst>
           </p:cNvPr>
@@ -14341,7 +13482,7 @@
           <p:nvPr>
             <p:extLst>
               <p:ext uri="{386F3935-93C4-4BCD-93E2-E3B085C9AB24}">
-                <p16:designElem xmlns:p16="http://schemas.microsoft.com/office/powerpoint/2015/main" val="1"/>
+                <p16:designElem xmlns="" xmlns:p16="http://schemas.microsoft.com/office/powerpoint/2015/main" val="1"/>
               </p:ext>
             </p:extLst>
           </p:nvPr>
@@ -14388,7 +13529,7 @@
           <p:cNvPr id="7" name="Title 3">
             <a:extLst>
               <a:ext uri="{FF2B5EF4-FFF2-40B4-BE49-F238E27FC236}">
-                <a16:creationId xmlns:a16="http://schemas.microsoft.com/office/drawing/2014/main" id="{7D022C33-BFDF-5C4C-E739-05EC47622721}"/>
+                <a16:creationId xmlns="" xmlns:a16="http://schemas.microsoft.com/office/drawing/2014/main" id="{7D022C33-BFDF-5C4C-E739-05EC47622721}"/>
               </a:ext>
             </a:extLst>
           </p:cNvPr>
@@ -14507,10 +13648,10 @@
           <p:cNvPr id="66" name="Rectangle 65">
             <a:extLst>
               <a:ext uri="{FF2B5EF4-FFF2-40B4-BE49-F238E27FC236}">
-                <a16:creationId xmlns:a16="http://schemas.microsoft.com/office/drawing/2014/main" id="{8616AA08-3831-473D-B61B-89484A33CF65}"/>
+                <a16:creationId xmlns="" xmlns:a16="http://schemas.microsoft.com/office/drawing/2014/main" id="{8616AA08-3831-473D-B61B-89484A33CF65}"/>
               </a:ext>
               <a:ext uri="{C183D7F6-B498-43B3-948B-1728B52AA6E4}">
-                <adec:decorative xmlns:adec="http://schemas.microsoft.com/office/drawing/2017/decorative" val="1"/>
+                <adec:decorative xmlns="" xmlns:adec="http://schemas.microsoft.com/office/drawing/2017/decorative" val="1"/>
               </a:ext>
             </a:extLst>
           </p:cNvPr>
@@ -14520,7 +13661,7 @@
           <p:nvPr>
             <p:extLst>
               <p:ext uri="{386F3935-93C4-4BCD-93E2-E3B085C9AB24}">
-                <p16:designElem xmlns:p16="http://schemas.microsoft.com/office/powerpoint/2015/main" val="1"/>
+                <p16:designElem xmlns="" xmlns:p16="http://schemas.microsoft.com/office/powerpoint/2015/main" val="1"/>
               </p:ext>
             </p:extLst>
           </p:nvPr>
@@ -14568,10 +13709,10 @@
           <p:cNvPr id="68" name="Rectangle 67">
             <a:extLst>
               <a:ext uri="{FF2B5EF4-FFF2-40B4-BE49-F238E27FC236}">
-                <a16:creationId xmlns:a16="http://schemas.microsoft.com/office/drawing/2014/main" id="{8431B918-3A1C-46BA-9430-CAD97D9DA0FC}"/>
+                <a16:creationId xmlns="" xmlns:a16="http://schemas.microsoft.com/office/drawing/2014/main" id="{8431B918-3A1C-46BA-9430-CAD97D9DA0FC}"/>
               </a:ext>
               <a:ext uri="{C183D7F6-B498-43B3-948B-1728B52AA6E4}">
-                <adec:decorative xmlns:adec="http://schemas.microsoft.com/office/drawing/2017/decorative" val="1"/>
+                <adec:decorative xmlns="" xmlns:adec="http://schemas.microsoft.com/office/drawing/2017/decorative" val="1"/>
               </a:ext>
             </a:extLst>
           </p:cNvPr>
@@ -14581,7 +13722,7 @@
           <p:nvPr>
             <p:extLst>
               <p:ext uri="{386F3935-93C4-4BCD-93E2-E3B085C9AB24}">
-                <p16:designElem xmlns:p16="http://schemas.microsoft.com/office/powerpoint/2015/main" val="1"/>
+                <p16:designElem xmlns="" xmlns:p16="http://schemas.microsoft.com/office/powerpoint/2015/main" val="1"/>
               </p:ext>
             </p:extLst>
           </p:nvPr>
@@ -14629,10 +13770,10 @@
           <p:cNvPr id="70" name="Rectangle 69">
             <a:extLst>
               <a:ext uri="{FF2B5EF4-FFF2-40B4-BE49-F238E27FC236}">
-                <a16:creationId xmlns:a16="http://schemas.microsoft.com/office/drawing/2014/main" id="{8400935A-2F82-4DC4-A4E1-E12EFB8C2738}"/>
+                <a16:creationId xmlns="" xmlns:a16="http://schemas.microsoft.com/office/drawing/2014/main" id="{8400935A-2F82-4DC4-A4E1-E12EFB8C2738}"/>
               </a:ext>
               <a:ext uri="{C183D7F6-B498-43B3-948B-1728B52AA6E4}">
-                <adec:decorative xmlns:adec="http://schemas.microsoft.com/office/drawing/2017/decorative" val="1"/>
+                <adec:decorative xmlns="" xmlns:adec="http://schemas.microsoft.com/office/drawing/2017/decorative" val="1"/>
               </a:ext>
             </a:extLst>
           </p:cNvPr>
@@ -14642,7 +13783,7 @@
           <p:nvPr>
             <p:extLst>
               <p:ext uri="{386F3935-93C4-4BCD-93E2-E3B085C9AB24}">
-                <p16:designElem xmlns:p16="http://schemas.microsoft.com/office/powerpoint/2015/main" val="1"/>
+                <p16:designElem xmlns="" xmlns:p16="http://schemas.microsoft.com/office/powerpoint/2015/main" val="1"/>
               </p:ext>
             </p:extLst>
           </p:nvPr>
@@ -14690,10 +13831,10 @@
           <p:cNvPr id="72" name="Rectangle 71">
             <a:extLst>
               <a:ext uri="{FF2B5EF4-FFF2-40B4-BE49-F238E27FC236}">
-                <a16:creationId xmlns:a16="http://schemas.microsoft.com/office/drawing/2014/main" id="{A3D5D599-1CAE-4C92-B5AE-8E51AF6D47C9}"/>
+                <a16:creationId xmlns="" xmlns:a16="http://schemas.microsoft.com/office/drawing/2014/main" id="{A3D5D599-1CAE-4C92-B5AE-8E51AF6D47C9}"/>
               </a:ext>
               <a:ext uri="{C183D7F6-B498-43B3-948B-1728B52AA6E4}">
-                <adec:decorative xmlns:adec="http://schemas.microsoft.com/office/drawing/2017/decorative" val="1"/>
+                <adec:decorative xmlns="" xmlns:adec="http://schemas.microsoft.com/office/drawing/2017/decorative" val="1"/>
               </a:ext>
             </a:extLst>
           </p:cNvPr>
@@ -14703,7 +13844,7 @@
           <p:nvPr>
             <p:extLst>
               <p:ext uri="{386F3935-93C4-4BCD-93E2-E3B085C9AB24}">
-                <p16:designElem xmlns:p16="http://schemas.microsoft.com/office/powerpoint/2015/main" val="1"/>
+                <p16:designElem xmlns="" xmlns:p16="http://schemas.microsoft.com/office/powerpoint/2015/main" val="1"/>
               </p:ext>
             </p:extLst>
           </p:nvPr>
@@ -14755,7 +13896,7 @@
           <p:cNvPr id="8" name="Picture 7">
             <a:extLst>
               <a:ext uri="{FF2B5EF4-FFF2-40B4-BE49-F238E27FC236}">
-                <a16:creationId xmlns:a16="http://schemas.microsoft.com/office/drawing/2014/main" id="{A7AE0E48-D460-75ED-0888-B51E3F55EAC1}"/>
+                <a16:creationId xmlns="" xmlns:a16="http://schemas.microsoft.com/office/drawing/2014/main" id="{A7AE0E48-D460-75ED-0888-B51E3F55EAC1}"/>
               </a:ext>
             </a:extLst>
           </p:cNvPr>
@@ -14785,7 +13926,7 @@
           <p:cNvPr id="3" name="TextBox 2">
             <a:extLst>
               <a:ext uri="{FF2B5EF4-FFF2-40B4-BE49-F238E27FC236}">
-                <a16:creationId xmlns:a16="http://schemas.microsoft.com/office/drawing/2014/main" id="{2D41728C-7F72-BFB0-C419-B517A7AE7B78}"/>
+                <a16:creationId xmlns="" xmlns:a16="http://schemas.microsoft.com/office/drawing/2014/main" id="{2D41728C-7F72-BFB0-C419-B517A7AE7B78}"/>
               </a:ext>
             </a:extLst>
           </p:cNvPr>
@@ -15004,7 +14145,7 @@
           <p:cNvPr id="5" name="Slide Number Placeholder 4">
             <a:extLst>
               <a:ext uri="{FF2B5EF4-FFF2-40B4-BE49-F238E27FC236}">
-                <a16:creationId xmlns:a16="http://schemas.microsoft.com/office/drawing/2014/main" id="{A33647A0-44F1-9D46-DEDA-7D57BDE584AE}"/>
+                <a16:creationId xmlns="" xmlns:a16="http://schemas.microsoft.com/office/drawing/2014/main" id="{A33647A0-44F1-9D46-DEDA-7D57BDE584AE}"/>
               </a:ext>
             </a:extLst>
           </p:cNvPr>
@@ -15096,7 +14237,7 @@
           <p:cNvPr id="7" name="Title 3">
             <a:extLst>
               <a:ext uri="{FF2B5EF4-FFF2-40B4-BE49-F238E27FC236}">
-                <a16:creationId xmlns:a16="http://schemas.microsoft.com/office/drawing/2014/main" id="{AA9E537E-8F1D-CE1E-C433-D916E2A818CB}"/>
+                <a16:creationId xmlns="" xmlns:a16="http://schemas.microsoft.com/office/drawing/2014/main" id="{AA9E537E-8F1D-CE1E-C433-D916E2A818CB}"/>
               </a:ext>
             </a:extLst>
           </p:cNvPr>
@@ -15224,7 +14365,7 @@
           <p:cNvPr id="5" name="Slide Number Placeholder 4">
             <a:extLst>
               <a:ext uri="{FF2B5EF4-FFF2-40B4-BE49-F238E27FC236}">
-                <a16:creationId xmlns:a16="http://schemas.microsoft.com/office/drawing/2014/main" id="{2687D6E6-D5FA-4C9E-C76D-CC433D92DBC4}"/>
+                <a16:creationId xmlns="" xmlns:a16="http://schemas.microsoft.com/office/drawing/2014/main" id="{2687D6E6-D5FA-4C9E-C76D-CC433D92DBC4}"/>
               </a:ext>
             </a:extLst>
           </p:cNvPr>
@@ -15270,7 +14411,7 @@
           <p:cNvPr id="6" name="TextBox 12">
             <a:extLst>
               <a:ext uri="{FF2B5EF4-FFF2-40B4-BE49-F238E27FC236}">
-                <a16:creationId xmlns:a16="http://schemas.microsoft.com/office/drawing/2014/main" id="{20A849DE-F2B6-76CA-3767-636DCC681E3F}"/>
+                <a16:creationId xmlns="" xmlns:a16="http://schemas.microsoft.com/office/drawing/2014/main" id="{20A849DE-F2B6-76CA-3767-636DCC681E3F}"/>
               </a:ext>
             </a:extLst>
           </p:cNvPr>
@@ -15328,7 +14469,7 @@
           <p:cNvPr id="2" name="Title 1">
             <a:extLst>
               <a:ext uri="{FF2B5EF4-FFF2-40B4-BE49-F238E27FC236}">
-                <a16:creationId xmlns:a16="http://schemas.microsoft.com/office/drawing/2014/main" id="{A3552AA8-AD52-0CD3-A2E5-1B7B13E2F1C5}"/>
+                <a16:creationId xmlns="" xmlns:a16="http://schemas.microsoft.com/office/drawing/2014/main" id="{A3552AA8-AD52-0CD3-A2E5-1B7B13E2F1C5}"/>
               </a:ext>
             </a:extLst>
           </p:cNvPr>
@@ -15356,7 +14497,7 @@
           <p:cNvPr id="3" name="Content Placeholder 2">
             <a:extLst>
               <a:ext uri="{FF2B5EF4-FFF2-40B4-BE49-F238E27FC236}">
-                <a16:creationId xmlns:a16="http://schemas.microsoft.com/office/drawing/2014/main" id="{78AE73C6-18B9-246F-2A94-5ACD74994257}"/>
+                <a16:creationId xmlns="" xmlns:a16="http://schemas.microsoft.com/office/drawing/2014/main" id="{78AE73C6-18B9-246F-2A94-5ACD74994257}"/>
               </a:ext>
             </a:extLst>
           </p:cNvPr>
@@ -15413,10 +14554,39 @@
       </p:sp>
       <p:sp>
         <p:nvSpPr>
+          <p:cNvPr id="4" name="Footer Placeholder 3">
+            <a:extLst>
+              <a:ext uri="{FF2B5EF4-FFF2-40B4-BE49-F238E27FC236}">
+                <a16:creationId xmlns="" xmlns:a16="http://schemas.microsoft.com/office/drawing/2014/main" id="{6CB1DE9F-DCBB-F331-79BA-42FDD9517845}"/>
+              </a:ext>
+            </a:extLst>
+          </p:cNvPr>
+          <p:cNvSpPr>
+            <a:spLocks noGrp="1"/>
+          </p:cNvSpPr>
+          <p:nvPr>
+            <p:ph type="ftr" sz="quarter" idx="11"/>
+          </p:nvPr>
+        </p:nvSpPr>
+        <p:spPr/>
+        <p:txBody>
+          <a:bodyPr/>
+          <a:lstStyle/>
+          <a:p>
+            <a:r>
+              <a:rPr lang="en-US"/>
+              <a:t>Unit Test Code Coverage</a:t>
+            </a:r>
+            <a:endParaRPr lang="en-US" dirty="0"/>
+          </a:p>
+        </p:txBody>
+      </p:sp>
+      <p:sp>
+        <p:nvSpPr>
           <p:cNvPr id="5" name="Slide Number Placeholder 4">
             <a:extLst>
               <a:ext uri="{FF2B5EF4-FFF2-40B4-BE49-F238E27FC236}">
-                <a16:creationId xmlns:a16="http://schemas.microsoft.com/office/drawing/2014/main" id="{F1570762-D396-C690-DC0E-F16905A88CB4}"/>
+                <a16:creationId xmlns="" xmlns:a16="http://schemas.microsoft.com/office/drawing/2014/main" id="{F1570762-D396-C690-DC0E-F16905A88CB4}"/>
               </a:ext>
             </a:extLst>
           </p:cNvPr>
@@ -15483,10 +14653,10 @@
           <p:cNvPr id="13" name="Rectangle 12">
             <a:extLst>
               <a:ext uri="{FF2B5EF4-FFF2-40B4-BE49-F238E27FC236}">
-                <a16:creationId xmlns:a16="http://schemas.microsoft.com/office/drawing/2014/main" id="{F92989FB-1024-49B7-BDF1-B3CE27D48623}"/>
+                <a16:creationId xmlns="" xmlns:a16="http://schemas.microsoft.com/office/drawing/2014/main" id="{F92989FB-1024-49B7-BDF1-B3CE27D48623}"/>
               </a:ext>
               <a:ext uri="{C183D7F6-B498-43B3-948B-1728B52AA6E4}">
-                <adec:decorative xmlns:adec="http://schemas.microsoft.com/office/drawing/2017/decorative" val="1"/>
+                <adec:decorative xmlns="" xmlns:adec="http://schemas.microsoft.com/office/drawing/2017/decorative" val="1"/>
               </a:ext>
             </a:extLst>
           </p:cNvPr>
@@ -15496,7 +14666,7 @@
           <p:nvPr>
             <p:extLst>
               <p:ext uri="{386F3935-93C4-4BCD-93E2-E3B085C9AB24}">
-                <p16:designElem xmlns:p16="http://schemas.microsoft.com/office/powerpoint/2015/main" val="1"/>
+                <p16:designElem xmlns="" xmlns:p16="http://schemas.microsoft.com/office/powerpoint/2015/main" val="1"/>
               </p:ext>
             </p:extLst>
           </p:nvPr>
@@ -15543,7 +14713,7 @@
           <p:cNvPr id="7" name="Title 3">
             <a:extLst>
               <a:ext uri="{FF2B5EF4-FFF2-40B4-BE49-F238E27FC236}">
-                <a16:creationId xmlns:a16="http://schemas.microsoft.com/office/drawing/2014/main" id="{AA9E537E-8F1D-CE1E-C433-D916E2A818CB}"/>
+                <a16:creationId xmlns="" xmlns:a16="http://schemas.microsoft.com/office/drawing/2014/main" id="{AA9E537E-8F1D-CE1E-C433-D916E2A818CB}"/>
               </a:ext>
             </a:extLst>
           </p:cNvPr>
@@ -15671,10 +14841,10 @@
           <p:cNvPr id="15" name="Rectangle 14">
             <a:extLst>
               <a:ext uri="{FF2B5EF4-FFF2-40B4-BE49-F238E27FC236}">
-                <a16:creationId xmlns:a16="http://schemas.microsoft.com/office/drawing/2014/main" id="{2987D6F4-EC95-4EF1-A8AD-4B70386CEEC7}"/>
+                <a16:creationId xmlns="" xmlns:a16="http://schemas.microsoft.com/office/drawing/2014/main" id="{2987D6F4-EC95-4EF1-A8AD-4B70386CEEC7}"/>
               </a:ext>
               <a:ext uri="{C183D7F6-B498-43B3-948B-1728B52AA6E4}">
-                <adec:decorative xmlns:adec="http://schemas.microsoft.com/office/drawing/2017/decorative" val="1"/>
+                <adec:decorative xmlns="" xmlns:adec="http://schemas.microsoft.com/office/drawing/2017/decorative" val="1"/>
               </a:ext>
             </a:extLst>
           </p:cNvPr>
@@ -15684,7 +14854,7 @@
           <p:nvPr>
             <p:extLst>
               <p:ext uri="{386F3935-93C4-4BCD-93E2-E3B085C9AB24}">
-                <p16:designElem xmlns:p16="http://schemas.microsoft.com/office/powerpoint/2015/main" val="1"/>
+                <p16:designElem xmlns="" xmlns:p16="http://schemas.microsoft.com/office/powerpoint/2015/main" val="1"/>
               </p:ext>
             </p:extLst>
           </p:nvPr>
@@ -15732,10 +14902,10 @@
           <p:cNvPr id="17" name="Rectangle 16">
             <a:extLst>
               <a:ext uri="{FF2B5EF4-FFF2-40B4-BE49-F238E27FC236}">
-                <a16:creationId xmlns:a16="http://schemas.microsoft.com/office/drawing/2014/main" id="{F5F792DF-9D0A-4DB6-9A9E-7312F5A7E87D}"/>
+                <a16:creationId xmlns="" xmlns:a16="http://schemas.microsoft.com/office/drawing/2014/main" id="{F5F792DF-9D0A-4DB6-9A9E-7312F5A7E87D}"/>
               </a:ext>
               <a:ext uri="{C183D7F6-B498-43B3-948B-1728B52AA6E4}">
-                <adec:decorative xmlns:adec="http://schemas.microsoft.com/office/drawing/2017/decorative" val="1"/>
+                <adec:decorative xmlns="" xmlns:adec="http://schemas.microsoft.com/office/drawing/2017/decorative" val="1"/>
               </a:ext>
             </a:extLst>
           </p:cNvPr>
@@ -15745,7 +14915,7 @@
           <p:nvPr>
             <p:extLst>
               <p:ext uri="{386F3935-93C4-4BCD-93E2-E3B085C9AB24}">
-                <p16:designElem xmlns:p16="http://schemas.microsoft.com/office/powerpoint/2015/main" val="1"/>
+                <p16:designElem xmlns="" xmlns:p16="http://schemas.microsoft.com/office/powerpoint/2015/main" val="1"/>
               </p:ext>
             </p:extLst>
           </p:nvPr>
@@ -15793,7 +14963,7 @@
           <p:cNvPr id="5" name="Slide Number Placeholder 4">
             <a:extLst>
               <a:ext uri="{FF2B5EF4-FFF2-40B4-BE49-F238E27FC236}">
-                <a16:creationId xmlns:a16="http://schemas.microsoft.com/office/drawing/2014/main" id="{2687D6E6-D5FA-4C9E-C76D-CC433D92DBC4}"/>
+                <a16:creationId xmlns="" xmlns:a16="http://schemas.microsoft.com/office/drawing/2014/main" id="{2687D6E6-D5FA-4C9E-C76D-CC433D92DBC4}"/>
               </a:ext>
             </a:extLst>
           </p:cNvPr>
@@ -15839,7 +15009,7 @@
           <p:cNvPr id="9" name="TextBox 5">
             <a:extLst>
               <a:ext uri="{FF2B5EF4-FFF2-40B4-BE49-F238E27FC236}">
-                <a16:creationId xmlns:a16="http://schemas.microsoft.com/office/drawing/2014/main" id="{709B36D5-304B-E3C2-32E9-CB75C78D55FA}"/>
+                <a16:creationId xmlns="" xmlns:a16="http://schemas.microsoft.com/office/drawing/2014/main" id="{709B36D5-304B-E3C2-32E9-CB75C78D55FA}"/>
               </a:ext>
             </a:extLst>
           </p:cNvPr>
@@ -15905,10 +15075,10 @@
           <p:cNvPr id="42" name="Rectangle 41">
             <a:extLst>
               <a:ext uri="{FF2B5EF4-FFF2-40B4-BE49-F238E27FC236}">
-                <a16:creationId xmlns:a16="http://schemas.microsoft.com/office/drawing/2014/main" id="{7B055CAA-2668-4929-8202-DBD35A78E8EB}"/>
+                <a16:creationId xmlns="" xmlns:a16="http://schemas.microsoft.com/office/drawing/2014/main" id="{7B055CAA-2668-4929-8202-DBD35A78E8EB}"/>
               </a:ext>
               <a:ext uri="{C183D7F6-B498-43B3-948B-1728B52AA6E4}">
-                <adec:decorative xmlns:adec="http://schemas.microsoft.com/office/drawing/2017/decorative" val="1"/>
+                <adec:decorative xmlns="" xmlns:adec="http://schemas.microsoft.com/office/drawing/2017/decorative" val="1"/>
               </a:ext>
             </a:extLst>
           </p:cNvPr>
@@ -15918,7 +15088,7 @@
           <p:nvPr>
             <p:extLst>
               <p:ext uri="{386F3935-93C4-4BCD-93E2-E3B085C9AB24}">
-                <p16:designElem xmlns:p16="http://schemas.microsoft.com/office/powerpoint/2015/main" val="1"/>
+                <p16:designElem xmlns="" xmlns:p16="http://schemas.microsoft.com/office/powerpoint/2015/main" val="1"/>
               </p:ext>
             </p:extLst>
           </p:nvPr>
@@ -15965,7 +15135,7 @@
           <p:cNvPr id="7" name="Title 3">
             <a:extLst>
               <a:ext uri="{FF2B5EF4-FFF2-40B4-BE49-F238E27FC236}">
-                <a16:creationId xmlns:a16="http://schemas.microsoft.com/office/drawing/2014/main" id="{AA9E537E-8F1D-CE1E-C433-D916E2A818CB}"/>
+                <a16:creationId xmlns="" xmlns:a16="http://schemas.microsoft.com/office/drawing/2014/main" id="{AA9E537E-8F1D-CE1E-C433-D916E2A818CB}"/>
               </a:ext>
             </a:extLst>
           </p:cNvPr>
@@ -16083,10 +15253,10 @@
           <p:cNvPr id="44" name="Rectangle 43">
             <a:extLst>
               <a:ext uri="{FF2B5EF4-FFF2-40B4-BE49-F238E27FC236}">
-                <a16:creationId xmlns:a16="http://schemas.microsoft.com/office/drawing/2014/main" id="{38F88ED4-721F-4A25-9A68-66C57B1F8D03}"/>
+                <a16:creationId xmlns="" xmlns:a16="http://schemas.microsoft.com/office/drawing/2014/main" id="{38F88ED4-721F-4A25-9A68-66C57B1F8D03}"/>
               </a:ext>
               <a:ext uri="{C183D7F6-B498-43B3-948B-1728B52AA6E4}">
-                <adec:decorative xmlns:adec="http://schemas.microsoft.com/office/drawing/2017/decorative" val="1"/>
+                <adec:decorative xmlns="" xmlns:adec="http://schemas.microsoft.com/office/drawing/2017/decorative" val="1"/>
               </a:ext>
             </a:extLst>
           </p:cNvPr>
@@ -16096,7 +15266,7 @@
           <p:nvPr>
             <p:extLst>
               <p:ext uri="{386F3935-93C4-4BCD-93E2-E3B085C9AB24}">
-                <p16:designElem xmlns:p16="http://schemas.microsoft.com/office/powerpoint/2015/main" val="1"/>
+                <p16:designElem xmlns="" xmlns:p16="http://schemas.microsoft.com/office/powerpoint/2015/main" val="1"/>
               </p:ext>
             </p:extLst>
           </p:nvPr>
@@ -16144,10 +15314,10 @@
           <p:cNvPr id="46" name="Rectangle 45">
             <a:extLst>
               <a:ext uri="{FF2B5EF4-FFF2-40B4-BE49-F238E27FC236}">
-                <a16:creationId xmlns:a16="http://schemas.microsoft.com/office/drawing/2014/main" id="{3A5A85F2-11BA-4322-9355-08C0DEC78035}"/>
+                <a16:creationId xmlns="" xmlns:a16="http://schemas.microsoft.com/office/drawing/2014/main" id="{3A5A85F2-11BA-4322-9355-08C0DEC78035}"/>
               </a:ext>
               <a:ext uri="{C183D7F6-B498-43B3-948B-1728B52AA6E4}">
-                <adec:decorative xmlns:adec="http://schemas.microsoft.com/office/drawing/2017/decorative" val="1"/>
+                <adec:decorative xmlns="" xmlns:adec="http://schemas.microsoft.com/office/drawing/2017/decorative" val="1"/>
               </a:ext>
             </a:extLst>
           </p:cNvPr>
@@ -16157,7 +15327,7 @@
           <p:nvPr>
             <p:extLst>
               <p:ext uri="{386F3935-93C4-4BCD-93E2-E3B085C9AB24}">
-                <p16:designElem xmlns:p16="http://schemas.microsoft.com/office/powerpoint/2015/main" val="1"/>
+                <p16:designElem xmlns="" xmlns:p16="http://schemas.microsoft.com/office/powerpoint/2015/main" val="1"/>
               </p:ext>
             </p:extLst>
           </p:nvPr>
@@ -16205,10 +15375,10 @@
           <p:cNvPr id="48" name="Rectangle 47">
             <a:extLst>
               <a:ext uri="{FF2B5EF4-FFF2-40B4-BE49-F238E27FC236}">
-                <a16:creationId xmlns:a16="http://schemas.microsoft.com/office/drawing/2014/main" id="{1A88A0CA-0BDB-4A19-A648-638BE196B2BC}"/>
+                <a16:creationId xmlns="" xmlns:a16="http://schemas.microsoft.com/office/drawing/2014/main" id="{1A88A0CA-0BDB-4A19-A648-638BE196B2BC}"/>
               </a:ext>
               <a:ext uri="{C183D7F6-B498-43B3-948B-1728B52AA6E4}">
-                <adec:decorative xmlns:adec="http://schemas.microsoft.com/office/drawing/2017/decorative" val="1"/>
+                <adec:decorative xmlns="" xmlns:adec="http://schemas.microsoft.com/office/drawing/2017/decorative" val="1"/>
               </a:ext>
             </a:extLst>
           </p:cNvPr>
@@ -16218,7 +15388,7 @@
           <p:nvPr>
             <p:extLst>
               <p:ext uri="{386F3935-93C4-4BCD-93E2-E3B085C9AB24}">
-                <p16:designElem xmlns:p16="http://schemas.microsoft.com/office/powerpoint/2015/main" val="1"/>
+                <p16:designElem xmlns="" xmlns:p16="http://schemas.microsoft.com/office/powerpoint/2015/main" val="1"/>
               </p:ext>
             </p:extLst>
           </p:nvPr>
@@ -16266,7 +15436,7 @@
           <p:cNvPr id="26" name="Graphic 25" descr="Ruble">
             <a:extLst>
               <a:ext uri="{FF2B5EF4-FFF2-40B4-BE49-F238E27FC236}">
-                <a16:creationId xmlns:a16="http://schemas.microsoft.com/office/drawing/2014/main" id="{E276D4C1-19B1-F641-96D9-81786708F130}"/>
+                <a16:creationId xmlns="" xmlns:a16="http://schemas.microsoft.com/office/drawing/2014/main" id="{E276D4C1-19B1-F641-96D9-81786708F130}"/>
               </a:ext>
             </a:extLst>
           </p:cNvPr>
@@ -16282,7 +15452,7 @@
                 <a14:useLocalDpi xmlns:a14="http://schemas.microsoft.com/office/drawing/2010/main" val="0"/>
               </a:ext>
               <a:ext uri="{96DAC541-7B7A-43D3-8B79-37D633B846F1}">
-                <asvg:svgBlip xmlns:asvg="http://schemas.microsoft.com/office/drawing/2016/SVG/main" r:embed="rId3"/>
+                <asvg:svgBlip xmlns="" xmlns:asvg="http://schemas.microsoft.com/office/drawing/2016/SVG/main" r:embed="rId3"/>
               </a:ext>
             </a:extLst>
           </a:blip>
@@ -16305,7 +15475,7 @@
           <p:cNvPr id="9" name="TextBox 8">
             <a:extLst>
               <a:ext uri="{FF2B5EF4-FFF2-40B4-BE49-F238E27FC236}">
-                <a16:creationId xmlns:a16="http://schemas.microsoft.com/office/drawing/2014/main" id="{3851D869-D97C-35D8-125C-1C682DD5E824}"/>
+                <a16:creationId xmlns="" xmlns:a16="http://schemas.microsoft.com/office/drawing/2014/main" id="{3851D869-D97C-35D8-125C-1C682DD5E824}"/>
               </a:ext>
             </a:extLst>
           </p:cNvPr>
@@ -16341,6 +15511,8 @@
                 <a:schemeClr val="accent1"/>
               </a:buClr>
               <a:buSzPct val="92000"/>
+              <a:buFont typeface="Wingdings 2" panose="05020102010507070707" pitchFamily="18" charset="2"/>
+              <a:buChar char=""/>
             </a:pPr>
             <a:r>
               <a:rPr lang="en-US" sz="1000" dirty="0">
@@ -16435,6 +15607,8 @@
                 <a:schemeClr val="accent1"/>
               </a:buClr>
               <a:buSzPct val="92000"/>
+              <a:buFont typeface="Wingdings 2" panose="05020102010507070707" pitchFamily="18" charset="2"/>
+              <a:buChar char=""/>
             </a:pPr>
             <a:endParaRPr lang="en-US" sz="1000" dirty="0">
               <a:solidFill>
@@ -16460,6 +15634,8 @@
                 <a:schemeClr val="accent1"/>
               </a:buClr>
               <a:buSzPct val="92000"/>
+              <a:buFont typeface="Wingdings 2" panose="05020102010507070707" pitchFamily="18" charset="2"/>
+              <a:buChar char=""/>
             </a:pPr>
             <a:r>
               <a:rPr lang="en-US" sz="1000" dirty="0">
@@ -16510,6 +15686,8 @@
                 <a:schemeClr val="accent1"/>
               </a:buClr>
               <a:buSzPct val="92000"/>
+              <a:buFont typeface="Wingdings 2" panose="05020102010507070707" pitchFamily="18" charset="2"/>
+              <a:buChar char=""/>
             </a:pPr>
             <a:endParaRPr lang="en-US" sz="1000" dirty="0">
               <a:solidFill>
@@ -16535,6 +15713,8 @@
                 <a:schemeClr val="accent1"/>
               </a:buClr>
               <a:buSzPct val="92000"/>
+              <a:buFont typeface="Wingdings 2" panose="05020102010507070707" pitchFamily="18" charset="2"/>
+              <a:buChar char=""/>
             </a:pPr>
             <a:r>
               <a:rPr lang="en-US" sz="1000" dirty="0">
@@ -16651,6 +15831,8 @@
                 <a:schemeClr val="accent1"/>
               </a:buClr>
               <a:buSzPct val="92000"/>
+              <a:buFont typeface="Wingdings 2" panose="05020102010507070707" pitchFamily="18" charset="2"/>
+              <a:buChar char=""/>
             </a:pPr>
             <a:endParaRPr lang="en-US" sz="1000" dirty="0">
               <a:solidFill>
@@ -16676,6 +15858,8 @@
                 <a:schemeClr val="accent1"/>
               </a:buClr>
               <a:buSzPct val="92000"/>
+              <a:buFont typeface="Wingdings 2" panose="05020102010507070707" pitchFamily="18" charset="2"/>
+              <a:buChar char=""/>
             </a:pPr>
             <a:r>
               <a:rPr lang="en-US" sz="1000" dirty="0">
@@ -16726,6 +15910,8 @@
                 <a:schemeClr val="accent1"/>
               </a:buClr>
               <a:buSzPct val="92000"/>
+              <a:buFont typeface="Wingdings 2" panose="05020102010507070707" pitchFamily="18" charset="2"/>
+              <a:buChar char=""/>
             </a:pPr>
             <a:endParaRPr lang="en-US" sz="1000" dirty="0">
               <a:solidFill>
@@ -16751,6 +15937,8 @@
                 <a:schemeClr val="accent1"/>
               </a:buClr>
               <a:buSzPct val="92000"/>
+              <a:buFont typeface="Wingdings 2" panose="05020102010507070707" pitchFamily="18" charset="2"/>
+              <a:buChar char=""/>
             </a:pPr>
             <a:r>
               <a:rPr lang="en-US" sz="1000" dirty="0">
@@ -16867,6 +16055,8 @@
                 <a:schemeClr val="accent1"/>
               </a:buClr>
               <a:buSzPct val="92000"/>
+              <a:buFont typeface="Wingdings 2" panose="05020102010507070707" pitchFamily="18" charset="2"/>
+              <a:buChar char=""/>
             </a:pPr>
             <a:endParaRPr lang="en-US" sz="1000" dirty="0">
               <a:solidFill>
@@ -16892,6 +16082,8 @@
                 <a:schemeClr val="accent1"/>
               </a:buClr>
               <a:buSzPct val="92000"/>
+              <a:buFont typeface="Wingdings 2" panose="05020102010507070707" pitchFamily="18" charset="2"/>
+              <a:buChar char=""/>
             </a:pPr>
             <a:r>
               <a:rPr lang="en-US" sz="1000" dirty="0">
@@ -16934,7 +16126,7 @@
           <p:cNvPr id="5" name="Slide Number Placeholder 4">
             <a:extLst>
               <a:ext uri="{FF2B5EF4-FFF2-40B4-BE49-F238E27FC236}">
-                <a16:creationId xmlns:a16="http://schemas.microsoft.com/office/drawing/2014/main" id="{2687D6E6-D5FA-4C9E-C76D-CC433D92DBC4}"/>
+                <a16:creationId xmlns="" xmlns:a16="http://schemas.microsoft.com/office/drawing/2014/main" id="{2687D6E6-D5FA-4C9E-C76D-CC433D92DBC4}"/>
               </a:ext>
             </a:extLst>
           </p:cNvPr>
@@ -17018,10 +16210,10 @@
           <p:cNvPr id="14" name="Rectangle 13">
             <a:extLst>
               <a:ext uri="{FF2B5EF4-FFF2-40B4-BE49-F238E27FC236}">
-                <a16:creationId xmlns:a16="http://schemas.microsoft.com/office/drawing/2014/main" id="{DD651B61-325E-4E73-8445-38B0DE8AAAB6}"/>
+                <a16:creationId xmlns="" xmlns:a16="http://schemas.microsoft.com/office/drawing/2014/main" id="{DD651B61-325E-4E73-8445-38B0DE8AAAB6}"/>
               </a:ext>
               <a:ext uri="{C183D7F6-B498-43B3-948B-1728B52AA6E4}">
-                <adec:decorative xmlns:adec="http://schemas.microsoft.com/office/drawing/2017/decorative" val="1"/>
+                <adec:decorative xmlns="" xmlns:adec="http://schemas.microsoft.com/office/drawing/2017/decorative" val="1"/>
               </a:ext>
             </a:extLst>
           </p:cNvPr>
@@ -17031,7 +16223,7 @@
           <p:nvPr>
             <p:extLst>
               <p:ext uri="{386F3935-93C4-4BCD-93E2-E3B085C9AB24}">
-                <p16:designElem xmlns:p16="http://schemas.microsoft.com/office/powerpoint/2015/main" val="1"/>
+                <p16:designElem xmlns="" xmlns:p16="http://schemas.microsoft.com/office/powerpoint/2015/main" val="1"/>
               </p:ext>
             </p:extLst>
           </p:nvPr>
@@ -17079,10 +16271,10 @@
           <p:cNvPr id="16" name="Rectangle 15">
             <a:extLst>
               <a:ext uri="{FF2B5EF4-FFF2-40B4-BE49-F238E27FC236}">
-                <a16:creationId xmlns:a16="http://schemas.microsoft.com/office/drawing/2014/main" id="{B42E5253-D3AC-4AC2-B766-8B34F13C2F5E}"/>
+                <a16:creationId xmlns="" xmlns:a16="http://schemas.microsoft.com/office/drawing/2014/main" id="{B42E5253-D3AC-4AC2-B766-8B34F13C2F5E}"/>
               </a:ext>
               <a:ext uri="{C183D7F6-B498-43B3-948B-1728B52AA6E4}">
-                <adec:decorative xmlns:adec="http://schemas.microsoft.com/office/drawing/2017/decorative" val="1"/>
+                <adec:decorative xmlns="" xmlns:adec="http://schemas.microsoft.com/office/drawing/2017/decorative" val="1"/>
               </a:ext>
             </a:extLst>
           </p:cNvPr>
@@ -17092,7 +16284,7 @@
           <p:nvPr>
             <p:extLst>
               <p:ext uri="{386F3935-93C4-4BCD-93E2-E3B085C9AB24}">
-                <p16:designElem xmlns:p16="http://schemas.microsoft.com/office/powerpoint/2015/main" val="1"/>
+                <p16:designElem xmlns="" xmlns:p16="http://schemas.microsoft.com/office/powerpoint/2015/main" val="1"/>
               </p:ext>
             </p:extLst>
           </p:nvPr>
@@ -17140,10 +16332,10 @@
           <p:cNvPr id="18" name="Rectangle 17">
             <a:extLst>
               <a:ext uri="{FF2B5EF4-FFF2-40B4-BE49-F238E27FC236}">
-                <a16:creationId xmlns:a16="http://schemas.microsoft.com/office/drawing/2014/main" id="{10AE8D57-436A-4073-9A75-15BB5949F8B4}"/>
+                <a16:creationId xmlns="" xmlns:a16="http://schemas.microsoft.com/office/drawing/2014/main" id="{10AE8D57-436A-4073-9A75-15BB5949F8B4}"/>
               </a:ext>
               <a:ext uri="{C183D7F6-B498-43B3-948B-1728B52AA6E4}">
-                <adec:decorative xmlns:adec="http://schemas.microsoft.com/office/drawing/2017/decorative" val="1"/>
+                <adec:decorative xmlns="" xmlns:adec="http://schemas.microsoft.com/office/drawing/2017/decorative" val="1"/>
               </a:ext>
             </a:extLst>
           </p:cNvPr>
@@ -17153,7 +16345,7 @@
           <p:nvPr>
             <p:extLst>
               <p:ext uri="{386F3935-93C4-4BCD-93E2-E3B085C9AB24}">
-                <p16:designElem xmlns:p16="http://schemas.microsoft.com/office/powerpoint/2015/main" val="1"/>
+                <p16:designElem xmlns="" xmlns:p16="http://schemas.microsoft.com/office/powerpoint/2015/main" val="1"/>
               </p:ext>
             </p:extLst>
           </p:nvPr>
@@ -17201,10 +16393,10 @@
           <p:cNvPr id="20" name="Rectangle 19">
             <a:extLst>
               <a:ext uri="{FF2B5EF4-FFF2-40B4-BE49-F238E27FC236}">
-                <a16:creationId xmlns:a16="http://schemas.microsoft.com/office/drawing/2014/main" id="{E2852671-8EB6-4EAF-8AF8-65CF3FD66456}"/>
+                <a16:creationId xmlns="" xmlns:a16="http://schemas.microsoft.com/office/drawing/2014/main" id="{E2852671-8EB6-4EAF-8AF8-65CF3FD66456}"/>
               </a:ext>
               <a:ext uri="{C183D7F6-B498-43B3-948B-1728B52AA6E4}">
-                <adec:decorative xmlns:adec="http://schemas.microsoft.com/office/drawing/2017/decorative" val="1"/>
+                <adec:decorative xmlns="" xmlns:adec="http://schemas.microsoft.com/office/drawing/2017/decorative" val="1"/>
               </a:ext>
             </a:extLst>
           </p:cNvPr>
@@ -17214,7 +16406,7 @@
           <p:nvPr>
             <p:extLst>
               <p:ext uri="{386F3935-93C4-4BCD-93E2-E3B085C9AB24}">
-                <p16:designElem xmlns:p16="http://schemas.microsoft.com/office/powerpoint/2015/main" val="1"/>
+                <p16:designElem xmlns="" xmlns:p16="http://schemas.microsoft.com/office/powerpoint/2015/main" val="1"/>
               </p:ext>
             </p:extLst>
           </p:nvPr>
@@ -17262,10 +16454,10 @@
           <p:cNvPr id="22" name="Rectangle 21">
             <a:extLst>
               <a:ext uri="{FF2B5EF4-FFF2-40B4-BE49-F238E27FC236}">
-                <a16:creationId xmlns:a16="http://schemas.microsoft.com/office/drawing/2014/main" id="{A52FF1B8-145F-47AA-9F6F-7DA3201AA6CB}"/>
+                <a16:creationId xmlns="" xmlns:a16="http://schemas.microsoft.com/office/drawing/2014/main" id="{A52FF1B8-145F-47AA-9F6F-7DA3201AA6CB}"/>
               </a:ext>
               <a:ext uri="{C183D7F6-B498-43B3-948B-1728B52AA6E4}">
-                <adec:decorative xmlns:adec="http://schemas.microsoft.com/office/drawing/2017/decorative" val="1"/>
+                <adec:decorative xmlns="" xmlns:adec="http://schemas.microsoft.com/office/drawing/2017/decorative" val="1"/>
               </a:ext>
             </a:extLst>
           </p:cNvPr>
@@ -17275,7 +16467,7 @@
           <p:nvPr>
             <p:extLst>
               <p:ext uri="{386F3935-93C4-4BCD-93E2-E3B085C9AB24}">
-                <p16:designElem xmlns:p16="http://schemas.microsoft.com/office/powerpoint/2015/main" val="1"/>
+                <p16:designElem xmlns="" xmlns:p16="http://schemas.microsoft.com/office/powerpoint/2015/main" val="1"/>
               </p:ext>
             </p:extLst>
           </p:nvPr>
@@ -17322,7 +16514,7 @@
           <p:cNvPr id="7" name="Title 3">
             <a:extLst>
               <a:ext uri="{FF2B5EF4-FFF2-40B4-BE49-F238E27FC236}">
-                <a16:creationId xmlns:a16="http://schemas.microsoft.com/office/drawing/2014/main" id="{AA9E537E-8F1D-CE1E-C433-D916E2A818CB}"/>
+                <a16:creationId xmlns="" xmlns:a16="http://schemas.microsoft.com/office/drawing/2014/main" id="{AA9E537E-8F1D-CE1E-C433-D916E2A818CB}"/>
               </a:ext>
             </a:extLst>
           </p:cNvPr>
@@ -17440,10 +16632,10 @@
           <p:cNvPr id="24" name="Rectangle 23">
             <a:extLst>
               <a:ext uri="{FF2B5EF4-FFF2-40B4-BE49-F238E27FC236}">
-                <a16:creationId xmlns:a16="http://schemas.microsoft.com/office/drawing/2014/main" id="{6DFE8A8C-8C1F-40A1-8A45-9D05B0DD8EF8}"/>
+                <a16:creationId xmlns="" xmlns:a16="http://schemas.microsoft.com/office/drawing/2014/main" id="{6DFE8A8C-8C1F-40A1-8A45-9D05B0DD8EF8}"/>
               </a:ext>
               <a:ext uri="{C183D7F6-B498-43B3-948B-1728B52AA6E4}">
-                <adec:decorative xmlns:adec="http://schemas.microsoft.com/office/drawing/2017/decorative" val="1"/>
+                <adec:decorative xmlns="" xmlns:adec="http://schemas.microsoft.com/office/drawing/2017/decorative" val="1"/>
               </a:ext>
             </a:extLst>
           </p:cNvPr>
@@ -17453,7 +16645,7 @@
           <p:nvPr>
             <p:extLst>
               <p:ext uri="{386F3935-93C4-4BCD-93E2-E3B085C9AB24}">
-                <p16:designElem xmlns:p16="http://schemas.microsoft.com/office/powerpoint/2015/main" val="1"/>
+                <p16:designElem xmlns="" xmlns:p16="http://schemas.microsoft.com/office/powerpoint/2015/main" val="1"/>
               </p:ext>
             </p:extLst>
           </p:nvPr>
@@ -17501,10 +16693,10 @@
           <p:cNvPr id="26" name="Rectangle 25">
             <a:extLst>
               <a:ext uri="{FF2B5EF4-FFF2-40B4-BE49-F238E27FC236}">
-                <a16:creationId xmlns:a16="http://schemas.microsoft.com/office/drawing/2014/main" id="{EE1EF8C3-8F8A-447D-A5FF-C12426825418}"/>
+                <a16:creationId xmlns="" xmlns:a16="http://schemas.microsoft.com/office/drawing/2014/main" id="{EE1EF8C3-8F8A-447D-A5FF-C12426825418}"/>
               </a:ext>
               <a:ext uri="{C183D7F6-B498-43B3-948B-1728B52AA6E4}">
-                <adec:decorative xmlns:adec="http://schemas.microsoft.com/office/drawing/2017/decorative" val="1"/>
+                <adec:decorative xmlns="" xmlns:adec="http://schemas.microsoft.com/office/drawing/2017/decorative" val="1"/>
               </a:ext>
             </a:extLst>
           </p:cNvPr>
@@ -17514,7 +16706,7 @@
           <p:nvPr>
             <p:extLst>
               <p:ext uri="{386F3935-93C4-4BCD-93E2-E3B085C9AB24}">
-                <p16:designElem xmlns:p16="http://schemas.microsoft.com/office/powerpoint/2015/main" val="1"/>
+                <p16:designElem xmlns="" xmlns:p16="http://schemas.microsoft.com/office/powerpoint/2015/main" val="1"/>
               </p:ext>
             </p:extLst>
           </p:nvPr>
@@ -17562,10 +16754,10 @@
           <p:cNvPr id="28" name="Rectangle 27">
             <a:extLst>
               <a:ext uri="{FF2B5EF4-FFF2-40B4-BE49-F238E27FC236}">
-                <a16:creationId xmlns:a16="http://schemas.microsoft.com/office/drawing/2014/main" id="{1B511BAF-6DC3-420A-8603-96945C66ADB3}"/>
+                <a16:creationId xmlns="" xmlns:a16="http://schemas.microsoft.com/office/drawing/2014/main" id="{1B511BAF-6DC3-420A-8603-96945C66ADB3}"/>
               </a:ext>
               <a:ext uri="{C183D7F6-B498-43B3-948B-1728B52AA6E4}">
-                <adec:decorative xmlns:adec="http://schemas.microsoft.com/office/drawing/2017/decorative" val="1"/>
+                <adec:decorative xmlns="" xmlns:adec="http://schemas.microsoft.com/office/drawing/2017/decorative" val="1"/>
               </a:ext>
             </a:extLst>
           </p:cNvPr>
@@ -17575,7 +16767,7 @@
           <p:nvPr>
             <p:extLst>
               <p:ext uri="{386F3935-93C4-4BCD-93E2-E3B085C9AB24}">
-                <p16:designElem xmlns:p16="http://schemas.microsoft.com/office/powerpoint/2015/main" val="1"/>
+                <p16:designElem xmlns="" xmlns:p16="http://schemas.microsoft.com/office/powerpoint/2015/main" val="1"/>
               </p:ext>
             </p:extLst>
           </p:nvPr>
@@ -17623,7 +16815,7 @@
           <p:cNvPr id="11" name="Graphic 10" descr="Smiling Face with No Fill">
             <a:extLst>
               <a:ext uri="{FF2B5EF4-FFF2-40B4-BE49-F238E27FC236}">
-                <a16:creationId xmlns:a16="http://schemas.microsoft.com/office/drawing/2014/main" id="{07680154-48BE-B72D-48D8-41E631E10223}"/>
+                <a16:creationId xmlns="" xmlns:a16="http://schemas.microsoft.com/office/drawing/2014/main" id="{07680154-48BE-B72D-48D8-41E631E10223}"/>
               </a:ext>
             </a:extLst>
           </p:cNvPr>
@@ -17639,7 +16831,7 @@
                 <a14:useLocalDpi xmlns:a14="http://schemas.microsoft.com/office/drawing/2010/main" val="0"/>
               </a:ext>
               <a:ext uri="{96DAC541-7B7A-43D3-8B79-37D633B846F1}">
-                <asvg:svgBlip xmlns:asvg="http://schemas.microsoft.com/office/drawing/2016/SVG/main" r:embed="rId3"/>
+                <asvg:svgBlip xmlns="" xmlns:asvg="http://schemas.microsoft.com/office/drawing/2016/SVG/main" r:embed="rId3"/>
               </a:ext>
             </a:extLst>
           </a:blip>
@@ -17662,7 +16854,7 @@
           <p:cNvPr id="5" name="Slide Number Placeholder 4">
             <a:extLst>
               <a:ext uri="{FF2B5EF4-FFF2-40B4-BE49-F238E27FC236}">
-                <a16:creationId xmlns:a16="http://schemas.microsoft.com/office/drawing/2014/main" id="{2687D6E6-D5FA-4C9E-C76D-CC433D92DBC4}"/>
+                <a16:creationId xmlns="" xmlns:a16="http://schemas.microsoft.com/office/drawing/2014/main" id="{2687D6E6-D5FA-4C9E-C76D-CC433D92DBC4}"/>
               </a:ext>
             </a:extLst>
           </p:cNvPr>
@@ -17760,7 +16952,7 @@
           <p:cNvPr id="7" name="Title 3">
             <a:extLst>
               <a:ext uri="{FF2B5EF4-FFF2-40B4-BE49-F238E27FC236}">
-                <a16:creationId xmlns:a16="http://schemas.microsoft.com/office/drawing/2014/main" id="{AA9E537E-8F1D-CE1E-C433-D916E2A818CB}"/>
+                <a16:creationId xmlns="" xmlns:a16="http://schemas.microsoft.com/office/drawing/2014/main" id="{AA9E537E-8F1D-CE1E-C433-D916E2A818CB}"/>
               </a:ext>
             </a:extLst>
           </p:cNvPr>
@@ -17888,10 +17080,10 @@
           <p:cNvPr id="83" name="Rectangle 82">
             <a:extLst>
               <a:ext uri="{FF2B5EF4-FFF2-40B4-BE49-F238E27FC236}">
-                <a16:creationId xmlns:a16="http://schemas.microsoft.com/office/drawing/2014/main" id="{7A4CA679-3546-4E14-8FB8-F57168C37635}"/>
+                <a16:creationId xmlns="" xmlns:a16="http://schemas.microsoft.com/office/drawing/2014/main" id="{7A4CA679-3546-4E14-8FB8-F57168C37635}"/>
               </a:ext>
               <a:ext uri="{C183D7F6-B498-43B3-948B-1728B52AA6E4}">
-                <adec:decorative xmlns:adec="http://schemas.microsoft.com/office/drawing/2017/decorative" val="1"/>
+                <adec:decorative xmlns="" xmlns:adec="http://schemas.microsoft.com/office/drawing/2017/decorative" val="1"/>
               </a:ext>
             </a:extLst>
           </p:cNvPr>
@@ -17901,7 +17093,7 @@
           <p:nvPr>
             <p:extLst>
               <p:ext uri="{386F3935-93C4-4BCD-93E2-E3B085C9AB24}">
-                <p16:designElem xmlns:p16="http://schemas.microsoft.com/office/powerpoint/2015/main" val="1"/>
+                <p16:designElem xmlns="" xmlns:p16="http://schemas.microsoft.com/office/powerpoint/2015/main" val="1"/>
               </p:ext>
             </p:extLst>
           </p:nvPr>
@@ -17949,10 +17141,10 @@
           <p:cNvPr id="85" name="Rectangle 84">
             <a:extLst>
               <a:ext uri="{FF2B5EF4-FFF2-40B4-BE49-F238E27FC236}">
-                <a16:creationId xmlns:a16="http://schemas.microsoft.com/office/drawing/2014/main" id="{44D16E90-7C64-4C04-A50A-B866A1A92B4E}"/>
+                <a16:creationId xmlns="" xmlns:a16="http://schemas.microsoft.com/office/drawing/2014/main" id="{44D16E90-7C64-4C04-A50A-B866A1A92B4E}"/>
               </a:ext>
               <a:ext uri="{C183D7F6-B498-43B3-948B-1728B52AA6E4}">
-                <adec:decorative xmlns:adec="http://schemas.microsoft.com/office/drawing/2017/decorative" val="1"/>
+                <adec:decorative xmlns="" xmlns:adec="http://schemas.microsoft.com/office/drawing/2017/decorative" val="1"/>
               </a:ext>
             </a:extLst>
           </p:cNvPr>
@@ -17962,7 +17154,7 @@
           <p:nvPr>
             <p:extLst>
               <p:ext uri="{386F3935-93C4-4BCD-93E2-E3B085C9AB24}">
-                <p16:designElem xmlns:p16="http://schemas.microsoft.com/office/powerpoint/2015/main" val="1"/>
+                <p16:designElem xmlns="" xmlns:p16="http://schemas.microsoft.com/office/powerpoint/2015/main" val="1"/>
               </p:ext>
             </p:extLst>
           </p:nvPr>
@@ -18010,10 +17202,10 @@
           <p:cNvPr id="87" name="Rectangle 86">
             <a:extLst>
               <a:ext uri="{FF2B5EF4-FFF2-40B4-BE49-F238E27FC236}">
-                <a16:creationId xmlns:a16="http://schemas.microsoft.com/office/drawing/2014/main" id="{DBE4DD59-5AA2-46C6-B6A8-9B4C62D19877}"/>
+                <a16:creationId xmlns="" xmlns:a16="http://schemas.microsoft.com/office/drawing/2014/main" id="{DBE4DD59-5AA2-46C6-B6A8-9B4C62D19877}"/>
               </a:ext>
               <a:ext uri="{C183D7F6-B498-43B3-948B-1728B52AA6E4}">
-                <adec:decorative xmlns:adec="http://schemas.microsoft.com/office/drawing/2017/decorative" val="1"/>
+                <adec:decorative xmlns="" xmlns:adec="http://schemas.microsoft.com/office/drawing/2017/decorative" val="1"/>
               </a:ext>
             </a:extLst>
           </p:cNvPr>
@@ -18023,7 +17215,7 @@
           <p:nvPr>
             <p:extLst>
               <p:ext uri="{386F3935-93C4-4BCD-93E2-E3B085C9AB24}">
-                <p16:designElem xmlns:p16="http://schemas.microsoft.com/office/powerpoint/2015/main" val="1"/>
+                <p16:designElem xmlns="" xmlns:p16="http://schemas.microsoft.com/office/powerpoint/2015/main" val="1"/>
               </p:ext>
             </p:extLst>
           </p:nvPr>
@@ -18071,10 +17263,10 @@
           <p:cNvPr id="89" name="Rectangle 88">
             <a:extLst>
               <a:ext uri="{FF2B5EF4-FFF2-40B4-BE49-F238E27FC236}">
-                <a16:creationId xmlns:a16="http://schemas.microsoft.com/office/drawing/2014/main" id="{160CE81C-67DC-489E-BFFB-877C80B854DB}"/>
+                <a16:creationId xmlns="" xmlns:a16="http://schemas.microsoft.com/office/drawing/2014/main" id="{160CE81C-67DC-489E-BFFB-877C80B854DB}"/>
               </a:ext>
               <a:ext uri="{C183D7F6-B498-43B3-948B-1728B52AA6E4}">
-                <adec:decorative xmlns:adec="http://schemas.microsoft.com/office/drawing/2017/decorative" val="1"/>
+                <adec:decorative xmlns="" xmlns:adec="http://schemas.microsoft.com/office/drawing/2017/decorative" val="1"/>
               </a:ext>
             </a:extLst>
           </p:cNvPr>
@@ -18084,7 +17276,7 @@
           <p:nvPr>
             <p:extLst>
               <p:ext uri="{386F3935-93C4-4BCD-93E2-E3B085C9AB24}">
-                <p16:designElem xmlns:p16="http://schemas.microsoft.com/office/powerpoint/2015/main" val="1"/>
+                <p16:designElem xmlns="" xmlns:p16="http://schemas.microsoft.com/office/powerpoint/2015/main" val="1"/>
               </p:ext>
             </p:extLst>
           </p:nvPr>
@@ -18138,7 +17330,7 @@
           <p:cNvPr id="3" name="Picture 2">
             <a:extLst>
               <a:ext uri="{FF2B5EF4-FFF2-40B4-BE49-F238E27FC236}">
-                <a16:creationId xmlns:a16="http://schemas.microsoft.com/office/drawing/2014/main" id="{3140FB70-7989-012B-60A8-F4A5E53D89BA}"/>
+                <a16:creationId xmlns="" xmlns:a16="http://schemas.microsoft.com/office/drawing/2014/main" id="{3140FB70-7989-012B-60A8-F4A5E53D89BA}"/>
               </a:ext>
             </a:extLst>
           </p:cNvPr>
@@ -18167,7 +17359,7 @@
           <p:cNvPr id="11" name="TextBox 10">
             <a:extLst>
               <a:ext uri="{FF2B5EF4-FFF2-40B4-BE49-F238E27FC236}">
-                <a16:creationId xmlns:a16="http://schemas.microsoft.com/office/drawing/2014/main" id="{0A256CA7-6A0C-FB27-AC2A-B98A50325886}"/>
+                <a16:creationId xmlns="" xmlns:a16="http://schemas.microsoft.com/office/drawing/2014/main" id="{0A256CA7-6A0C-FB27-AC2A-B98A50325886}"/>
               </a:ext>
             </a:extLst>
           </p:cNvPr>
@@ -18399,7 +17591,7 @@
           <p:cNvPr id="5" name="Slide Number Placeholder 4">
             <a:extLst>
               <a:ext uri="{FF2B5EF4-FFF2-40B4-BE49-F238E27FC236}">
-                <a16:creationId xmlns:a16="http://schemas.microsoft.com/office/drawing/2014/main" id="{2687D6E6-D5FA-4C9E-C76D-CC433D92DBC4}"/>
+                <a16:creationId xmlns="" xmlns:a16="http://schemas.microsoft.com/office/drawing/2014/main" id="{2687D6E6-D5FA-4C9E-C76D-CC433D92DBC4}"/>
               </a:ext>
             </a:extLst>
           </p:cNvPr>
@@ -18483,7 +17675,7 @@
           <p:cNvPr id="2" name="Title 1">
             <a:extLst>
               <a:ext uri="{FF2B5EF4-FFF2-40B4-BE49-F238E27FC236}">
-                <a16:creationId xmlns:a16="http://schemas.microsoft.com/office/drawing/2014/main" id="{1CA272F8-CA81-B559-5E60-42EB491F7B65}"/>
+                <a16:creationId xmlns="" xmlns:a16="http://schemas.microsoft.com/office/drawing/2014/main" id="{1CA272F8-CA81-B559-5E60-42EB491F7B65}"/>
               </a:ext>
             </a:extLst>
           </p:cNvPr>
@@ -18520,7 +17712,7 @@
           <p:cNvPr id="3" name="Content Placeholder 2">
             <a:extLst>
               <a:ext uri="{FF2B5EF4-FFF2-40B4-BE49-F238E27FC236}">
-                <a16:creationId xmlns:a16="http://schemas.microsoft.com/office/drawing/2014/main" id="{6CADD337-55A2-E529-4AF7-BBBDF6B668E4}"/>
+                <a16:creationId xmlns="" xmlns:a16="http://schemas.microsoft.com/office/drawing/2014/main" id="{6CADD337-55A2-E529-4AF7-BBBDF6B668E4}"/>
               </a:ext>
             </a:extLst>
           </p:cNvPr>
@@ -18576,7 +17768,7 @@
           <p:cNvPr id="4" name="Footer Placeholder 3">
             <a:extLst>
               <a:ext uri="{FF2B5EF4-FFF2-40B4-BE49-F238E27FC236}">
-                <a16:creationId xmlns:a16="http://schemas.microsoft.com/office/drawing/2014/main" id="{116E4F7F-E3DB-F544-9470-FB8E947DB73A}"/>
+                <a16:creationId xmlns="" xmlns:a16="http://schemas.microsoft.com/office/drawing/2014/main" id="{116E4F7F-E3DB-F544-9470-FB8E947DB73A}"/>
               </a:ext>
             </a:extLst>
           </p:cNvPr>
@@ -18605,7 +17797,7 @@
           <p:cNvPr id="5" name="Slide Number Placeholder 4">
             <a:extLst>
               <a:ext uri="{FF2B5EF4-FFF2-40B4-BE49-F238E27FC236}">
-                <a16:creationId xmlns:a16="http://schemas.microsoft.com/office/drawing/2014/main" id="{5D515657-A0F0-3C3C-F6FC-747BC499D557}"/>
+                <a16:creationId xmlns="" xmlns:a16="http://schemas.microsoft.com/office/drawing/2014/main" id="{5D515657-A0F0-3C3C-F6FC-747BC499D557}"/>
               </a:ext>
             </a:extLst>
           </p:cNvPr>
@@ -18672,10 +17864,10 @@
           <p:cNvPr id="52" name="Rectangle 51">
             <a:extLst>
               <a:ext uri="{FF2B5EF4-FFF2-40B4-BE49-F238E27FC236}">
-                <a16:creationId xmlns:a16="http://schemas.microsoft.com/office/drawing/2014/main" id="{FBB53F82-F191-4EEB-AB7B-F69E634FA3E8}"/>
+                <a16:creationId xmlns="" xmlns:a16="http://schemas.microsoft.com/office/drawing/2014/main" id="{FBB53F82-F191-4EEB-AB7B-F69E634FA3E8}"/>
               </a:ext>
               <a:ext uri="{C183D7F6-B498-43B3-948B-1728B52AA6E4}">
-                <adec:decorative xmlns:adec="http://schemas.microsoft.com/office/drawing/2017/decorative" val="1"/>
+                <adec:decorative xmlns="" xmlns:adec="http://schemas.microsoft.com/office/drawing/2017/decorative" val="1"/>
               </a:ext>
             </a:extLst>
           </p:cNvPr>
@@ -18685,7 +17877,7 @@
           <p:nvPr>
             <p:extLst>
               <p:ext uri="{386F3935-93C4-4BCD-93E2-E3B085C9AB24}">
-                <p16:designElem xmlns:p16="http://schemas.microsoft.com/office/powerpoint/2015/main" val="1"/>
+                <p16:designElem xmlns="" xmlns:p16="http://schemas.microsoft.com/office/powerpoint/2015/main" val="1"/>
               </p:ext>
             </p:extLst>
           </p:nvPr>
@@ -18732,7 +17924,7 @@
           <p:cNvPr id="7" name="Title 3">
             <a:extLst>
               <a:ext uri="{FF2B5EF4-FFF2-40B4-BE49-F238E27FC236}">
-                <a16:creationId xmlns:a16="http://schemas.microsoft.com/office/drawing/2014/main" id="{AA9E537E-8F1D-CE1E-C433-D916E2A818CB}"/>
+                <a16:creationId xmlns="" xmlns:a16="http://schemas.microsoft.com/office/drawing/2014/main" id="{AA9E537E-8F1D-CE1E-C433-D916E2A818CB}"/>
               </a:ext>
             </a:extLst>
           </p:cNvPr>
@@ -18850,10 +18042,10 @@
           <p:cNvPr id="54" name="Rectangle 53">
             <a:extLst>
               <a:ext uri="{FF2B5EF4-FFF2-40B4-BE49-F238E27FC236}">
-                <a16:creationId xmlns:a16="http://schemas.microsoft.com/office/drawing/2014/main" id="{8616AA08-3831-473D-B61B-89484A33CF65}"/>
+                <a16:creationId xmlns="" xmlns:a16="http://schemas.microsoft.com/office/drawing/2014/main" id="{8616AA08-3831-473D-B61B-89484A33CF65}"/>
               </a:ext>
               <a:ext uri="{C183D7F6-B498-43B3-948B-1728B52AA6E4}">
-                <adec:decorative xmlns:adec="http://schemas.microsoft.com/office/drawing/2017/decorative" val="1"/>
+                <adec:decorative xmlns="" xmlns:adec="http://schemas.microsoft.com/office/drawing/2017/decorative" val="1"/>
               </a:ext>
             </a:extLst>
           </p:cNvPr>
@@ -18863,7 +18055,7 @@
           <p:nvPr>
             <p:extLst>
               <p:ext uri="{386F3935-93C4-4BCD-93E2-E3B085C9AB24}">
-                <p16:designElem xmlns:p16="http://schemas.microsoft.com/office/powerpoint/2015/main" val="1"/>
+                <p16:designElem xmlns="" xmlns:p16="http://schemas.microsoft.com/office/powerpoint/2015/main" val="1"/>
               </p:ext>
             </p:extLst>
           </p:nvPr>
@@ -18911,10 +18103,10 @@
           <p:cNvPr id="56" name="Rectangle 55">
             <a:extLst>
               <a:ext uri="{FF2B5EF4-FFF2-40B4-BE49-F238E27FC236}">
-                <a16:creationId xmlns:a16="http://schemas.microsoft.com/office/drawing/2014/main" id="{8431B918-3A1C-46BA-9430-CAD97D9DA0FC}"/>
+                <a16:creationId xmlns="" xmlns:a16="http://schemas.microsoft.com/office/drawing/2014/main" id="{8431B918-3A1C-46BA-9430-CAD97D9DA0FC}"/>
               </a:ext>
               <a:ext uri="{C183D7F6-B498-43B3-948B-1728B52AA6E4}">
-                <adec:decorative xmlns:adec="http://schemas.microsoft.com/office/drawing/2017/decorative" val="1"/>
+                <adec:decorative xmlns="" xmlns:adec="http://schemas.microsoft.com/office/drawing/2017/decorative" val="1"/>
               </a:ext>
             </a:extLst>
           </p:cNvPr>
@@ -18924,7 +18116,7 @@
           <p:nvPr>
             <p:extLst>
               <p:ext uri="{386F3935-93C4-4BCD-93E2-E3B085C9AB24}">
-                <p16:designElem xmlns:p16="http://schemas.microsoft.com/office/powerpoint/2015/main" val="1"/>
+                <p16:designElem xmlns="" xmlns:p16="http://schemas.microsoft.com/office/powerpoint/2015/main" val="1"/>
               </p:ext>
             </p:extLst>
           </p:nvPr>
@@ -18972,10 +18164,10 @@
           <p:cNvPr id="58" name="Rectangle 57">
             <a:extLst>
               <a:ext uri="{FF2B5EF4-FFF2-40B4-BE49-F238E27FC236}">
-                <a16:creationId xmlns:a16="http://schemas.microsoft.com/office/drawing/2014/main" id="{8400935A-2F82-4DC4-A4E1-E12EFB8C2738}"/>
+                <a16:creationId xmlns="" xmlns:a16="http://schemas.microsoft.com/office/drawing/2014/main" id="{8400935A-2F82-4DC4-A4E1-E12EFB8C2738}"/>
               </a:ext>
               <a:ext uri="{C183D7F6-B498-43B3-948B-1728B52AA6E4}">
-                <adec:decorative xmlns:adec="http://schemas.microsoft.com/office/drawing/2017/decorative" val="1"/>
+                <adec:decorative xmlns="" xmlns:adec="http://schemas.microsoft.com/office/drawing/2017/decorative" val="1"/>
               </a:ext>
             </a:extLst>
           </p:cNvPr>
@@ -18985,7 +18177,7 @@
           <p:nvPr>
             <p:extLst>
               <p:ext uri="{386F3935-93C4-4BCD-93E2-E3B085C9AB24}">
-                <p16:designElem xmlns:p16="http://schemas.microsoft.com/office/powerpoint/2015/main" val="1"/>
+                <p16:designElem xmlns="" xmlns:p16="http://schemas.microsoft.com/office/powerpoint/2015/main" val="1"/>
               </p:ext>
             </p:extLst>
           </p:nvPr>
@@ -19033,7 +18225,7 @@
           <p:cNvPr id="2" name="TextBox 1">
             <a:extLst>
               <a:ext uri="{FF2B5EF4-FFF2-40B4-BE49-F238E27FC236}">
-                <a16:creationId xmlns:a16="http://schemas.microsoft.com/office/drawing/2014/main" id="{4E4FBD38-98FE-708B-176F-660D1AFDE71D}"/>
+                <a16:creationId xmlns="" xmlns:a16="http://schemas.microsoft.com/office/drawing/2014/main" id="{4E4FBD38-98FE-708B-176F-660D1AFDE71D}"/>
               </a:ext>
             </a:extLst>
           </p:cNvPr>
@@ -19121,10 +18313,10 @@
           <p:cNvPr id="60" name="Rectangle 59">
             <a:extLst>
               <a:ext uri="{FF2B5EF4-FFF2-40B4-BE49-F238E27FC236}">
-                <a16:creationId xmlns:a16="http://schemas.microsoft.com/office/drawing/2014/main" id="{A3D5D599-1CAE-4C92-B5AE-8E51AF6D47C9}"/>
+                <a16:creationId xmlns="" xmlns:a16="http://schemas.microsoft.com/office/drawing/2014/main" id="{A3D5D599-1CAE-4C92-B5AE-8E51AF6D47C9}"/>
               </a:ext>
               <a:ext uri="{C183D7F6-B498-43B3-948B-1728B52AA6E4}">
-                <adec:decorative xmlns:adec="http://schemas.microsoft.com/office/drawing/2017/decorative" val="1"/>
+                <adec:decorative xmlns="" xmlns:adec="http://schemas.microsoft.com/office/drawing/2017/decorative" val="1"/>
               </a:ext>
             </a:extLst>
           </p:cNvPr>
@@ -19134,7 +18326,7 @@
           <p:nvPr>
             <p:extLst>
               <p:ext uri="{386F3935-93C4-4BCD-93E2-E3B085C9AB24}">
-                <p16:designElem xmlns:p16="http://schemas.microsoft.com/office/powerpoint/2015/main" val="1"/>
+                <p16:designElem xmlns="" xmlns:p16="http://schemas.microsoft.com/office/powerpoint/2015/main" val="1"/>
               </p:ext>
             </p:extLst>
           </p:nvPr>
@@ -19186,7 +18378,7 @@
           <p:cNvPr id="34" name="Graphic 33" descr="Fingerprint">
             <a:extLst>
               <a:ext uri="{FF2B5EF4-FFF2-40B4-BE49-F238E27FC236}">
-                <a16:creationId xmlns:a16="http://schemas.microsoft.com/office/drawing/2014/main" id="{3D7611D3-C89D-BED0-5F9A-1402C93C3600}"/>
+                <a16:creationId xmlns="" xmlns:a16="http://schemas.microsoft.com/office/drawing/2014/main" id="{3D7611D3-C89D-BED0-5F9A-1402C93C3600}"/>
               </a:ext>
             </a:extLst>
           </p:cNvPr>
@@ -19202,7 +18394,7 @@
                 <a14:useLocalDpi xmlns:a14="http://schemas.microsoft.com/office/drawing/2010/main" val="0"/>
               </a:ext>
               <a:ext uri="{96DAC541-7B7A-43D3-8B79-37D633B846F1}">
-                <asvg:svgBlip xmlns:asvg="http://schemas.microsoft.com/office/drawing/2016/SVG/main" r:embed="rId3"/>
+                <asvg:svgBlip xmlns="" xmlns:asvg="http://schemas.microsoft.com/office/drawing/2016/SVG/main" r:embed="rId3"/>
               </a:ext>
             </a:extLst>
           </a:blip>
@@ -19225,7 +18417,7 @@
           <p:cNvPr id="5" name="Slide Number Placeholder 4">
             <a:extLst>
               <a:ext uri="{FF2B5EF4-FFF2-40B4-BE49-F238E27FC236}">
-                <a16:creationId xmlns:a16="http://schemas.microsoft.com/office/drawing/2014/main" id="{2687D6E6-D5FA-4C9E-C76D-CC433D92DBC4}"/>
+                <a16:creationId xmlns="" xmlns:a16="http://schemas.microsoft.com/office/drawing/2014/main" id="{2687D6E6-D5FA-4C9E-C76D-CC433D92DBC4}"/>
               </a:ext>
             </a:extLst>
           </p:cNvPr>
@@ -19309,10 +18501,10 @@
           <p:cNvPr id="23" name="Rectangle 22">
             <a:extLst>
               <a:ext uri="{FF2B5EF4-FFF2-40B4-BE49-F238E27FC236}">
-                <a16:creationId xmlns:a16="http://schemas.microsoft.com/office/drawing/2014/main" id="{8D2B4922-7602-46A0-9EEB-1F737C65FE3C}"/>
+                <a16:creationId xmlns="" xmlns:a16="http://schemas.microsoft.com/office/drawing/2014/main" id="{8D2B4922-7602-46A0-9EEB-1F737C65FE3C}"/>
               </a:ext>
               <a:ext uri="{C183D7F6-B498-43B3-948B-1728B52AA6E4}">
-                <adec:decorative xmlns:adec="http://schemas.microsoft.com/office/drawing/2017/decorative" val="1"/>
+                <adec:decorative xmlns="" xmlns:adec="http://schemas.microsoft.com/office/drawing/2017/decorative" val="1"/>
               </a:ext>
             </a:extLst>
           </p:cNvPr>
@@ -19322,7 +18514,7 @@
           <p:nvPr>
             <p:extLst>
               <p:ext uri="{386F3935-93C4-4BCD-93E2-E3B085C9AB24}">
-                <p16:designElem xmlns:p16="http://schemas.microsoft.com/office/powerpoint/2015/main" val="1"/>
+                <p16:designElem xmlns="" xmlns:p16="http://schemas.microsoft.com/office/powerpoint/2015/main" val="1"/>
               </p:ext>
             </p:extLst>
           </p:nvPr>
@@ -19369,7 +18561,7 @@
           <p:cNvPr id="7" name="Title 3">
             <a:extLst>
               <a:ext uri="{FF2B5EF4-FFF2-40B4-BE49-F238E27FC236}">
-                <a16:creationId xmlns:a16="http://schemas.microsoft.com/office/drawing/2014/main" id="{AA9E537E-8F1D-CE1E-C433-D916E2A818CB}"/>
+                <a16:creationId xmlns="" xmlns:a16="http://schemas.microsoft.com/office/drawing/2014/main" id="{AA9E537E-8F1D-CE1E-C433-D916E2A818CB}"/>
               </a:ext>
             </a:extLst>
           </p:cNvPr>
@@ -19487,10 +18679,10 @@
           <p:cNvPr id="25" name="Rectangle 24">
             <a:extLst>
               <a:ext uri="{FF2B5EF4-FFF2-40B4-BE49-F238E27FC236}">
-                <a16:creationId xmlns:a16="http://schemas.microsoft.com/office/drawing/2014/main" id="{970450C2-785F-4B9A-ADCF-A3081A1CF7EF}"/>
+                <a16:creationId xmlns="" xmlns:a16="http://schemas.microsoft.com/office/drawing/2014/main" id="{970450C2-785F-4B9A-ADCF-A3081A1CF7EF}"/>
               </a:ext>
               <a:ext uri="{C183D7F6-B498-43B3-948B-1728B52AA6E4}">
-                <adec:decorative xmlns:adec="http://schemas.microsoft.com/office/drawing/2017/decorative" val="1"/>
+                <adec:decorative xmlns="" xmlns:adec="http://schemas.microsoft.com/office/drawing/2017/decorative" val="1"/>
               </a:ext>
             </a:extLst>
           </p:cNvPr>
@@ -19500,7 +18692,7 @@
           <p:nvPr>
             <p:extLst>
               <p:ext uri="{386F3935-93C4-4BCD-93E2-E3B085C9AB24}">
-                <p16:designElem xmlns:p16="http://schemas.microsoft.com/office/powerpoint/2015/main" val="1"/>
+                <p16:designElem xmlns="" xmlns:p16="http://schemas.microsoft.com/office/powerpoint/2015/main" val="1"/>
               </p:ext>
             </p:extLst>
           </p:nvPr>
@@ -19548,10 +18740,10 @@
           <p:cNvPr id="27" name="Rectangle 26">
             <a:extLst>
               <a:ext uri="{FF2B5EF4-FFF2-40B4-BE49-F238E27FC236}">
-                <a16:creationId xmlns:a16="http://schemas.microsoft.com/office/drawing/2014/main" id="{6616FE08-2FA4-454F-8805-C2B340EE8CB0}"/>
+                <a16:creationId xmlns="" xmlns:a16="http://schemas.microsoft.com/office/drawing/2014/main" id="{6616FE08-2FA4-454F-8805-C2B340EE8CB0}"/>
               </a:ext>
               <a:ext uri="{C183D7F6-B498-43B3-948B-1728B52AA6E4}">
-                <adec:decorative xmlns:adec="http://schemas.microsoft.com/office/drawing/2017/decorative" val="1"/>
+                <adec:decorative xmlns="" xmlns:adec="http://schemas.microsoft.com/office/drawing/2017/decorative" val="1"/>
               </a:ext>
             </a:extLst>
           </p:cNvPr>
@@ -19561,7 +18753,7 @@
           <p:nvPr>
             <p:extLst>
               <p:ext uri="{386F3935-93C4-4BCD-93E2-E3B085C9AB24}">
-                <p16:designElem xmlns:p16="http://schemas.microsoft.com/office/powerpoint/2015/main" val="1"/>
+                <p16:designElem xmlns="" xmlns:p16="http://schemas.microsoft.com/office/powerpoint/2015/main" val="1"/>
               </p:ext>
             </p:extLst>
           </p:nvPr>
@@ -19609,10 +18801,10 @@
           <p:cNvPr id="29" name="Rectangle 28">
             <a:extLst>
               <a:ext uri="{FF2B5EF4-FFF2-40B4-BE49-F238E27FC236}">
-                <a16:creationId xmlns:a16="http://schemas.microsoft.com/office/drawing/2014/main" id="{AD6FD8DB-BEB0-487A-910E-E4D3E89D7389}"/>
+                <a16:creationId xmlns="" xmlns:a16="http://schemas.microsoft.com/office/drawing/2014/main" id="{AD6FD8DB-BEB0-487A-910E-E4D3E89D7389}"/>
               </a:ext>
               <a:ext uri="{C183D7F6-B498-43B3-948B-1728B52AA6E4}">
-                <adec:decorative xmlns:adec="http://schemas.microsoft.com/office/drawing/2017/decorative" val="1"/>
+                <adec:decorative xmlns="" xmlns:adec="http://schemas.microsoft.com/office/drawing/2017/decorative" val="1"/>
               </a:ext>
             </a:extLst>
           </p:cNvPr>
@@ -19622,7 +18814,7 @@
           <p:nvPr>
             <p:extLst>
               <p:ext uri="{386F3935-93C4-4BCD-93E2-E3B085C9AB24}">
-                <p16:designElem xmlns:p16="http://schemas.microsoft.com/office/powerpoint/2015/main" val="1"/>
+                <p16:designElem xmlns="" xmlns:p16="http://schemas.microsoft.com/office/powerpoint/2015/main" val="1"/>
               </p:ext>
             </p:extLst>
           </p:nvPr>
@@ -19670,10 +18862,10 @@
           <p:cNvPr id="31" name="Rectangle 30">
             <a:extLst>
               <a:ext uri="{FF2B5EF4-FFF2-40B4-BE49-F238E27FC236}">
-                <a16:creationId xmlns:a16="http://schemas.microsoft.com/office/drawing/2014/main" id="{E7F0B04F-9887-478F-B1F0-5B28D467D121}"/>
+                <a16:creationId xmlns="" xmlns:a16="http://schemas.microsoft.com/office/drawing/2014/main" id="{E7F0B04F-9887-478F-B1F0-5B28D467D121}"/>
               </a:ext>
               <a:ext uri="{C183D7F6-B498-43B3-948B-1728B52AA6E4}">
-                <adec:decorative xmlns:adec="http://schemas.microsoft.com/office/drawing/2017/decorative" val="1"/>
+                <adec:decorative xmlns="" xmlns:adec="http://schemas.microsoft.com/office/drawing/2017/decorative" val="1"/>
               </a:ext>
             </a:extLst>
           </p:cNvPr>
@@ -19683,7 +18875,7 @@
           <p:nvPr>
             <p:extLst>
               <p:ext uri="{386F3935-93C4-4BCD-93E2-E3B085C9AB24}">
-                <p16:designElem xmlns:p16="http://schemas.microsoft.com/office/powerpoint/2015/main" val="1"/>
+                <p16:designElem xmlns="" xmlns:p16="http://schemas.microsoft.com/office/powerpoint/2015/main" val="1"/>
               </p:ext>
             </p:extLst>
           </p:nvPr>
@@ -19735,7 +18927,7 @@
           <p:cNvPr id="20" name="Graphic 19" descr="Classroom">
             <a:extLst>
               <a:ext uri="{FF2B5EF4-FFF2-40B4-BE49-F238E27FC236}">
-                <a16:creationId xmlns:a16="http://schemas.microsoft.com/office/drawing/2014/main" id="{319CF8DE-3F88-B603-313D-CB7F42DE8C8F}"/>
+                <a16:creationId xmlns="" xmlns:a16="http://schemas.microsoft.com/office/drawing/2014/main" id="{319CF8DE-3F88-B603-313D-CB7F42DE8C8F}"/>
               </a:ext>
             </a:extLst>
           </p:cNvPr>
@@ -19751,7 +18943,7 @@
                 <a14:useLocalDpi xmlns:a14="http://schemas.microsoft.com/office/drawing/2010/main" val="0"/>
               </a:ext>
               <a:ext uri="{96DAC541-7B7A-43D3-8B79-37D633B846F1}">
-                <asvg:svgBlip xmlns:asvg="http://schemas.microsoft.com/office/drawing/2016/SVG/main" r:embed="rId3"/>
+                <asvg:svgBlip xmlns="" xmlns:asvg="http://schemas.microsoft.com/office/drawing/2016/SVG/main" r:embed="rId3"/>
               </a:ext>
             </a:extLst>
           </a:blip>
@@ -19774,7 +18966,7 @@
           <p:cNvPr id="9" name="TextBox 8">
             <a:extLst>
               <a:ext uri="{FF2B5EF4-FFF2-40B4-BE49-F238E27FC236}">
-                <a16:creationId xmlns:a16="http://schemas.microsoft.com/office/drawing/2014/main" id="{0B0DB645-E53B-7D27-B28E-902D6BB9DE4D}"/>
+                <a16:creationId xmlns="" xmlns:a16="http://schemas.microsoft.com/office/drawing/2014/main" id="{0B0DB645-E53B-7D27-B28E-902D6BB9DE4D}"/>
               </a:ext>
             </a:extLst>
           </p:cNvPr>
@@ -19946,7 +19138,7 @@
           <p:cNvPr id="5" name="Slide Number Placeholder 4">
             <a:extLst>
               <a:ext uri="{FF2B5EF4-FFF2-40B4-BE49-F238E27FC236}">
-                <a16:creationId xmlns:a16="http://schemas.microsoft.com/office/drawing/2014/main" id="{2687D6E6-D5FA-4C9E-C76D-CC433D92DBC4}"/>
+                <a16:creationId xmlns="" xmlns:a16="http://schemas.microsoft.com/office/drawing/2014/main" id="{2687D6E6-D5FA-4C9E-C76D-CC433D92DBC4}"/>
               </a:ext>
             </a:extLst>
           </p:cNvPr>
@@ -20030,7 +19222,7 @@
           <p:cNvPr id="7" name="Title 3">
             <a:extLst>
               <a:ext uri="{FF2B5EF4-FFF2-40B4-BE49-F238E27FC236}">
-                <a16:creationId xmlns:a16="http://schemas.microsoft.com/office/drawing/2014/main" id="{AA9E537E-8F1D-CE1E-C433-D916E2A818CB}"/>
+                <a16:creationId xmlns="" xmlns:a16="http://schemas.microsoft.com/office/drawing/2014/main" id="{AA9E537E-8F1D-CE1E-C433-D916E2A818CB}"/>
               </a:ext>
             </a:extLst>
           </p:cNvPr>
@@ -20169,7 +19361,7 @@
           <p:cNvPr id="5" name="Slide Number Placeholder 4">
             <a:extLst>
               <a:ext uri="{FF2B5EF4-FFF2-40B4-BE49-F238E27FC236}">
-                <a16:creationId xmlns:a16="http://schemas.microsoft.com/office/drawing/2014/main" id="{2687D6E6-D5FA-4C9E-C76D-CC433D92DBC4}"/>
+                <a16:creationId xmlns="" xmlns:a16="http://schemas.microsoft.com/office/drawing/2014/main" id="{2687D6E6-D5FA-4C9E-C76D-CC433D92DBC4}"/>
               </a:ext>
             </a:extLst>
           </p:cNvPr>
@@ -20224,7 +19416,7 @@
           <p:cNvPr id="9" name="TextBox 8">
             <a:extLst>
               <a:ext uri="{FF2B5EF4-FFF2-40B4-BE49-F238E27FC236}">
-                <a16:creationId xmlns:a16="http://schemas.microsoft.com/office/drawing/2014/main" id="{B5295F40-8CA0-038A-7EDC-4E2C87270AEB}"/>
+                <a16:creationId xmlns="" xmlns:a16="http://schemas.microsoft.com/office/drawing/2014/main" id="{B5295F40-8CA0-038A-7EDC-4E2C87270AEB}"/>
               </a:ext>
             </a:extLst>
           </p:cNvPr>
@@ -20291,7 +19483,7 @@
           <p:cNvPr id="11" name="TextBox 10">
             <a:extLst>
               <a:ext uri="{FF2B5EF4-FFF2-40B4-BE49-F238E27FC236}">
-                <a16:creationId xmlns:a16="http://schemas.microsoft.com/office/drawing/2014/main" id="{22AE1F48-CDD7-4A84-D2A9-A0E6FE21100D}"/>
+                <a16:creationId xmlns="" xmlns:a16="http://schemas.microsoft.com/office/drawing/2014/main" id="{22AE1F48-CDD7-4A84-D2A9-A0E6FE21100D}"/>
               </a:ext>
             </a:extLst>
           </p:cNvPr>
@@ -20407,7 +19599,7 @@
               </a:rPr>
               <a:t>Promising approach for anomaly detection and prediction in a variety of applications in sectors, such as healthcare, finance, etc.</a:t>
             </a:r>
-            <a:endParaRPr lang="en-DE" sz="1700" dirty="0">
+            <a:endParaRPr lang="x-none" sz="1700" dirty="0">
               <a:latin typeface="Franklin Gothic Book (Body)"/>
             </a:endParaRPr>
           </a:p>
@@ -20418,7 +19610,7 @@
           <p:cNvPr id="12" name="Image2">
             <a:extLst>
               <a:ext uri="{FF2B5EF4-FFF2-40B4-BE49-F238E27FC236}">
-                <a16:creationId xmlns:a16="http://schemas.microsoft.com/office/drawing/2014/main" id="{73EA4231-A7DA-22AA-589E-595ACC58910B}"/>
+                <a16:creationId xmlns="" xmlns:a16="http://schemas.microsoft.com/office/drawing/2014/main" id="{73EA4231-A7DA-22AA-589E-595ACC58910B}"/>
               </a:ext>
             </a:extLst>
           </p:cNvPr>
@@ -20478,7 +19670,7 @@
           <p:cNvPr id="5" name="Slide Number Placeholder 4">
             <a:extLst>
               <a:ext uri="{FF2B5EF4-FFF2-40B4-BE49-F238E27FC236}">
-                <a16:creationId xmlns:a16="http://schemas.microsoft.com/office/drawing/2014/main" id="{2687D6E6-D5FA-4C9E-C76D-CC433D92DBC4}"/>
+                <a16:creationId xmlns="" xmlns:a16="http://schemas.microsoft.com/office/drawing/2014/main" id="{2687D6E6-D5FA-4C9E-C76D-CC433D92DBC4}"/>
               </a:ext>
             </a:extLst>
           </p:cNvPr>
@@ -20513,7 +19705,7 @@
           <p:cNvPr id="7" name="Title 3">
             <a:extLst>
               <a:ext uri="{FF2B5EF4-FFF2-40B4-BE49-F238E27FC236}">
-                <a16:creationId xmlns:a16="http://schemas.microsoft.com/office/drawing/2014/main" id="{AA9E537E-8F1D-CE1E-C433-D916E2A818CB}"/>
+                <a16:creationId xmlns="" xmlns:a16="http://schemas.microsoft.com/office/drawing/2014/main" id="{AA9E537E-8F1D-CE1E-C433-D916E2A818CB}"/>
               </a:ext>
             </a:extLst>
           </p:cNvPr>
@@ -20631,7 +19823,7 @@
           <p:cNvPr id="6" name="TextBox 5">
             <a:extLst>
               <a:ext uri="{FF2B5EF4-FFF2-40B4-BE49-F238E27FC236}">
-                <a16:creationId xmlns:a16="http://schemas.microsoft.com/office/drawing/2014/main" id="{7CAEE917-6213-887E-9179-322B3B4AF610}"/>
+                <a16:creationId xmlns="" xmlns:a16="http://schemas.microsoft.com/office/drawing/2014/main" id="{7CAEE917-6213-887E-9179-322B3B4AF610}"/>
               </a:ext>
             </a:extLst>
           </p:cNvPr>
@@ -20667,7 +19859,7 @@
           <p:cNvPr id="9" name="TextBox 8">
             <a:extLst>
               <a:ext uri="{FF2B5EF4-FFF2-40B4-BE49-F238E27FC236}">
-                <a16:creationId xmlns:a16="http://schemas.microsoft.com/office/drawing/2014/main" id="{B0D6000C-1BE1-5094-4B79-7AC70B79C8F8}"/>
+                <a16:creationId xmlns="" xmlns:a16="http://schemas.microsoft.com/office/drawing/2014/main" id="{B0D6000C-1BE1-5094-4B79-7AC70B79C8F8}"/>
               </a:ext>
             </a:extLst>
           </p:cNvPr>
@@ -20677,7 +19869,7 @@
         <p:spPr>
           <a:xfrm>
             <a:off x="961292" y="2274838"/>
-            <a:ext cx="9015046" cy="1661993"/>
+            <a:ext cx="9015046" cy="1923604"/>
           </a:xfrm>
           <a:prstGeom prst="rect">
             <a:avLst/>
@@ -20709,18 +19901,18 @@
               <a:t> </a:t>
             </a:r>
             <a:r>
-              <a:rPr lang="en-GB" sz="1700" dirty="0" err="1">
+              <a:rPr lang="en-GB" sz="1700" dirty="0" smtClean="0">
                 <a:latin typeface="Franklin Gothic Book (Body)"/>
                 <a:cs typeface="Times New Roman" panose="02020603050405020304" pitchFamily="18" charset="0"/>
               </a:rPr>
-              <a:t>cla</a:t>
+              <a:t>class </a:t>
             </a:r>
             <a:r>
               <a:rPr lang="en-GB" sz="1700" dirty="0">
                 <a:latin typeface="Franklin Gothic Book (Body)"/>
                 <a:cs typeface="Times New Roman" panose="02020603050405020304" pitchFamily="18" charset="0"/>
               </a:rPr>
-              <a:t> is good is finding patterns in data</a:t>
+              <a:t>is good is finding patterns in data</a:t>
             </a:r>
           </a:p>
           <a:p>
@@ -20764,19 +19956,16 @@
               <a:t> </a:t>
             </a:r>
             <a:r>
-              <a:rPr lang="en-GB" sz="1700" dirty="0" err="1">
+              <a:rPr lang="en-GB" sz="1700" dirty="0" smtClean="0">
                 <a:latin typeface="Franklin Gothic Book (Body)"/>
                 <a:cs typeface="Times New Roman" panose="02020603050405020304" pitchFamily="18" charset="0"/>
               </a:rPr>
-              <a:t>cla</a:t>
-            </a:r>
-            <a:r>
-              <a:rPr lang="en-GB" sz="1700" dirty="0">
-                <a:latin typeface="Franklin Gothic Book (Body)"/>
-                <a:cs typeface="Times New Roman" panose="02020603050405020304" pitchFamily="18" charset="0"/>
-              </a:rPr>
-              <a:t>.</a:t>
-            </a:r>
+              <a:t>class.</a:t>
+            </a:r>
+            <a:endParaRPr lang="en-GB" sz="1700" dirty="0">
+              <a:latin typeface="Franklin Gothic Book (Body)"/>
+              <a:cs typeface="Times New Roman" panose="02020603050405020304" pitchFamily="18" charset="0"/>
+            </a:endParaRPr>
           </a:p>
           <a:p>
             <a:pPr marL="342900" indent="-342900" algn="l">
@@ -20868,7 +20057,7 @@
           <p:cNvPr id="5" name="Slide Number Placeholder 4">
             <a:extLst>
               <a:ext uri="{FF2B5EF4-FFF2-40B4-BE49-F238E27FC236}">
-                <a16:creationId xmlns:a16="http://schemas.microsoft.com/office/drawing/2014/main" id="{2687D6E6-D5FA-4C9E-C76D-CC433D92DBC4}"/>
+                <a16:creationId xmlns="" xmlns:a16="http://schemas.microsoft.com/office/drawing/2014/main" id="{2687D6E6-D5FA-4C9E-C76D-CC433D92DBC4}"/>
               </a:ext>
             </a:extLst>
           </p:cNvPr>
@@ -20903,7 +20092,7 @@
           <p:cNvPr id="7" name="Title 3">
             <a:extLst>
               <a:ext uri="{FF2B5EF4-FFF2-40B4-BE49-F238E27FC236}">
-                <a16:creationId xmlns:a16="http://schemas.microsoft.com/office/drawing/2014/main" id="{AA9E537E-8F1D-CE1E-C433-D916E2A818CB}"/>
+                <a16:creationId xmlns="" xmlns:a16="http://schemas.microsoft.com/office/drawing/2014/main" id="{AA9E537E-8F1D-CE1E-C433-D916E2A818CB}"/>
               </a:ext>
             </a:extLst>
           </p:cNvPr>
@@ -21022,7 +20211,7 @@
           <p:cNvPr id="6" name="TextBox 5">
             <a:extLst>
               <a:ext uri="{FF2B5EF4-FFF2-40B4-BE49-F238E27FC236}">
-                <a16:creationId xmlns:a16="http://schemas.microsoft.com/office/drawing/2014/main" id="{CA28CC40-A6A1-2352-DEF5-102D5B51ECB6}"/>
+                <a16:creationId xmlns="" xmlns:a16="http://schemas.microsoft.com/office/drawing/2014/main" id="{CA28CC40-A6A1-2352-DEF5-102D5B51ECB6}"/>
               </a:ext>
             </a:extLst>
           </p:cNvPr>
@@ -21058,7 +20247,7 @@
           <p:cNvPr id="9" name="TextBox 8">
             <a:extLst>
               <a:ext uri="{FF2B5EF4-FFF2-40B4-BE49-F238E27FC236}">
-                <a16:creationId xmlns:a16="http://schemas.microsoft.com/office/drawing/2014/main" id="{0DC75764-2918-EC3E-C0B8-2C0C1F1C5EBE}"/>
+                <a16:creationId xmlns="" xmlns:a16="http://schemas.microsoft.com/office/drawing/2014/main" id="{0DC75764-2918-EC3E-C0B8-2C0C1F1C5EBE}"/>
               </a:ext>
             </a:extLst>
           </p:cNvPr>
@@ -21146,7 +20335,7 @@
               </a:rPr>
               <a:t> engine.</a:t>
             </a:r>
-            <a:endParaRPr lang="en-DE" sz="1700" dirty="0">
+            <a:endParaRPr lang="x-none" sz="1700" dirty="0">
               <a:latin typeface="Franklin Gothic Book (Body)"/>
               <a:cs typeface="Times New Roman" panose="02020603050405020304" pitchFamily="18" charset="0"/>
             </a:endParaRPr>
